--- a/deliverables/SIARM-Defense.pptx
+++ b/deliverables/SIARM-Defense.pptx
@@ -5280,7 +5280,7 @@
                 <a:ea typeface="Calibri" pitchFamily="34" charset="-122"/>
                 <a:cs typeface="Calibri" pitchFamily="34" charset="-120"/>
               </a:rPr>
-              <a:t>15 Modules Delivered</a:t>
+              <a:t>17 Modules Delivered</a:t>
             </a:r>
             <a:endParaRPr lang="en-US" sz="3200" dirty="0"/>
           </a:p>
@@ -5739,7 +5739,7 @@
                 <a:ea typeface="Calibri" pitchFamily="34" charset="-122"/>
                 <a:cs typeface="Calibri" pitchFamily="34" charset="-120"/>
               </a:rPr>
-              <a:t>Results &amp; grade entry</a:t>
+              <a:t>Results &amp; printable grade sheet</a:t>
             </a:r>
             <a:endParaRPr lang="en-US" sz="1200" dirty="0"/>
           </a:p>
@@ -6895,6 +6895,216 @@
                 <a:cs typeface="Calibri" pitchFamily="34" charset="-120"/>
               </a:rPr>
               <a:t>Institution settings</a:t>
+            </a:r>
+            <a:endParaRPr lang="en-US" sz="1200" dirty="0"/>
+          </a:p>
+        </p:txBody>
+      </p:sp>
+      <p:sp>
+        <p:nvSpPr>
+          <p:cNvPr id="49" name="Shape 47"/>
+          <p:cNvSpPr/>
+          <p:nvPr/>
+        </p:nvSpPr>
+        <p:spPr>
+          <a:xfrm>
+            <a:off x="548640" y="5989320"/>
+            <a:ext cx="3657600" cy="685800"/>
+          </a:xfrm>
+          <a:prstGeom prst="roundRect">
+            <a:avLst>
+              <a:gd name="adj" fmla="val 10667"/>
+            </a:avLst>
+          </a:prstGeom>
+          <a:solidFill>
+            <a:srgbClr val="EFF4FF"/>
+          </a:solidFill>
+          <a:ln w="12700">
+            <a:solidFill>
+              <a:srgbClr val="1E3AA0"/>
+            </a:solidFill>
+            <a:prstDash val="solid"/>
+          </a:ln>
+        </p:spPr>
+      </p:sp>
+      <p:sp>
+        <p:nvSpPr>
+          <p:cNvPr id="50" name="Text 48"/>
+          <p:cNvSpPr/>
+          <p:nvPr/>
+        </p:nvSpPr>
+        <p:spPr>
+          <a:xfrm>
+            <a:off x="640080" y="6080760"/>
+            <a:ext cx="548640" cy="502920"/>
+          </a:xfrm>
+          <a:prstGeom prst="rect">
+            <a:avLst/>
+          </a:prstGeom>
+          <a:noFill/>
+          <a:ln/>
+        </p:spPr>
+        <p:txBody>
+          <a:bodyPr wrap="square" rtlCol="0" anchor="ctr"/>
+          <a:lstStyle/>
+          <a:p>
+            <a:pPr algn="ctr" indent="0" marL="0">
+              <a:buNone/>
+            </a:pPr>
+            <a:r>
+              <a:rPr lang="en-US" sz="1800" b="1" dirty="0">
+                <a:solidFill>
+                  <a:srgbClr val="E63946"/>
+                </a:solidFill>
+                <a:latin typeface="Calibri" pitchFamily="34" charset="0"/>
+                <a:ea typeface="Calibri" pitchFamily="34" charset="-122"/>
+                <a:cs typeface="Calibri" pitchFamily="34" charset="-120"/>
+              </a:rPr>
+              <a:t>16</a:t>
+            </a:r>
+            <a:endParaRPr lang="en-US" sz="1800" dirty="0"/>
+          </a:p>
+        </p:txBody>
+      </p:sp>
+      <p:sp>
+        <p:nvSpPr>
+          <p:cNvPr id="51" name="Text 49"/>
+          <p:cNvSpPr/>
+          <p:nvPr/>
+        </p:nvSpPr>
+        <p:spPr>
+          <a:xfrm>
+            <a:off x="1188720" y="6035040"/>
+            <a:ext cx="2926080" cy="594360"/>
+          </a:xfrm>
+          <a:prstGeom prst="rect">
+            <a:avLst/>
+          </a:prstGeom>
+          <a:noFill/>
+          <a:ln/>
+        </p:spPr>
+        <p:txBody>
+          <a:bodyPr wrap="square" rtlCol="0" anchor="ctr"/>
+          <a:lstStyle/>
+          <a:p>
+            <a:pPr indent="0" marL="0">
+              <a:buNone/>
+            </a:pPr>
+            <a:r>
+              <a:rPr lang="en-US" sz="1200" dirty="0">
+                <a:solidFill>
+                  <a:srgbClr val="1E293B"/>
+                </a:solidFill>
+                <a:latin typeface="Calibri" pitchFamily="34" charset="0"/>
+                <a:ea typeface="Calibri" pitchFamily="34" charset="-122"/>
+                <a:cs typeface="Calibri" pitchFamily="34" charset="-120"/>
+              </a:rPr>
+              <a:t>Tuition payment (MoMo, OM, Visa, Bank)</a:t>
+            </a:r>
+            <a:endParaRPr lang="en-US" sz="1200" dirty="0"/>
+          </a:p>
+        </p:txBody>
+      </p:sp>
+      <p:sp>
+        <p:nvSpPr>
+          <p:cNvPr id="52" name="Shape 50"/>
+          <p:cNvSpPr/>
+          <p:nvPr/>
+        </p:nvSpPr>
+        <p:spPr>
+          <a:xfrm>
+            <a:off x="4389120" y="5989320"/>
+            <a:ext cx="3657600" cy="685800"/>
+          </a:xfrm>
+          <a:prstGeom prst="roundRect">
+            <a:avLst>
+              <a:gd name="adj" fmla="val 10667"/>
+            </a:avLst>
+          </a:prstGeom>
+          <a:solidFill>
+            <a:srgbClr val="EFF4FF"/>
+          </a:solidFill>
+          <a:ln w="12700">
+            <a:solidFill>
+              <a:srgbClr val="1E3AA0"/>
+            </a:solidFill>
+            <a:prstDash val="solid"/>
+          </a:ln>
+        </p:spPr>
+      </p:sp>
+      <p:sp>
+        <p:nvSpPr>
+          <p:cNvPr id="53" name="Text 51"/>
+          <p:cNvSpPr/>
+          <p:nvPr/>
+        </p:nvSpPr>
+        <p:spPr>
+          <a:xfrm>
+            <a:off x="4480560" y="6080760"/>
+            <a:ext cx="548640" cy="502920"/>
+          </a:xfrm>
+          <a:prstGeom prst="rect">
+            <a:avLst/>
+          </a:prstGeom>
+          <a:noFill/>
+          <a:ln/>
+        </p:spPr>
+        <p:txBody>
+          <a:bodyPr wrap="square" rtlCol="0" anchor="ctr"/>
+          <a:lstStyle/>
+          <a:p>
+            <a:pPr algn="ctr" indent="0" marL="0">
+              <a:buNone/>
+            </a:pPr>
+            <a:r>
+              <a:rPr lang="en-US" sz="1800" b="1" dirty="0">
+                <a:solidFill>
+                  <a:srgbClr val="E63946"/>
+                </a:solidFill>
+                <a:latin typeface="Calibri" pitchFamily="34" charset="0"/>
+                <a:ea typeface="Calibri" pitchFamily="34" charset="-122"/>
+                <a:cs typeface="Calibri" pitchFamily="34" charset="-120"/>
+              </a:rPr>
+              <a:t>17</a:t>
+            </a:r>
+            <a:endParaRPr lang="en-US" sz="1800" dirty="0"/>
+          </a:p>
+        </p:txBody>
+      </p:sp>
+      <p:sp>
+        <p:nvSpPr>
+          <p:cNvPr id="54" name="Text 52"/>
+          <p:cNvSpPr/>
+          <p:nvPr/>
+        </p:nvSpPr>
+        <p:spPr>
+          <a:xfrm>
+            <a:off x="5029200" y="6035040"/>
+            <a:ext cx="2926080" cy="594360"/>
+          </a:xfrm>
+          <a:prstGeom prst="rect">
+            <a:avLst/>
+          </a:prstGeom>
+          <a:noFill/>
+          <a:ln/>
+        </p:spPr>
+        <p:txBody>
+          <a:bodyPr wrap="square" rtlCol="0" anchor="ctr"/>
+          <a:lstStyle/>
+          <a:p>
+            <a:pPr indent="0" marL="0">
+              <a:buNone/>
+            </a:pPr>
+            <a:r>
+              <a:rPr lang="en-US" sz="1200" dirty="0">
+                <a:solidFill>
+                  <a:srgbClr val="1E293B"/>
+                </a:solidFill>
+                <a:latin typeface="Calibri" pitchFamily="34" charset="0"/>
+                <a:ea typeface="Calibri" pitchFamily="34" charset="-122"/>
+                <a:cs typeface="Calibri" pitchFamily="34" charset="-120"/>
+              </a:rPr>
+              <a:t>Student ID card generator</a:t>
             </a:r>
             <a:endParaRPr lang="en-US" sz="1200" dirty="0"/>
           </a:p>

--- a/deliverables/SIARM-Defense.pptx
+++ b/deliverables/SIARM-Defense.pptx
@@ -5280,7 +5280,7 @@
                 <a:ea typeface="Calibri" pitchFamily="34" charset="-122"/>
                 <a:cs typeface="Calibri" pitchFamily="34" charset="-120"/>
               </a:rPr>
-              <a:t>17 Modules Delivered</a:t>
+              <a:t>19 Modules Delivered</a:t>
             </a:r>
             <a:endParaRPr lang="en-US" sz="3200" dirty="0"/>
           </a:p>
@@ -5634,7 +5634,7 @@
                 <a:ea typeface="Calibri" pitchFamily="34" charset="-122"/>
                 <a:cs typeface="Calibri" pitchFamily="34" charset="-120"/>
               </a:rPr>
-              <a:t>Smart timetable + AI optimization</a:t>
+              <a:t>3-specialty IUGET timetable (SWE/CNSM/BST)</a:t>
             </a:r>
             <a:endParaRPr lang="en-US" sz="1200" dirty="0"/>
           </a:p>
@@ -7105,6 +7105,216 @@
                 <a:cs typeface="Calibri" pitchFamily="34" charset="-120"/>
               </a:rPr>
               <a:t>Student ID card generator</a:t>
+            </a:r>
+            <a:endParaRPr lang="en-US" sz="1200" dirty="0"/>
+          </a:p>
+        </p:txBody>
+      </p:sp>
+      <p:sp>
+        <p:nvSpPr>
+          <p:cNvPr id="55" name="Shape 53"/>
+          <p:cNvSpPr/>
+          <p:nvPr/>
+        </p:nvSpPr>
+        <p:spPr>
+          <a:xfrm>
+            <a:off x="8229600" y="5989320"/>
+            <a:ext cx="3657600" cy="685800"/>
+          </a:xfrm>
+          <a:prstGeom prst="roundRect">
+            <a:avLst>
+              <a:gd name="adj" fmla="val 10667"/>
+            </a:avLst>
+          </a:prstGeom>
+          <a:solidFill>
+            <a:srgbClr val="EFF4FF"/>
+          </a:solidFill>
+          <a:ln w="12700">
+            <a:solidFill>
+              <a:srgbClr val="1E3AA0"/>
+            </a:solidFill>
+            <a:prstDash val="solid"/>
+          </a:ln>
+        </p:spPr>
+      </p:sp>
+      <p:sp>
+        <p:nvSpPr>
+          <p:cNvPr id="56" name="Text 54"/>
+          <p:cNvSpPr/>
+          <p:nvPr/>
+        </p:nvSpPr>
+        <p:spPr>
+          <a:xfrm>
+            <a:off x="8321040" y="6080760"/>
+            <a:ext cx="548640" cy="502920"/>
+          </a:xfrm>
+          <a:prstGeom prst="rect">
+            <a:avLst/>
+          </a:prstGeom>
+          <a:noFill/>
+          <a:ln/>
+        </p:spPr>
+        <p:txBody>
+          <a:bodyPr wrap="square" rtlCol="0" anchor="ctr"/>
+          <a:lstStyle/>
+          <a:p>
+            <a:pPr algn="ctr" indent="0" marL="0">
+              <a:buNone/>
+            </a:pPr>
+            <a:r>
+              <a:rPr lang="en-US" sz="1800" b="1" dirty="0">
+                <a:solidFill>
+                  <a:srgbClr val="E63946"/>
+                </a:solidFill>
+                <a:latin typeface="Calibri" pitchFamily="34" charset="0"/>
+                <a:ea typeface="Calibri" pitchFamily="34" charset="-122"/>
+                <a:cs typeface="Calibri" pitchFamily="34" charset="-120"/>
+              </a:rPr>
+              <a:t>18</a:t>
+            </a:r>
+            <a:endParaRPr lang="en-US" sz="1800" dirty="0"/>
+          </a:p>
+        </p:txBody>
+      </p:sp>
+      <p:sp>
+        <p:nvSpPr>
+          <p:cNvPr id="57" name="Text 55"/>
+          <p:cNvSpPr/>
+          <p:nvPr/>
+        </p:nvSpPr>
+        <p:spPr>
+          <a:xfrm>
+            <a:off x="8869680" y="6035040"/>
+            <a:ext cx="2926080" cy="594360"/>
+          </a:xfrm>
+          <a:prstGeom prst="rect">
+            <a:avLst/>
+          </a:prstGeom>
+          <a:noFill/>
+          <a:ln/>
+        </p:spPr>
+        <p:txBody>
+          <a:bodyPr wrap="square" rtlCol="0" anchor="ctr"/>
+          <a:lstStyle/>
+          <a:p>
+            <a:pPr indent="0" marL="0">
+              <a:buNone/>
+            </a:pPr>
+            <a:r>
+              <a:rPr lang="en-US" sz="1200" dirty="0">
+                <a:solidFill>
+                  <a:srgbClr val="1E293B"/>
+                </a:solidFill>
+                <a:latin typeface="Calibri" pitchFamily="34" charset="0"/>
+                <a:ea typeface="Calibri" pitchFamily="34" charset="-122"/>
+                <a:cs typeface="Calibri" pitchFamily="34" charset="-120"/>
+              </a:rPr>
+              <a:t>PWA / Offline / Installable</a:t>
+            </a:r>
+            <a:endParaRPr lang="en-US" sz="1200" dirty="0"/>
+          </a:p>
+        </p:txBody>
+      </p:sp>
+      <p:sp>
+        <p:nvSpPr>
+          <p:cNvPr id="58" name="Shape 56"/>
+          <p:cNvSpPr/>
+          <p:nvPr/>
+        </p:nvSpPr>
+        <p:spPr>
+          <a:xfrm>
+            <a:off x="548640" y="6858000"/>
+            <a:ext cx="3657600" cy="685800"/>
+          </a:xfrm>
+          <a:prstGeom prst="roundRect">
+            <a:avLst>
+              <a:gd name="adj" fmla="val 10667"/>
+            </a:avLst>
+          </a:prstGeom>
+          <a:solidFill>
+            <a:srgbClr val="EFF4FF"/>
+          </a:solidFill>
+          <a:ln w="12700">
+            <a:solidFill>
+              <a:srgbClr val="1E3AA0"/>
+            </a:solidFill>
+            <a:prstDash val="solid"/>
+          </a:ln>
+        </p:spPr>
+      </p:sp>
+      <p:sp>
+        <p:nvSpPr>
+          <p:cNvPr id="59" name="Text 57"/>
+          <p:cNvSpPr/>
+          <p:nvPr/>
+        </p:nvSpPr>
+        <p:spPr>
+          <a:xfrm>
+            <a:off x="640080" y="6949440"/>
+            <a:ext cx="548640" cy="502920"/>
+          </a:xfrm>
+          <a:prstGeom prst="rect">
+            <a:avLst/>
+          </a:prstGeom>
+          <a:noFill/>
+          <a:ln/>
+        </p:spPr>
+        <p:txBody>
+          <a:bodyPr wrap="square" rtlCol="0" anchor="ctr"/>
+          <a:lstStyle/>
+          <a:p>
+            <a:pPr algn="ctr" indent="0" marL="0">
+              <a:buNone/>
+            </a:pPr>
+            <a:r>
+              <a:rPr lang="en-US" sz="1800" b="1" dirty="0">
+                <a:solidFill>
+                  <a:srgbClr val="E63946"/>
+                </a:solidFill>
+                <a:latin typeface="Calibri" pitchFamily="34" charset="0"/>
+                <a:ea typeface="Calibri" pitchFamily="34" charset="-122"/>
+                <a:cs typeface="Calibri" pitchFamily="34" charset="-120"/>
+              </a:rPr>
+              <a:t>19</a:t>
+            </a:r>
+            <a:endParaRPr lang="en-US" sz="1800" dirty="0"/>
+          </a:p>
+        </p:txBody>
+      </p:sp>
+      <p:sp>
+        <p:nvSpPr>
+          <p:cNvPr id="60" name="Text 58"/>
+          <p:cNvSpPr/>
+          <p:nvPr/>
+        </p:nvSpPr>
+        <p:spPr>
+          <a:xfrm>
+            <a:off x="1188720" y="6903720"/>
+            <a:ext cx="2926080" cy="594360"/>
+          </a:xfrm>
+          <a:prstGeom prst="rect">
+            <a:avLst/>
+          </a:prstGeom>
+          <a:noFill/>
+          <a:ln/>
+        </p:spPr>
+        <p:txBody>
+          <a:bodyPr wrap="square" rtlCol="0" anchor="ctr"/>
+          <a:lstStyle/>
+          <a:p>
+            <a:pPr indent="0" marL="0">
+              <a:buNone/>
+            </a:pPr>
+            <a:r>
+              <a:rPr lang="en-US" sz="1200" dirty="0">
+                <a:solidFill>
+                  <a:srgbClr val="1E293B"/>
+                </a:solidFill>
+                <a:latin typeface="Calibri" pitchFamily="34" charset="0"/>
+                <a:ea typeface="Calibri" pitchFamily="34" charset="-122"/>
+                <a:cs typeface="Calibri" pitchFamily="34" charset="-120"/>
+              </a:rPr>
+              <a:t>Command palette (Cmd+K)</a:t>
             </a:r>
             <a:endParaRPr lang="en-US" sz="1200" dirty="0"/>
           </a:p>

--- a/deliverables/SIARM-Defense.pptx
+++ b/deliverables/SIARM-Defense.pptx
@@ -9876,7 +9876,7 @@
                 <a:ea typeface="Calibri" pitchFamily="34" charset="-122"/>
                 <a:cs typeface="Calibri" pitchFamily="34" charset="-120"/>
               </a:rPr>
-              <a:t>50</a:t>
+              <a:t>52</a:t>
             </a:r>
             <a:endParaRPr lang="en-US" sz="3600" dirty="0"/>
           </a:p>
@@ -9981,7 +9981,7 @@
                 <a:ea typeface="Calibri" pitchFamily="34" charset="-122"/>
                 <a:cs typeface="Calibri" pitchFamily="34" charset="-120"/>
               </a:rPr>
-              <a:t>8,800</a:t>
+              <a:t>9,200</a:t>
             </a:r>
             <a:endParaRPr lang="en-US" sz="3600" dirty="0"/>
           </a:p>
@@ -10086,7 +10086,7 @@
                 <a:ea typeface="Calibri" pitchFamily="34" charset="-122"/>
                 <a:cs typeface="Calibri" pitchFamily="34" charset="-120"/>
               </a:rPr>
-              <a:t>22</a:t>
+              <a:t>24</a:t>
             </a:r>
             <a:endParaRPr lang="en-US" sz="3600" dirty="0"/>
           </a:p>
@@ -10191,7 +10191,7 @@
                 <a:ea typeface="Calibri" pitchFamily="34" charset="-122"/>
                 <a:cs typeface="Calibri" pitchFamily="34" charset="-120"/>
               </a:rPr>
-              <a:t>15</a:t>
+              <a:t>19</a:t>
             </a:r>
             <a:endParaRPr lang="en-US" sz="3600" dirty="0"/>
           </a:p>
@@ -10296,7 +10296,7 @@
                 <a:ea typeface="Calibri" pitchFamily="34" charset="-122"/>
                 <a:cs typeface="Calibri" pitchFamily="34" charset="-120"/>
               </a:rPr>
-              <a:t>12</a:t>
+              <a:t>14</a:t>
             </a:r>
             <a:endParaRPr lang="en-US" sz="3600" dirty="0"/>
           </a:p>
@@ -10506,7 +10506,7 @@
                 <a:ea typeface="Calibri" pitchFamily="34" charset="-122"/>
                 <a:cs typeface="Calibri" pitchFamily="34" charset="-120"/>
               </a:rPr>
-              <a:t>464 kB</a:t>
+              <a:t>478 kB</a:t>
             </a:r>
             <a:endParaRPr lang="en-US" sz="3600" dirty="0"/>
           </a:p>
@@ -14584,7 +14584,7 @@
                 <a:ea typeface="Calibri" pitchFamily="34" charset="-122"/>
                 <a:cs typeface="Calibri" pitchFamily="34" charset="-120"/>
               </a:rPr>
-              <a:t>Functional completeness — all 15 modules navigable</a:t>
+              <a:t>Functional completeness — all 19 modules navigable</a:t>
             </a:r>
             <a:endParaRPr lang="en-US" sz="1400" dirty="0"/>
           </a:p>

--- a/deliverables/SIARM-Defense.pptx
+++ b/deliverables/SIARM-Defense.pptx
@@ -30,9 +30,13 @@
     <p:sldId id="278" r:id="rId24"/>
     <p:sldId id="279" r:id="rId25"/>
     <p:sldId id="280" r:id="rId26"/>
+    <p:sldId id="281" r:id="rId27"/>
+    <p:sldId id="282" r:id="rId28"/>
+    <p:sldId id="283" r:id="rId29"/>
+    <p:sldId id="284" r:id="rId30"/>
   </p:sldIdLst>
   <p:notesMasterIdLst>
-    <p:notesMasterId r:id="rId27"/>
+    <p:notesMasterId r:id="rId31"/>
   </p:notesMasterIdLst>
   <p:sldSz cx="12192000" cy="6858000"/>
   <p:notesSz cx="6858000" cy="12192000"/>
@@ -2046,6 +2050,358 @@
             <a:fld id="{F7021451-1387-4CA6-816F-3879F97B5CBC}" type="slidenum">
               <a:rPr lang="en-US"/>
               <a:t>25</a:t>
+            </a:fld>
+            <a:endParaRPr lang="en-US"/>
+          </a:p>
+        </p:txBody>
+      </p:sp>
+    </p:spTree>
+    <p:extLst>
+      <p:ext uri="{BB962C8B-B14F-4D97-AF65-F5344CB8AC3E}">
+        <p14:creationId xmlns:p14="http://schemas.microsoft.com/office/powerpoint/2010/main" val="1024086991"/>
+      </p:ext>
+    </p:extLst>
+  </p:cSld>
+  <p:clrMapOvr>
+    <a:masterClrMapping/>
+  </p:clrMapOvr>
+</p:notes>
+</file>
+
+<file path=ppt/notesSlides/notesSlide26.xml><?xml version="1.0" encoding="utf-8"?>
+<p:notes xmlns:a="http://schemas.openxmlformats.org/drawingml/2006/main" xmlns:r="http://schemas.openxmlformats.org/officeDocument/2006/relationships" xmlns:p="http://schemas.openxmlformats.org/presentationml/2006/main">
+  <p:cSld>
+    <p:spTree>
+      <p:nvGrpSpPr>
+        <p:cNvPr id="1" name=""/>
+        <p:cNvGrpSpPr/>
+        <p:nvPr/>
+      </p:nvGrpSpPr>
+      <p:grpSpPr>
+        <a:xfrm>
+          <a:off x="0" y="0"/>
+          <a:ext cx="0" cy="0"/>
+          <a:chOff x="0" y="0"/>
+          <a:chExt cx="0" cy="0"/>
+        </a:xfrm>
+      </p:grpSpPr>
+      <p:sp>
+        <p:nvSpPr>
+          <p:cNvPr id="2" name="Slide Image Placeholder 1"/>
+          <p:cNvSpPr>
+            <a:spLocks noGrp="1" noRot="1" noChangeAspect="1"/>
+          </p:cNvSpPr>
+          <p:nvPr>
+            <p:ph type="sldImg"/>
+          </p:nvPr>
+        </p:nvSpPr>
+        <p:spPr/>
+      </p:sp>
+      <p:sp>
+        <p:nvSpPr>
+          <p:cNvPr id="3" name="Notes Placeholder 2"/>
+          <p:cNvSpPr>
+            <a:spLocks noGrp="1"/>
+          </p:cNvSpPr>
+          <p:nvPr>
+            <p:ph type="body" idx="1"/>
+          </p:nvPr>
+        </p:nvSpPr>
+        <p:spPr/>
+        <p:txBody>
+          <a:bodyPr/>
+          <a:lstStyle/>
+          <a:p>
+            <a:r>
+              <a:rPr lang="en-US" dirty="0"/>
+              <a:t/>
+            </a:r>
+            <a:endParaRPr lang="en-US" dirty="0"/>
+          </a:p>
+        </p:txBody>
+      </p:sp>
+      <p:sp>
+        <p:nvSpPr>
+          <p:cNvPr id="4" name="Slide Number Placeholder 3"/>
+          <p:cNvSpPr>
+            <a:spLocks noGrp="1"/>
+          </p:cNvSpPr>
+          <p:nvPr>
+            <p:ph type="sldNum" sz="quarter" idx="10"/>
+          </p:nvPr>
+        </p:nvSpPr>
+        <p:spPr/>
+        <p:txBody>
+          <a:bodyPr/>
+          <a:lstStyle/>
+          <a:p>
+            <a:fld id="{F7021451-1387-4CA6-816F-3879F97B5CBC}" type="slidenum">
+              <a:rPr lang="en-US"/>
+              <a:t>26</a:t>
+            </a:fld>
+            <a:endParaRPr lang="en-US"/>
+          </a:p>
+        </p:txBody>
+      </p:sp>
+    </p:spTree>
+    <p:extLst>
+      <p:ext uri="{BB962C8B-B14F-4D97-AF65-F5344CB8AC3E}">
+        <p14:creationId xmlns:p14="http://schemas.microsoft.com/office/powerpoint/2010/main" val="1024086991"/>
+      </p:ext>
+    </p:extLst>
+  </p:cSld>
+  <p:clrMapOvr>
+    <a:masterClrMapping/>
+  </p:clrMapOvr>
+</p:notes>
+</file>
+
+<file path=ppt/notesSlides/notesSlide27.xml><?xml version="1.0" encoding="utf-8"?>
+<p:notes xmlns:a="http://schemas.openxmlformats.org/drawingml/2006/main" xmlns:r="http://schemas.openxmlformats.org/officeDocument/2006/relationships" xmlns:p="http://schemas.openxmlformats.org/presentationml/2006/main">
+  <p:cSld>
+    <p:spTree>
+      <p:nvGrpSpPr>
+        <p:cNvPr id="1" name=""/>
+        <p:cNvGrpSpPr/>
+        <p:nvPr/>
+      </p:nvGrpSpPr>
+      <p:grpSpPr>
+        <a:xfrm>
+          <a:off x="0" y="0"/>
+          <a:ext cx="0" cy="0"/>
+          <a:chOff x="0" y="0"/>
+          <a:chExt cx="0" cy="0"/>
+        </a:xfrm>
+      </p:grpSpPr>
+      <p:sp>
+        <p:nvSpPr>
+          <p:cNvPr id="2" name="Slide Image Placeholder 1"/>
+          <p:cNvSpPr>
+            <a:spLocks noGrp="1" noRot="1" noChangeAspect="1"/>
+          </p:cNvSpPr>
+          <p:nvPr>
+            <p:ph type="sldImg"/>
+          </p:nvPr>
+        </p:nvSpPr>
+        <p:spPr/>
+      </p:sp>
+      <p:sp>
+        <p:nvSpPr>
+          <p:cNvPr id="3" name="Notes Placeholder 2"/>
+          <p:cNvSpPr>
+            <a:spLocks noGrp="1"/>
+          </p:cNvSpPr>
+          <p:nvPr>
+            <p:ph type="body" idx="1"/>
+          </p:nvPr>
+        </p:nvSpPr>
+        <p:spPr/>
+        <p:txBody>
+          <a:bodyPr/>
+          <a:lstStyle/>
+          <a:p>
+            <a:r>
+              <a:rPr lang="en-US" dirty="0"/>
+              <a:t/>
+            </a:r>
+            <a:endParaRPr lang="en-US" dirty="0"/>
+          </a:p>
+        </p:txBody>
+      </p:sp>
+      <p:sp>
+        <p:nvSpPr>
+          <p:cNvPr id="4" name="Slide Number Placeholder 3"/>
+          <p:cNvSpPr>
+            <a:spLocks noGrp="1"/>
+          </p:cNvSpPr>
+          <p:nvPr>
+            <p:ph type="sldNum" sz="quarter" idx="10"/>
+          </p:nvPr>
+        </p:nvSpPr>
+        <p:spPr/>
+        <p:txBody>
+          <a:bodyPr/>
+          <a:lstStyle/>
+          <a:p>
+            <a:fld id="{F7021451-1387-4CA6-816F-3879F97B5CBC}" type="slidenum">
+              <a:rPr lang="en-US"/>
+              <a:t>27</a:t>
+            </a:fld>
+            <a:endParaRPr lang="en-US"/>
+          </a:p>
+        </p:txBody>
+      </p:sp>
+    </p:spTree>
+    <p:extLst>
+      <p:ext uri="{BB962C8B-B14F-4D97-AF65-F5344CB8AC3E}">
+        <p14:creationId xmlns:p14="http://schemas.microsoft.com/office/powerpoint/2010/main" val="1024086991"/>
+      </p:ext>
+    </p:extLst>
+  </p:cSld>
+  <p:clrMapOvr>
+    <a:masterClrMapping/>
+  </p:clrMapOvr>
+</p:notes>
+</file>
+
+<file path=ppt/notesSlides/notesSlide28.xml><?xml version="1.0" encoding="utf-8"?>
+<p:notes xmlns:a="http://schemas.openxmlformats.org/drawingml/2006/main" xmlns:r="http://schemas.openxmlformats.org/officeDocument/2006/relationships" xmlns:p="http://schemas.openxmlformats.org/presentationml/2006/main">
+  <p:cSld>
+    <p:spTree>
+      <p:nvGrpSpPr>
+        <p:cNvPr id="1" name=""/>
+        <p:cNvGrpSpPr/>
+        <p:nvPr/>
+      </p:nvGrpSpPr>
+      <p:grpSpPr>
+        <a:xfrm>
+          <a:off x="0" y="0"/>
+          <a:ext cx="0" cy="0"/>
+          <a:chOff x="0" y="0"/>
+          <a:chExt cx="0" cy="0"/>
+        </a:xfrm>
+      </p:grpSpPr>
+      <p:sp>
+        <p:nvSpPr>
+          <p:cNvPr id="2" name="Slide Image Placeholder 1"/>
+          <p:cNvSpPr>
+            <a:spLocks noGrp="1" noRot="1" noChangeAspect="1"/>
+          </p:cNvSpPr>
+          <p:nvPr>
+            <p:ph type="sldImg"/>
+          </p:nvPr>
+        </p:nvSpPr>
+        <p:spPr/>
+      </p:sp>
+      <p:sp>
+        <p:nvSpPr>
+          <p:cNvPr id="3" name="Notes Placeholder 2"/>
+          <p:cNvSpPr>
+            <a:spLocks noGrp="1"/>
+          </p:cNvSpPr>
+          <p:nvPr>
+            <p:ph type="body" idx="1"/>
+          </p:nvPr>
+        </p:nvSpPr>
+        <p:spPr/>
+        <p:txBody>
+          <a:bodyPr/>
+          <a:lstStyle/>
+          <a:p>
+            <a:r>
+              <a:rPr lang="en-US" dirty="0"/>
+              <a:t/>
+            </a:r>
+            <a:endParaRPr lang="en-US" dirty="0"/>
+          </a:p>
+        </p:txBody>
+      </p:sp>
+      <p:sp>
+        <p:nvSpPr>
+          <p:cNvPr id="4" name="Slide Number Placeholder 3"/>
+          <p:cNvSpPr>
+            <a:spLocks noGrp="1"/>
+          </p:cNvSpPr>
+          <p:nvPr>
+            <p:ph type="sldNum" sz="quarter" idx="10"/>
+          </p:nvPr>
+        </p:nvSpPr>
+        <p:spPr/>
+        <p:txBody>
+          <a:bodyPr/>
+          <a:lstStyle/>
+          <a:p>
+            <a:fld id="{F7021451-1387-4CA6-816F-3879F97B5CBC}" type="slidenum">
+              <a:rPr lang="en-US"/>
+              <a:t>28</a:t>
+            </a:fld>
+            <a:endParaRPr lang="en-US"/>
+          </a:p>
+        </p:txBody>
+      </p:sp>
+    </p:spTree>
+    <p:extLst>
+      <p:ext uri="{BB962C8B-B14F-4D97-AF65-F5344CB8AC3E}">
+        <p14:creationId xmlns:p14="http://schemas.microsoft.com/office/powerpoint/2010/main" val="1024086991"/>
+      </p:ext>
+    </p:extLst>
+  </p:cSld>
+  <p:clrMapOvr>
+    <a:masterClrMapping/>
+  </p:clrMapOvr>
+</p:notes>
+</file>
+
+<file path=ppt/notesSlides/notesSlide29.xml><?xml version="1.0" encoding="utf-8"?>
+<p:notes xmlns:a="http://schemas.openxmlformats.org/drawingml/2006/main" xmlns:r="http://schemas.openxmlformats.org/officeDocument/2006/relationships" xmlns:p="http://schemas.openxmlformats.org/presentationml/2006/main">
+  <p:cSld>
+    <p:spTree>
+      <p:nvGrpSpPr>
+        <p:cNvPr id="1" name=""/>
+        <p:cNvGrpSpPr/>
+        <p:nvPr/>
+      </p:nvGrpSpPr>
+      <p:grpSpPr>
+        <a:xfrm>
+          <a:off x="0" y="0"/>
+          <a:ext cx="0" cy="0"/>
+          <a:chOff x="0" y="0"/>
+          <a:chExt cx="0" cy="0"/>
+        </a:xfrm>
+      </p:grpSpPr>
+      <p:sp>
+        <p:nvSpPr>
+          <p:cNvPr id="2" name="Slide Image Placeholder 1"/>
+          <p:cNvSpPr>
+            <a:spLocks noGrp="1" noRot="1" noChangeAspect="1"/>
+          </p:cNvSpPr>
+          <p:nvPr>
+            <p:ph type="sldImg"/>
+          </p:nvPr>
+        </p:nvSpPr>
+        <p:spPr/>
+      </p:sp>
+      <p:sp>
+        <p:nvSpPr>
+          <p:cNvPr id="3" name="Notes Placeholder 2"/>
+          <p:cNvSpPr>
+            <a:spLocks noGrp="1"/>
+          </p:cNvSpPr>
+          <p:nvPr>
+            <p:ph type="body" idx="1"/>
+          </p:nvPr>
+        </p:nvSpPr>
+        <p:spPr/>
+        <p:txBody>
+          <a:bodyPr/>
+          <a:lstStyle/>
+          <a:p>
+            <a:r>
+              <a:rPr lang="en-US" dirty="0"/>
+              <a:t/>
+            </a:r>
+            <a:endParaRPr lang="en-US" dirty="0"/>
+          </a:p>
+        </p:txBody>
+      </p:sp>
+      <p:sp>
+        <p:nvSpPr>
+          <p:cNvPr id="4" name="Slide Number Placeholder 3"/>
+          <p:cNvSpPr>
+            <a:spLocks noGrp="1"/>
+          </p:cNvSpPr>
+          <p:nvPr>
+            <p:ph type="sldNum" sz="quarter" idx="10"/>
+          </p:nvPr>
+        </p:nvSpPr>
+        <p:spPr/>
+        <p:txBody>
+          <a:bodyPr/>
+          <a:lstStyle/>
+          <a:p>
+            <a:fld id="{F7021451-1387-4CA6-816F-3879F97B5CBC}" type="slidenum">
+              <a:rPr lang="en-US"/>
+              <a:t>29</a:t>
             </a:fld>
             <a:endParaRPr lang="en-US"/>
           </a:p>
@@ -12317,7 +12673,7 @@
                 <a:ea typeface="Calibri" pitchFamily="34" charset="-122"/>
                 <a:cs typeface="Calibri" pitchFamily="34" charset="-120"/>
               </a:rPr>
-              <a:t>Achievements</a:t>
+              <a:t>Methodology</a:t>
             </a:r>
             <a:endParaRPr lang="en-US" sz="3200" dirty="0"/>
           </a:p>
@@ -12356,7 +12712,7 @@
                 <a:ea typeface="Calibri" pitchFamily="34" charset="-122"/>
                 <a:cs typeface="Calibri" pitchFamily="34" charset="-120"/>
               </a:rPr>
-              <a:t>Six concrete deliverables</a:t>
+              <a:t>Scrumban — Scrum cadence + Kanban flow</a:t>
             </a:r>
             <a:endParaRPr lang="en-US" sz="1500" dirty="0"/>
           </a:p>
@@ -12370,18 +12726,18 @@
         </p:nvSpPr>
         <p:spPr>
           <a:xfrm>
-            <a:off x="548640" y="1645920"/>
-            <a:ext cx="3657600" cy="1828800"/>
+            <a:off x="548640" y="1554480"/>
+            <a:ext cx="3657600" cy="1920240"/>
           </a:xfrm>
           <a:prstGeom prst="roundRect">
             <a:avLst>
-              <a:gd name="adj" fmla="val 6000"/>
+              <a:gd name="adj" fmla="val 7143"/>
             </a:avLst>
           </a:prstGeom>
           <a:solidFill>
             <a:srgbClr val="FFFFFF"/>
           </a:solidFill>
-          <a:ln w="12700">
+          <a:ln w="25400">
             <a:solidFill>
               <a:srgbClr val="1E3AA0"/>
             </a:solidFill>
@@ -12391,14 +12747,34 @@
       </p:sp>
       <p:sp>
         <p:nvSpPr>
-          <p:cNvPr id="5" name="Text 3"/>
-          <p:cNvSpPr/>
-          <p:nvPr/>
-        </p:nvSpPr>
-        <p:spPr>
-          <a:xfrm>
-            <a:off x="548640" y="1828800"/>
-            <a:ext cx="3657600" cy="914400"/>
+          <p:cNvPr id="5" name="Shape 3"/>
+          <p:cNvSpPr/>
+          <p:nvPr/>
+        </p:nvSpPr>
+        <p:spPr>
+          <a:xfrm>
+            <a:off x="548640" y="1554480"/>
+            <a:ext cx="3657600" cy="502920"/>
+          </a:xfrm>
+          <a:prstGeom prst="rect">
+            <a:avLst/>
+          </a:prstGeom>
+          <a:solidFill>
+            <a:srgbClr val="1E3AA0"/>
+          </a:solidFill>
+          <a:ln/>
+        </p:spPr>
+      </p:sp>
+      <p:sp>
+        <p:nvSpPr>
+          <p:cNvPr id="6" name="Text 4"/>
+          <p:cNvSpPr/>
+          <p:nvPr/>
+        </p:nvSpPr>
+        <p:spPr>
+          <a:xfrm>
+            <a:off x="548640" y="1554480"/>
+            <a:ext cx="3657600" cy="502920"/>
           </a:xfrm>
           <a:prstGeom prst="rect">
             <a:avLst/>
@@ -12414,7 +12790,46 @@
               <a:buNone/>
             </a:pPr>
             <a:r>
-              <a:rPr lang="en-US" sz="6000" b="1" dirty="0">
+              <a:rPr lang="en-US" sz="1600" b="1" dirty="0">
+                <a:solidFill>
+                  <a:srgbClr val="FFFFFF"/>
+                </a:solidFill>
+                <a:latin typeface="Calibri" pitchFamily="34" charset="0"/>
+                <a:ea typeface="Calibri" pitchFamily="34" charset="-122"/>
+                <a:cs typeface="Calibri" pitchFamily="34" charset="-120"/>
+              </a:rPr>
+              <a:t>Cadence</a:t>
+            </a:r>
+            <a:endParaRPr lang="en-US" sz="1600" dirty="0"/>
+          </a:p>
+        </p:txBody>
+      </p:sp>
+      <p:sp>
+        <p:nvSpPr>
+          <p:cNvPr id="7" name="Text 5"/>
+          <p:cNvSpPr/>
+          <p:nvPr/>
+        </p:nvSpPr>
+        <p:spPr>
+          <a:xfrm>
+            <a:off x="731520" y="2194560"/>
+            <a:ext cx="3291840" cy="1280160"/>
+          </a:xfrm>
+          <a:prstGeom prst="rect">
+            <a:avLst/>
+          </a:prstGeom>
+          <a:noFill/>
+          <a:ln/>
+        </p:spPr>
+        <p:txBody>
+          <a:bodyPr wrap="square" rtlCol="0" anchor="ctr"/>
+          <a:lstStyle/>
+          <a:p>
+            <a:pPr algn="ctr" indent="0" marL="0">
+              <a:buNone/>
+            </a:pPr>
+            <a:r>
+              <a:rPr lang="en-US" sz="2200" b="1" dirty="0">
                 <a:solidFill>
                   <a:srgbClr val="1E3AA0"/>
                 </a:solidFill>
@@ -12422,71 +12837,32 @@
                 <a:ea typeface="Calibri" pitchFamily="34" charset="-122"/>
                 <a:cs typeface="Calibri" pitchFamily="34" charset="-120"/>
               </a:rPr>
-              <a:t>53</a:t>
-            </a:r>
-            <a:endParaRPr lang="en-US" sz="6000" dirty="0"/>
-          </a:p>
-        </p:txBody>
-      </p:sp>
-      <p:sp>
-        <p:nvSpPr>
-          <p:cNvPr id="6" name="Text 4"/>
-          <p:cNvSpPr/>
-          <p:nvPr/>
-        </p:nvSpPr>
-        <p:spPr>
-          <a:xfrm>
-            <a:off x="548640" y="2926080"/>
-            <a:ext cx="3657600" cy="457200"/>
-          </a:xfrm>
-          <a:prstGeom prst="rect">
-            <a:avLst/>
-          </a:prstGeom>
-          <a:noFill/>
-          <a:ln/>
-        </p:spPr>
-        <p:txBody>
-          <a:bodyPr wrap="square" rtlCol="0" anchor="ctr"/>
-          <a:lstStyle/>
-          <a:p>
-            <a:pPr algn="ctr" indent="0" marL="0">
-              <a:buNone/>
-            </a:pPr>
-            <a:r>
-              <a:rPr lang="en-US" sz="1400" dirty="0">
-                <a:solidFill>
-                  <a:srgbClr val="1E293B"/>
-                </a:solidFill>
-                <a:latin typeface="Calibri" pitchFamily="34" charset="0"/>
-                <a:ea typeface="Calibri" pitchFamily="34" charset="-122"/>
-                <a:cs typeface="Calibri" pitchFamily="34" charset="-120"/>
-              </a:rPr>
-              <a:t>source files</a:t>
-            </a:r>
-            <a:endParaRPr lang="en-US" sz="1400" dirty="0"/>
-          </a:p>
-        </p:txBody>
-      </p:sp>
-      <p:sp>
-        <p:nvSpPr>
-          <p:cNvPr id="7" name="Shape 5"/>
-          <p:cNvSpPr/>
-          <p:nvPr/>
-        </p:nvSpPr>
-        <p:spPr>
-          <a:xfrm>
-            <a:off x="4434840" y="1645920"/>
-            <a:ext cx="3657600" cy="1828800"/>
+              <a:t>1-week sprints</a:t>
+            </a:r>
+            <a:endParaRPr lang="en-US" sz="2200" dirty="0"/>
+          </a:p>
+        </p:txBody>
+      </p:sp>
+      <p:sp>
+        <p:nvSpPr>
+          <p:cNvPr id="8" name="Shape 6"/>
+          <p:cNvSpPr/>
+          <p:nvPr/>
+        </p:nvSpPr>
+        <p:spPr>
+          <a:xfrm>
+            <a:off x="4434840" y="1554480"/>
+            <a:ext cx="3657600" cy="1920240"/>
           </a:xfrm>
           <a:prstGeom prst="roundRect">
             <a:avLst>
-              <a:gd name="adj" fmla="val 6000"/>
+              <a:gd name="adj" fmla="val 7143"/>
             </a:avLst>
           </a:prstGeom>
           <a:solidFill>
             <a:srgbClr val="FFFFFF"/>
           </a:solidFill>
-          <a:ln w="12700">
+          <a:ln w="25400">
             <a:solidFill>
               <a:srgbClr val="1E3AA0"/>
             </a:solidFill>
@@ -12496,14 +12872,34 @@
       </p:sp>
       <p:sp>
         <p:nvSpPr>
-          <p:cNvPr id="8" name="Text 6"/>
-          <p:cNvSpPr/>
-          <p:nvPr/>
-        </p:nvSpPr>
-        <p:spPr>
-          <a:xfrm>
-            <a:off x="4434840" y="1828800"/>
-            <a:ext cx="3657600" cy="914400"/>
+          <p:cNvPr id="9" name="Shape 7"/>
+          <p:cNvSpPr/>
+          <p:nvPr/>
+        </p:nvSpPr>
+        <p:spPr>
+          <a:xfrm>
+            <a:off x="4434840" y="1554480"/>
+            <a:ext cx="3657600" cy="502920"/>
+          </a:xfrm>
+          <a:prstGeom prst="rect">
+            <a:avLst/>
+          </a:prstGeom>
+          <a:solidFill>
+            <a:srgbClr val="1E3AA0"/>
+          </a:solidFill>
+          <a:ln/>
+        </p:spPr>
+      </p:sp>
+      <p:sp>
+        <p:nvSpPr>
+          <p:cNvPr id="10" name="Text 8"/>
+          <p:cNvSpPr/>
+          <p:nvPr/>
+        </p:nvSpPr>
+        <p:spPr>
+          <a:xfrm>
+            <a:off x="4434840" y="1554480"/>
+            <a:ext cx="3657600" cy="502920"/>
           </a:xfrm>
           <a:prstGeom prst="rect">
             <a:avLst/>
@@ -12519,7 +12915,46 @@
               <a:buNone/>
             </a:pPr>
             <a:r>
-              <a:rPr lang="en-US" sz="6000" b="1" dirty="0">
+              <a:rPr lang="en-US" sz="1600" b="1" dirty="0">
+                <a:solidFill>
+                  <a:srgbClr val="FFFFFF"/>
+                </a:solidFill>
+                <a:latin typeface="Calibri" pitchFamily="34" charset="0"/>
+                <a:ea typeface="Calibri" pitchFamily="34" charset="-122"/>
+                <a:cs typeface="Calibri" pitchFamily="34" charset="-120"/>
+              </a:rPr>
+              <a:t>Ceremonies</a:t>
+            </a:r>
+            <a:endParaRPr lang="en-US" sz="1600" dirty="0"/>
+          </a:p>
+        </p:txBody>
+      </p:sp>
+      <p:sp>
+        <p:nvSpPr>
+          <p:cNvPr id="11" name="Text 9"/>
+          <p:cNvSpPr/>
+          <p:nvPr/>
+        </p:nvSpPr>
+        <p:spPr>
+          <a:xfrm>
+            <a:off x="4617720" y="2194560"/>
+            <a:ext cx="3291840" cy="1280160"/>
+          </a:xfrm>
+          <a:prstGeom prst="rect">
+            <a:avLst/>
+          </a:prstGeom>
+          <a:noFill/>
+          <a:ln/>
+        </p:spPr>
+        <p:txBody>
+          <a:bodyPr wrap="square" rtlCol="0" anchor="ctr"/>
+          <a:lstStyle/>
+          <a:p>
+            <a:pPr algn="ctr" indent="0" marL="0">
+              <a:buNone/>
+            </a:pPr>
+            <a:r>
+              <a:rPr lang="en-US" sz="2200" b="1" dirty="0">
                 <a:solidFill>
                   <a:srgbClr val="1E3AA0"/>
                 </a:solidFill>
@@ -12527,71 +12962,282 @@
                 <a:ea typeface="Calibri" pitchFamily="34" charset="-122"/>
                 <a:cs typeface="Calibri" pitchFamily="34" charset="-120"/>
               </a:rPr>
-              <a:t>24</a:t>
-            </a:r>
-            <a:endParaRPr lang="en-US" sz="6000" dirty="0"/>
-          </a:p>
-        </p:txBody>
-      </p:sp>
-      <p:sp>
-        <p:nvSpPr>
-          <p:cNvPr id="9" name="Text 7"/>
-          <p:cNvSpPr/>
-          <p:nvPr/>
-        </p:nvSpPr>
-        <p:spPr>
-          <a:xfrm>
-            <a:off x="4434840" y="2926080"/>
-            <a:ext cx="3657600" cy="457200"/>
-          </a:xfrm>
-          <a:prstGeom prst="rect">
-            <a:avLst/>
-          </a:prstGeom>
-          <a:noFill/>
-          <a:ln/>
-        </p:spPr>
-        <p:txBody>
-          <a:bodyPr wrap="square" rtlCol="0" anchor="ctr"/>
-          <a:lstStyle/>
-          <a:p>
-            <a:pPr algn="ctr" indent="0" marL="0">
-              <a:buNone/>
-            </a:pPr>
-            <a:r>
-              <a:rPr lang="en-US" sz="1400" dirty="0">
-                <a:solidFill>
-                  <a:srgbClr val="1E293B"/>
-                </a:solidFill>
-                <a:latin typeface="Calibri" pitchFamily="34" charset="0"/>
-                <a:ea typeface="Calibri" pitchFamily="34" charset="-122"/>
-                <a:cs typeface="Calibri" pitchFamily="34" charset="-120"/>
-              </a:rPr>
-              <a:t>pages</a:t>
-            </a:r>
-            <a:endParaRPr lang="en-US" sz="1400" dirty="0"/>
-          </a:p>
-        </p:txBody>
-      </p:sp>
-      <p:sp>
-        <p:nvSpPr>
-          <p:cNvPr id="10" name="Shape 8"/>
-          <p:cNvSpPr/>
-          <p:nvPr/>
-        </p:nvSpPr>
-        <p:spPr>
-          <a:xfrm>
-            <a:off x="8321040" y="1645920"/>
-            <a:ext cx="3657600" cy="1828800"/>
+              <a:t>Planning · Review · Retro</a:t>
+            </a:r>
+            <a:endParaRPr lang="en-US" sz="2200" dirty="0"/>
+          </a:p>
+        </p:txBody>
+      </p:sp>
+      <p:sp>
+        <p:nvSpPr>
+          <p:cNvPr id="12" name="Shape 10"/>
+          <p:cNvSpPr/>
+          <p:nvPr/>
+        </p:nvSpPr>
+        <p:spPr>
+          <a:xfrm>
+            <a:off x="8321040" y="1554480"/>
+            <a:ext cx="3657600" cy="1920240"/>
           </a:xfrm>
           <a:prstGeom prst="roundRect">
             <a:avLst>
-              <a:gd name="adj" fmla="val 6000"/>
+              <a:gd name="adj" fmla="val 7143"/>
             </a:avLst>
           </a:prstGeom>
           <a:solidFill>
             <a:srgbClr val="FFFFFF"/>
           </a:solidFill>
-          <a:ln w="12700">
+          <a:ln w="25400">
+            <a:solidFill>
+              <a:srgbClr val="F59E0B"/>
+            </a:solidFill>
+            <a:prstDash val="solid"/>
+          </a:ln>
+        </p:spPr>
+      </p:sp>
+      <p:sp>
+        <p:nvSpPr>
+          <p:cNvPr id="13" name="Shape 11"/>
+          <p:cNvSpPr/>
+          <p:nvPr/>
+        </p:nvSpPr>
+        <p:spPr>
+          <a:xfrm>
+            <a:off x="8321040" y="1554480"/>
+            <a:ext cx="3657600" cy="502920"/>
+          </a:xfrm>
+          <a:prstGeom prst="rect">
+            <a:avLst/>
+          </a:prstGeom>
+          <a:solidFill>
+            <a:srgbClr val="F59E0B"/>
+          </a:solidFill>
+          <a:ln/>
+        </p:spPr>
+      </p:sp>
+      <p:sp>
+        <p:nvSpPr>
+          <p:cNvPr id="14" name="Text 12"/>
+          <p:cNvSpPr/>
+          <p:nvPr/>
+        </p:nvSpPr>
+        <p:spPr>
+          <a:xfrm>
+            <a:off x="8321040" y="1554480"/>
+            <a:ext cx="3657600" cy="502920"/>
+          </a:xfrm>
+          <a:prstGeom prst="rect">
+            <a:avLst/>
+          </a:prstGeom>
+          <a:noFill/>
+          <a:ln/>
+        </p:spPr>
+        <p:txBody>
+          <a:bodyPr wrap="square" rtlCol="0" anchor="ctr"/>
+          <a:lstStyle/>
+          <a:p>
+            <a:pPr algn="ctr" indent="0" marL="0">
+              <a:buNone/>
+            </a:pPr>
+            <a:r>
+              <a:rPr lang="en-US" sz="1600" b="1" dirty="0">
+                <a:solidFill>
+                  <a:srgbClr val="FFFFFF"/>
+                </a:solidFill>
+                <a:latin typeface="Calibri" pitchFamily="34" charset="0"/>
+                <a:ea typeface="Calibri" pitchFamily="34" charset="-122"/>
+                <a:cs typeface="Calibri" pitchFamily="34" charset="-120"/>
+              </a:rPr>
+              <a:t>Flow</a:t>
+            </a:r>
+            <a:endParaRPr lang="en-US" sz="1600" dirty="0"/>
+          </a:p>
+        </p:txBody>
+      </p:sp>
+      <p:sp>
+        <p:nvSpPr>
+          <p:cNvPr id="15" name="Text 13"/>
+          <p:cNvSpPr/>
+          <p:nvPr/>
+        </p:nvSpPr>
+        <p:spPr>
+          <a:xfrm>
+            <a:off x="8503920" y="2194560"/>
+            <a:ext cx="3291840" cy="1280160"/>
+          </a:xfrm>
+          <a:prstGeom prst="rect">
+            <a:avLst/>
+          </a:prstGeom>
+          <a:noFill/>
+          <a:ln/>
+        </p:spPr>
+        <p:txBody>
+          <a:bodyPr wrap="square" rtlCol="0" anchor="ctr"/>
+          <a:lstStyle/>
+          <a:p>
+            <a:pPr algn="ctr" indent="0" marL="0">
+              <a:buNone/>
+            </a:pPr>
+            <a:r>
+              <a:rPr lang="en-US" sz="2200" b="1" dirty="0">
+                <a:solidFill>
+                  <a:srgbClr val="F59E0B"/>
+                </a:solidFill>
+                <a:latin typeface="Calibri" pitchFamily="34" charset="0"/>
+                <a:ea typeface="Calibri" pitchFamily="34" charset="-122"/>
+                <a:cs typeface="Calibri" pitchFamily="34" charset="-120"/>
+              </a:rPr>
+              <a:t>WIP limit 3</a:t>
+            </a:r>
+            <a:endParaRPr lang="en-US" sz="2200" dirty="0"/>
+          </a:p>
+        </p:txBody>
+      </p:sp>
+      <p:sp>
+        <p:nvSpPr>
+          <p:cNvPr id="16" name="Shape 14"/>
+          <p:cNvSpPr/>
+          <p:nvPr/>
+        </p:nvSpPr>
+        <p:spPr>
+          <a:xfrm>
+            <a:off x="548640" y="3749040"/>
+            <a:ext cx="3657600" cy="1920240"/>
+          </a:xfrm>
+          <a:prstGeom prst="roundRect">
+            <a:avLst>
+              <a:gd name="adj" fmla="val 7143"/>
+            </a:avLst>
+          </a:prstGeom>
+          <a:solidFill>
+            <a:srgbClr val="FFFFFF"/>
+          </a:solidFill>
+          <a:ln w="25400">
+            <a:solidFill>
+              <a:srgbClr val="10B981"/>
+            </a:solidFill>
+            <a:prstDash val="solid"/>
+          </a:ln>
+        </p:spPr>
+      </p:sp>
+      <p:sp>
+        <p:nvSpPr>
+          <p:cNvPr id="17" name="Shape 15"/>
+          <p:cNvSpPr/>
+          <p:nvPr/>
+        </p:nvSpPr>
+        <p:spPr>
+          <a:xfrm>
+            <a:off x="548640" y="3749040"/>
+            <a:ext cx="3657600" cy="502920"/>
+          </a:xfrm>
+          <a:prstGeom prst="rect">
+            <a:avLst/>
+          </a:prstGeom>
+          <a:solidFill>
+            <a:srgbClr val="10B981"/>
+          </a:solidFill>
+          <a:ln/>
+        </p:spPr>
+      </p:sp>
+      <p:sp>
+        <p:nvSpPr>
+          <p:cNvPr id="18" name="Text 16"/>
+          <p:cNvSpPr/>
+          <p:nvPr/>
+        </p:nvSpPr>
+        <p:spPr>
+          <a:xfrm>
+            <a:off x="548640" y="3749040"/>
+            <a:ext cx="3657600" cy="502920"/>
+          </a:xfrm>
+          <a:prstGeom prst="rect">
+            <a:avLst/>
+          </a:prstGeom>
+          <a:noFill/>
+          <a:ln/>
+        </p:spPr>
+        <p:txBody>
+          <a:bodyPr wrap="square" rtlCol="0" anchor="ctr"/>
+          <a:lstStyle/>
+          <a:p>
+            <a:pPr algn="ctr" indent="0" marL="0">
+              <a:buNone/>
+            </a:pPr>
+            <a:r>
+              <a:rPr lang="en-US" sz="1600" b="1" dirty="0">
+                <a:solidFill>
+                  <a:srgbClr val="FFFFFF"/>
+                </a:solidFill>
+                <a:latin typeface="Calibri" pitchFamily="34" charset="0"/>
+                <a:ea typeface="Calibri" pitchFamily="34" charset="-122"/>
+                <a:cs typeface="Calibri" pitchFamily="34" charset="-120"/>
+              </a:rPr>
+              <a:t>Discipline</a:t>
+            </a:r>
+            <a:endParaRPr lang="en-US" sz="1600" dirty="0"/>
+          </a:p>
+        </p:txBody>
+      </p:sp>
+      <p:sp>
+        <p:nvSpPr>
+          <p:cNvPr id="19" name="Text 17"/>
+          <p:cNvSpPr/>
+          <p:nvPr/>
+        </p:nvSpPr>
+        <p:spPr>
+          <a:xfrm>
+            <a:off x="731520" y="4389120"/>
+            <a:ext cx="3291840" cy="1280160"/>
+          </a:xfrm>
+          <a:prstGeom prst="rect">
+            <a:avLst/>
+          </a:prstGeom>
+          <a:noFill/>
+          <a:ln/>
+        </p:spPr>
+        <p:txBody>
+          <a:bodyPr wrap="square" rtlCol="0" anchor="ctr"/>
+          <a:lstStyle/>
+          <a:p>
+            <a:pPr algn="ctr" indent="0" marL="0">
+              <a:buNone/>
+            </a:pPr>
+            <a:r>
+              <a:rPr lang="en-US" sz="2200" b="1" dirty="0">
+                <a:solidFill>
+                  <a:srgbClr val="10B981"/>
+                </a:solidFill>
+                <a:latin typeface="Calibri" pitchFamily="34" charset="0"/>
+                <a:ea typeface="Calibri" pitchFamily="34" charset="-122"/>
+                <a:cs typeface="Calibri" pitchFamily="34" charset="-120"/>
+              </a:rPr>
+              <a:t>Definition of Done</a:t>
+            </a:r>
+            <a:endParaRPr lang="en-US" sz="2200" dirty="0"/>
+          </a:p>
+        </p:txBody>
+      </p:sp>
+      <p:sp>
+        <p:nvSpPr>
+          <p:cNvPr id="20" name="Shape 18"/>
+          <p:cNvSpPr/>
+          <p:nvPr/>
+        </p:nvSpPr>
+        <p:spPr>
+          <a:xfrm>
+            <a:off x="4434840" y="3749040"/>
+            <a:ext cx="3657600" cy="1920240"/>
+          </a:xfrm>
+          <a:prstGeom prst="roundRect">
+            <a:avLst>
+              <a:gd name="adj" fmla="val 7143"/>
+            </a:avLst>
+          </a:prstGeom>
+          <a:solidFill>
+            <a:srgbClr val="FFFFFF"/>
+          </a:solidFill>
+          <a:ln w="25400">
             <a:solidFill>
               <a:srgbClr val="1E3AA0"/>
             </a:solidFill>
@@ -12601,14 +13247,34 @@
       </p:sp>
       <p:sp>
         <p:nvSpPr>
-          <p:cNvPr id="11" name="Text 9"/>
-          <p:cNvSpPr/>
-          <p:nvPr/>
-        </p:nvSpPr>
-        <p:spPr>
-          <a:xfrm>
-            <a:off x="8321040" y="1828800"/>
-            <a:ext cx="3657600" cy="914400"/>
+          <p:cNvPr id="21" name="Shape 19"/>
+          <p:cNvSpPr/>
+          <p:nvPr/>
+        </p:nvSpPr>
+        <p:spPr>
+          <a:xfrm>
+            <a:off x="4434840" y="3749040"/>
+            <a:ext cx="3657600" cy="502920"/>
+          </a:xfrm>
+          <a:prstGeom prst="rect">
+            <a:avLst/>
+          </a:prstGeom>
+          <a:solidFill>
+            <a:srgbClr val="1E3AA0"/>
+          </a:solidFill>
+          <a:ln/>
+        </p:spPr>
+      </p:sp>
+      <p:sp>
+        <p:nvSpPr>
+          <p:cNvPr id="22" name="Text 20"/>
+          <p:cNvSpPr/>
+          <p:nvPr/>
+        </p:nvSpPr>
+        <p:spPr>
+          <a:xfrm>
+            <a:off x="4434840" y="3749040"/>
+            <a:ext cx="3657600" cy="502920"/>
           </a:xfrm>
           <a:prstGeom prst="rect">
             <a:avLst/>
@@ -12624,7 +13290,46 @@
               <a:buNone/>
             </a:pPr>
             <a:r>
-              <a:rPr lang="en-US" sz="6000" b="1" dirty="0">
+              <a:rPr lang="en-US" sz="1600" b="1" dirty="0">
+                <a:solidFill>
+                  <a:srgbClr val="FFFFFF"/>
+                </a:solidFill>
+                <a:latin typeface="Calibri" pitchFamily="34" charset="0"/>
+                <a:ea typeface="Calibri" pitchFamily="34" charset="-122"/>
+                <a:cs typeface="Calibri" pitchFamily="34" charset="-120"/>
+              </a:rPr>
+              <a:t>Backlog</a:t>
+            </a:r>
+            <a:endParaRPr lang="en-US" sz="1600" dirty="0"/>
+          </a:p>
+        </p:txBody>
+      </p:sp>
+      <p:sp>
+        <p:nvSpPr>
+          <p:cNvPr id="23" name="Text 21"/>
+          <p:cNvSpPr/>
+          <p:nvPr/>
+        </p:nvSpPr>
+        <p:spPr>
+          <a:xfrm>
+            <a:off x="4617720" y="4389120"/>
+            <a:ext cx="3291840" cy="1280160"/>
+          </a:xfrm>
+          <a:prstGeom prst="rect">
+            <a:avLst/>
+          </a:prstGeom>
+          <a:noFill/>
+          <a:ln/>
+        </p:spPr>
+        <p:txBody>
+          <a:bodyPr wrap="square" rtlCol="0" anchor="ctr"/>
+          <a:lstStyle/>
+          <a:p>
+            <a:pPr algn="ctr" indent="0" marL="0">
+              <a:buNone/>
+            </a:pPr>
+            <a:r>
+              <a:rPr lang="en-US" sz="2200" b="1" dirty="0">
                 <a:solidFill>
                   <a:srgbClr val="1E3AA0"/>
                 </a:solidFill>
@@ -12632,73 +13337,34 @@
                 <a:ea typeface="Calibri" pitchFamily="34" charset="-122"/>
                 <a:cs typeface="Calibri" pitchFamily="34" charset="-120"/>
               </a:rPr>
-              <a:t>14</a:t>
-            </a:r>
-            <a:endParaRPr lang="en-US" sz="6000" dirty="0"/>
-          </a:p>
-        </p:txBody>
-      </p:sp>
-      <p:sp>
-        <p:nvSpPr>
-          <p:cNvPr id="12" name="Text 10"/>
-          <p:cNvSpPr/>
-          <p:nvPr/>
-        </p:nvSpPr>
-        <p:spPr>
-          <a:xfrm>
-            <a:off x="8321040" y="2926080"/>
-            <a:ext cx="3657600" cy="457200"/>
-          </a:xfrm>
-          <a:prstGeom prst="rect">
-            <a:avLst/>
-          </a:prstGeom>
-          <a:noFill/>
-          <a:ln/>
-        </p:spPr>
-        <p:txBody>
-          <a:bodyPr wrap="square" rtlCol="0" anchor="ctr"/>
-          <a:lstStyle/>
-          <a:p>
-            <a:pPr algn="ctr" indent="0" marL="0">
-              <a:buNone/>
-            </a:pPr>
-            <a:r>
-              <a:rPr lang="en-US" sz="1400" dirty="0">
-                <a:solidFill>
-                  <a:srgbClr val="1E293B"/>
-                </a:solidFill>
-                <a:latin typeface="Calibri" pitchFamily="34" charset="0"/>
-                <a:ea typeface="Calibri" pitchFamily="34" charset="-122"/>
-                <a:cs typeface="Calibri" pitchFamily="34" charset="-120"/>
-              </a:rPr>
-              <a:t>reusable components</a:t>
-            </a:r>
-            <a:endParaRPr lang="en-US" sz="1400" dirty="0"/>
-          </a:p>
-        </p:txBody>
-      </p:sp>
-      <p:sp>
-        <p:nvSpPr>
-          <p:cNvPr id="13" name="Shape 11"/>
-          <p:cNvSpPr/>
-          <p:nvPr/>
-        </p:nvSpPr>
-        <p:spPr>
-          <a:xfrm>
-            <a:off x="548640" y="3749040"/>
-            <a:ext cx="3657600" cy="1828800"/>
+              <a:t>40 user stories</a:t>
+            </a:r>
+            <a:endParaRPr lang="en-US" sz="2200" dirty="0"/>
+          </a:p>
+        </p:txBody>
+      </p:sp>
+      <p:sp>
+        <p:nvSpPr>
+          <p:cNvPr id="24" name="Shape 22"/>
+          <p:cNvSpPr/>
+          <p:nvPr/>
+        </p:nvSpPr>
+        <p:spPr>
+          <a:xfrm>
+            <a:off x="8321040" y="3749040"/>
+            <a:ext cx="3657600" cy="1920240"/>
           </a:xfrm>
           <a:prstGeom prst="roundRect">
             <a:avLst>
-              <a:gd name="adj" fmla="val 6000"/>
+              <a:gd name="adj" fmla="val 7143"/>
             </a:avLst>
           </a:prstGeom>
           <a:solidFill>
             <a:srgbClr val="FFFFFF"/>
           </a:solidFill>
-          <a:ln w="12700">
+          <a:ln w="25400">
             <a:solidFill>
-              <a:srgbClr val="1E3AA0"/>
+              <a:srgbClr val="10B981"/>
             </a:solidFill>
             <a:prstDash val="solid"/>
           </a:ln>
@@ -12706,14 +13372,34 @@
       </p:sp>
       <p:sp>
         <p:nvSpPr>
-          <p:cNvPr id="14" name="Text 12"/>
-          <p:cNvSpPr/>
-          <p:nvPr/>
-        </p:nvSpPr>
-        <p:spPr>
-          <a:xfrm>
-            <a:off x="548640" y="3931920"/>
-            <a:ext cx="3657600" cy="914400"/>
+          <p:cNvPr id="25" name="Shape 23"/>
+          <p:cNvSpPr/>
+          <p:nvPr/>
+        </p:nvSpPr>
+        <p:spPr>
+          <a:xfrm>
+            <a:off x="8321040" y="3749040"/>
+            <a:ext cx="3657600" cy="502920"/>
+          </a:xfrm>
+          <a:prstGeom prst="rect">
+            <a:avLst/>
+          </a:prstGeom>
+          <a:solidFill>
+            <a:srgbClr val="10B981"/>
+          </a:solidFill>
+          <a:ln/>
+        </p:spPr>
+      </p:sp>
+      <p:sp>
+        <p:nvSpPr>
+          <p:cNvPr id="26" name="Text 24"/>
+          <p:cNvSpPr/>
+          <p:nvPr/>
+        </p:nvSpPr>
+        <p:spPr>
+          <a:xfrm>
+            <a:off x="8321040" y="3749040"/>
+            <a:ext cx="3657600" cy="502920"/>
           </a:xfrm>
           <a:prstGeom prst="rect">
             <a:avLst/>
@@ -12729,30 +13415,30 @@
               <a:buNone/>
             </a:pPr>
             <a:r>
-              <a:rPr lang="en-US" sz="6000" b="1" dirty="0">
-                <a:solidFill>
-                  <a:srgbClr val="1E3AA0"/>
-                </a:solidFill>
-                <a:latin typeface="Calibri" pitchFamily="34" charset="0"/>
-                <a:ea typeface="Calibri" pitchFamily="34" charset="-122"/>
-                <a:cs typeface="Calibri" pitchFamily="34" charset="-120"/>
-              </a:rPr>
-              <a:t>10</a:t>
-            </a:r>
-            <a:endParaRPr lang="en-US" sz="6000" dirty="0"/>
-          </a:p>
-        </p:txBody>
-      </p:sp>
-      <p:sp>
-        <p:nvSpPr>
-          <p:cNvPr id="15" name="Text 13"/>
-          <p:cNvSpPr/>
-          <p:nvPr/>
-        </p:nvSpPr>
-        <p:spPr>
-          <a:xfrm>
-            <a:off x="548640" y="5029200"/>
-            <a:ext cx="3657600" cy="457200"/>
+              <a:rPr lang="en-US" sz="1600" b="1" dirty="0">
+                <a:solidFill>
+                  <a:srgbClr val="FFFFFF"/>
+                </a:solidFill>
+                <a:latin typeface="Calibri" pitchFamily="34" charset="0"/>
+                <a:ea typeface="Calibri" pitchFamily="34" charset="-122"/>
+                <a:cs typeface="Calibri" pitchFamily="34" charset="-120"/>
+              </a:rPr>
+              <a:t>Velocity</a:t>
+            </a:r>
+            <a:endParaRPr lang="en-US" sz="1600" dirty="0"/>
+          </a:p>
+        </p:txBody>
+      </p:sp>
+      <p:sp>
+        <p:nvSpPr>
+          <p:cNvPr id="27" name="Text 25"/>
+          <p:cNvSpPr/>
+          <p:nvPr/>
+        </p:nvSpPr>
+        <p:spPr>
+          <a:xfrm>
+            <a:off x="8503920" y="4389120"/>
+            <a:ext cx="3291840" cy="1280160"/>
           </a:xfrm>
           <a:prstGeom prst="rect">
             <a:avLst/>
@@ -12768,57 +13454,30 @@
               <a:buNone/>
             </a:pPr>
             <a:r>
-              <a:rPr lang="en-US" sz="1400" dirty="0">
-                <a:solidFill>
-                  <a:srgbClr val="1E293B"/>
-                </a:solidFill>
-                <a:latin typeface="Calibri" pitchFamily="34" charset="0"/>
-                <a:ea typeface="Calibri" pitchFamily="34" charset="-122"/>
-                <a:cs typeface="Calibri" pitchFamily="34" charset="-120"/>
-              </a:rPr>
-              <a:t>architectural diagrams</a:t>
-            </a:r>
-            <a:endParaRPr lang="en-US" sz="1400" dirty="0"/>
-          </a:p>
-        </p:txBody>
-      </p:sp>
-      <p:sp>
-        <p:nvSpPr>
-          <p:cNvPr id="16" name="Shape 14"/>
-          <p:cNvSpPr/>
-          <p:nvPr/>
-        </p:nvSpPr>
-        <p:spPr>
-          <a:xfrm>
-            <a:off x="4434840" y="3749040"/>
-            <a:ext cx="3657600" cy="1828800"/>
-          </a:xfrm>
-          <a:prstGeom prst="roundRect">
-            <a:avLst>
-              <a:gd name="adj" fmla="val 6000"/>
-            </a:avLst>
-          </a:prstGeom>
-          <a:solidFill>
-            <a:srgbClr val="FFFFFF"/>
-          </a:solidFill>
-          <a:ln w="12700">
-            <a:solidFill>
-              <a:srgbClr val="1E3AA0"/>
-            </a:solidFill>
-            <a:prstDash val="solid"/>
-          </a:ln>
-        </p:spPr>
-      </p:sp>
-      <p:sp>
-        <p:nvSpPr>
-          <p:cNvPr id="17" name="Text 15"/>
-          <p:cNvSpPr/>
-          <p:nvPr/>
-        </p:nvSpPr>
-        <p:spPr>
-          <a:xfrm>
-            <a:off x="4434840" y="3931920"/>
-            <a:ext cx="3657600" cy="914400"/>
+              <a:rPr lang="en-US" sz="2200" b="1" dirty="0">
+                <a:solidFill>
+                  <a:srgbClr val="10B981"/>
+                </a:solidFill>
+                <a:latin typeface="Calibri" pitchFamily="34" charset="0"/>
+                <a:ea typeface="Calibri" pitchFamily="34" charset="-122"/>
+                <a:cs typeface="Calibri" pitchFamily="34" charset="-120"/>
+              </a:rPr>
+              <a:t>22 SP / sprint</a:t>
+            </a:r>
+            <a:endParaRPr lang="en-US" sz="2200" dirty="0"/>
+          </a:p>
+        </p:txBody>
+      </p:sp>
+      <p:sp>
+        <p:nvSpPr>
+          <p:cNvPr id="28" name="Text 26"/>
+          <p:cNvSpPr/>
+          <p:nvPr/>
+        </p:nvSpPr>
+        <p:spPr>
+          <a:xfrm>
+            <a:off x="457200" y="6126480"/>
+            <a:ext cx="11247120" cy="320040"/>
           </a:xfrm>
           <a:prstGeom prst="rect">
             <a:avLst/>
@@ -12834,161 +13493,17 @@
               <a:buNone/>
             </a:pPr>
             <a:r>
-              <a:rPr lang="en-US" sz="6000" b="1" dirty="0">
-                <a:solidFill>
-                  <a:srgbClr val="1E3AA0"/>
-                </a:solidFill>
-                <a:latin typeface="Calibri" pitchFamily="34" charset="0"/>
-                <a:ea typeface="Calibri" pitchFamily="34" charset="-122"/>
-                <a:cs typeface="Calibri" pitchFamily="34" charset="-120"/>
-              </a:rPr>
-              <a:t>5</a:t>
-            </a:r>
-            <a:endParaRPr lang="en-US" sz="6000" dirty="0"/>
-          </a:p>
-        </p:txBody>
-      </p:sp>
-      <p:sp>
-        <p:nvSpPr>
-          <p:cNvPr id="18" name="Text 16"/>
-          <p:cNvSpPr/>
-          <p:nvPr/>
-        </p:nvSpPr>
-        <p:spPr>
-          <a:xfrm>
-            <a:off x="4434840" y="5029200"/>
-            <a:ext cx="3657600" cy="457200"/>
-          </a:xfrm>
-          <a:prstGeom prst="rect">
-            <a:avLst/>
-          </a:prstGeom>
-          <a:noFill/>
-          <a:ln/>
-        </p:spPr>
-        <p:txBody>
-          <a:bodyPr wrap="square" rtlCol="0" anchor="ctr"/>
-          <a:lstStyle/>
-          <a:p>
-            <a:pPr algn="ctr" indent="0" marL="0">
-              <a:buNone/>
-            </a:pPr>
-            <a:r>
-              <a:rPr lang="en-US" sz="1400" dirty="0">
-                <a:solidFill>
-                  <a:srgbClr val="1E293B"/>
-                </a:solidFill>
-                <a:latin typeface="Calibri" pitchFamily="34" charset="0"/>
-                <a:ea typeface="Calibri" pitchFamily="34" charset="-122"/>
-                <a:cs typeface="Calibri" pitchFamily="34" charset="-120"/>
-              </a:rPr>
-              <a:t>payment channels</a:t>
-            </a:r>
-            <a:endParaRPr lang="en-US" sz="1400" dirty="0"/>
-          </a:p>
-        </p:txBody>
-      </p:sp>
-      <p:sp>
-        <p:nvSpPr>
-          <p:cNvPr id="19" name="Shape 17"/>
-          <p:cNvSpPr/>
-          <p:nvPr/>
-        </p:nvSpPr>
-        <p:spPr>
-          <a:xfrm>
-            <a:off x="8321040" y="3749040"/>
-            <a:ext cx="3657600" cy="1828800"/>
-          </a:xfrm>
-          <a:prstGeom prst="roundRect">
-            <a:avLst>
-              <a:gd name="adj" fmla="val 6000"/>
-            </a:avLst>
-          </a:prstGeom>
-          <a:solidFill>
-            <a:srgbClr val="FFFFFF"/>
-          </a:solidFill>
-          <a:ln w="12700">
-            <a:solidFill>
-              <a:srgbClr val="1E3AA0"/>
-            </a:solidFill>
-            <a:prstDash val="solid"/>
-          </a:ln>
-        </p:spPr>
-      </p:sp>
-      <p:sp>
-        <p:nvSpPr>
-          <p:cNvPr id="20" name="Text 18"/>
-          <p:cNvSpPr/>
-          <p:nvPr/>
-        </p:nvSpPr>
-        <p:spPr>
-          <a:xfrm>
-            <a:off x="8321040" y="3931920"/>
-            <a:ext cx="3657600" cy="914400"/>
-          </a:xfrm>
-          <a:prstGeom prst="rect">
-            <a:avLst/>
-          </a:prstGeom>
-          <a:noFill/>
-          <a:ln/>
-        </p:spPr>
-        <p:txBody>
-          <a:bodyPr wrap="square" rtlCol="0" anchor="ctr"/>
-          <a:lstStyle/>
-          <a:p>
-            <a:pPr algn="ctr" indent="0" marL="0">
-              <a:buNone/>
-            </a:pPr>
-            <a:r>
-              <a:rPr lang="en-US" sz="6000" b="1" dirty="0">
-                <a:solidFill>
-                  <a:srgbClr val="1E3AA0"/>
-                </a:solidFill>
-                <a:latin typeface="Calibri" pitchFamily="34" charset="0"/>
-                <a:ea typeface="Calibri" pitchFamily="34" charset="-122"/>
-                <a:cs typeface="Calibri" pitchFamily="34" charset="-120"/>
-              </a:rPr>
-              <a:t>4</a:t>
-            </a:r>
-            <a:endParaRPr lang="en-US" sz="6000" dirty="0"/>
-          </a:p>
-        </p:txBody>
-      </p:sp>
-      <p:sp>
-        <p:nvSpPr>
-          <p:cNvPr id="21" name="Text 19"/>
-          <p:cNvSpPr/>
-          <p:nvPr/>
-        </p:nvSpPr>
-        <p:spPr>
-          <a:xfrm>
-            <a:off x="8321040" y="5029200"/>
-            <a:ext cx="3657600" cy="457200"/>
-          </a:xfrm>
-          <a:prstGeom prst="rect">
-            <a:avLst/>
-          </a:prstGeom>
-          <a:noFill/>
-          <a:ln/>
-        </p:spPr>
-        <p:txBody>
-          <a:bodyPr wrap="square" rtlCol="0" anchor="ctr"/>
-          <a:lstStyle/>
-          <a:p>
-            <a:pPr algn="ctr" indent="0" marL="0">
-              <a:buNone/>
-            </a:pPr>
-            <a:r>
-              <a:rPr lang="en-US" sz="1400" dirty="0">
-                <a:solidFill>
-                  <a:srgbClr val="1E293B"/>
-                </a:solidFill>
-                <a:latin typeface="Calibri" pitchFamily="34" charset="0"/>
-                <a:ea typeface="Calibri" pitchFamily="34" charset="-122"/>
-                <a:cs typeface="Calibri" pitchFamily="34" charset="-120"/>
-              </a:rPr>
-              <a:t>QR-verifiable artefacts</a:t>
-            </a:r>
-            <a:endParaRPr lang="en-US" sz="1400" dirty="0"/>
+              <a:rPr lang="en-US" sz="1200" i="1" dirty="0">
+                <a:solidFill>
+                  <a:srgbClr val="64748B"/>
+                </a:solidFill>
+                <a:latin typeface="Calibri" pitchFamily="34" charset="0"/>
+                <a:ea typeface="Calibri" pitchFamily="34" charset="-122"/>
+                <a:cs typeface="Calibri" pitchFamily="34" charset="-120"/>
+              </a:rPr>
+              <a:t>Solo Agile = Scrum cadence + Kanban WIP discipline</a:t>
+            </a:r>
+            <a:endParaRPr lang="en-US" sz="1200" dirty="0"/>
           </a:p>
         </p:txBody>
       </p:sp>
@@ -13098,7 +13613,7 @@
                 <a:ea typeface="Calibri" pitchFamily="34" charset="-122"/>
                 <a:cs typeface="Calibri" pitchFamily="34" charset="-120"/>
               </a:rPr>
-              <a:t>Future work</a:t>
+              <a:t>Six sprints · 120 story points</a:t>
             </a:r>
             <a:endParaRPr lang="en-US" sz="3200" dirty="0"/>
           </a:p>
@@ -13137,7 +13652,7 @@
                 <a:ea typeface="Calibri" pitchFamily="34" charset="-122"/>
                 <a:cs typeface="Calibri" pitchFamily="34" charset="-120"/>
               </a:rPr>
-              <a:t>Beyond the bachelor defence</a:t>
+              <a:t>Each sprint shipped a working increment</a:t>
             </a:r>
             <a:endParaRPr lang="en-US" sz="1500" dirty="0"/>
           </a:p>
@@ -13152,17 +13667,117 @@
         <p:spPr>
           <a:xfrm>
             <a:off x="548640" y="1645920"/>
-            <a:ext cx="5394960" cy="1097280"/>
+            <a:ext cx="914400" cy="594360"/>
           </a:xfrm>
           <a:prstGeom prst="roundRect">
             <a:avLst>
-              <a:gd name="adj" fmla="val 8333"/>
+              <a:gd name="adj" fmla="val 12308"/>
+            </a:avLst>
+          </a:prstGeom>
+          <a:solidFill>
+            <a:srgbClr val="1E3AA0"/>
+          </a:solidFill>
+          <a:ln/>
+        </p:spPr>
+      </p:sp>
+      <p:sp>
+        <p:nvSpPr>
+          <p:cNvPr id="5" name="Text 3"/>
+          <p:cNvSpPr/>
+          <p:nvPr/>
+        </p:nvSpPr>
+        <p:spPr>
+          <a:xfrm>
+            <a:off x="548640" y="1645920"/>
+            <a:ext cx="914400" cy="594360"/>
+          </a:xfrm>
+          <a:prstGeom prst="rect">
+            <a:avLst/>
+          </a:prstGeom>
+          <a:noFill/>
+          <a:ln/>
+        </p:spPr>
+        <p:txBody>
+          <a:bodyPr wrap="square" rtlCol="0" anchor="ctr"/>
+          <a:lstStyle/>
+          <a:p>
+            <a:pPr algn="ctr" indent="0" marL="0">
+              <a:buNone/>
+            </a:pPr>
+            <a:r>
+              <a:rPr lang="en-US" sz="2200" b="1" dirty="0">
+                <a:solidFill>
+                  <a:srgbClr val="FFFFFF"/>
+                </a:solidFill>
+                <a:latin typeface="Calibri" pitchFamily="34" charset="0"/>
+                <a:ea typeface="Calibri" pitchFamily="34" charset="-122"/>
+                <a:cs typeface="Calibri" pitchFamily="34" charset="-120"/>
+              </a:rPr>
+              <a:t>S1</a:t>
+            </a:r>
+            <a:endParaRPr lang="en-US" sz="2200" dirty="0"/>
+          </a:p>
+        </p:txBody>
+      </p:sp>
+      <p:sp>
+        <p:nvSpPr>
+          <p:cNvPr id="6" name="Text 4"/>
+          <p:cNvSpPr/>
+          <p:nvPr/>
+        </p:nvSpPr>
+        <p:spPr>
+          <a:xfrm>
+            <a:off x="1645920" y="1737360"/>
+            <a:ext cx="7772400" cy="457200"/>
+          </a:xfrm>
+          <a:prstGeom prst="rect">
+            <a:avLst/>
+          </a:prstGeom>
+          <a:noFill/>
+          <a:ln/>
+        </p:spPr>
+        <p:txBody>
+          <a:bodyPr wrap="square" rtlCol="0" anchor="ctr"/>
+          <a:lstStyle/>
+          <a:p>
+            <a:pPr indent="0" marL="0">
+              <a:buNone/>
+            </a:pPr>
+            <a:r>
+              <a:rPr lang="en-US" sz="1600" dirty="0">
+                <a:solidFill>
+                  <a:srgbClr val="1E293B"/>
+                </a:solidFill>
+                <a:latin typeface="Calibri" pitchFamily="34" charset="0"/>
+                <a:ea typeface="Calibri" pitchFamily="34" charset="-122"/>
+                <a:cs typeface="Calibri" pitchFamily="34" charset="-120"/>
+              </a:rPr>
+              <a:t>Foundations · auth · design system</a:t>
+            </a:r>
+            <a:endParaRPr lang="en-US" sz="1600" dirty="0"/>
+          </a:p>
+        </p:txBody>
+      </p:sp>
+      <p:sp>
+        <p:nvSpPr>
+          <p:cNvPr id="7" name="Shape 5"/>
+          <p:cNvSpPr/>
+          <p:nvPr/>
+        </p:nvSpPr>
+        <p:spPr>
+          <a:xfrm>
+            <a:off x="9601200" y="1645920"/>
+            <a:ext cx="2011680" cy="594360"/>
+          </a:xfrm>
+          <a:prstGeom prst="roundRect">
+            <a:avLst>
+              <a:gd name="adj" fmla="val 12308"/>
             </a:avLst>
           </a:prstGeom>
           <a:solidFill>
             <a:srgbClr val="FFFFFF"/>
           </a:solidFill>
-          <a:ln w="12700">
+          <a:ln w="19050">
             <a:solidFill>
               <a:srgbClr val="1E3AA0"/>
             </a:solidFill>
@@ -13172,50 +13787,30 @@
       </p:sp>
       <p:sp>
         <p:nvSpPr>
-          <p:cNvPr id="5" name="Shape 3"/>
-          <p:cNvSpPr/>
-          <p:nvPr/>
-        </p:nvSpPr>
-        <p:spPr>
-          <a:xfrm>
-            <a:off x="548640" y="1645920"/>
-            <a:ext cx="457200" cy="1097280"/>
-          </a:xfrm>
-          <a:prstGeom prst="rect">
-            <a:avLst/>
-          </a:prstGeom>
-          <a:solidFill>
-            <a:srgbClr val="E63946"/>
-          </a:solidFill>
-          <a:ln/>
-        </p:spPr>
-      </p:sp>
-      <p:sp>
-        <p:nvSpPr>
-          <p:cNvPr id="6" name="Text 4"/>
-          <p:cNvSpPr/>
-          <p:nvPr/>
-        </p:nvSpPr>
-        <p:spPr>
-          <a:xfrm>
-            <a:off x="1188720" y="1737360"/>
-            <a:ext cx="4754880" cy="457200"/>
-          </a:xfrm>
-          <a:prstGeom prst="rect">
-            <a:avLst/>
-          </a:prstGeom>
-          <a:noFill/>
-          <a:ln/>
-        </p:spPr>
-        <p:txBody>
-          <a:bodyPr wrap="square" rtlCol="0" anchor="ctr"/>
-          <a:lstStyle/>
-          <a:p>
-            <a:pPr indent="0" marL="0">
-              <a:buNone/>
-            </a:pPr>
-            <a:r>
-              <a:rPr lang="en-US" sz="1600" b="1" dirty="0">
+          <p:cNvPr id="8" name="Text 6"/>
+          <p:cNvSpPr/>
+          <p:nvPr/>
+        </p:nvSpPr>
+        <p:spPr>
+          <a:xfrm>
+            <a:off x="9601200" y="1645920"/>
+            <a:ext cx="2011680" cy="594360"/>
+          </a:xfrm>
+          <a:prstGeom prst="rect">
+            <a:avLst/>
+          </a:prstGeom>
+          <a:noFill/>
+          <a:ln/>
+        </p:spPr>
+        <p:txBody>
+          <a:bodyPr wrap="square" rtlCol="0" anchor="ctr"/>
+          <a:lstStyle/>
+          <a:p>
+            <a:pPr algn="ctr" indent="0" marL="0">
+              <a:buNone/>
+            </a:pPr>
+            <a:r>
+              <a:rPr lang="en-US" sz="1800" b="1" dirty="0">
                 <a:solidFill>
                   <a:srgbClr val="1E3AA0"/>
                 </a:solidFill>
@@ -13223,71 +13818,132 @@
                 <a:ea typeface="Calibri" pitchFamily="34" charset="-122"/>
                 <a:cs typeface="Calibri" pitchFamily="34" charset="-120"/>
               </a:rPr>
-              <a:t>Native mobile companions</a:t>
-            </a:r>
-            <a:endParaRPr lang="en-US" sz="1600" dirty="0"/>
-          </a:p>
-        </p:txBody>
-      </p:sp>
-      <p:sp>
-        <p:nvSpPr>
-          <p:cNvPr id="7" name="Text 5"/>
-          <p:cNvSpPr/>
-          <p:nvPr/>
-        </p:nvSpPr>
-        <p:spPr>
-          <a:xfrm>
-            <a:off x="1188720" y="2194560"/>
-            <a:ext cx="4754880" cy="457200"/>
-          </a:xfrm>
-          <a:prstGeom prst="rect">
-            <a:avLst/>
-          </a:prstGeom>
-          <a:noFill/>
-          <a:ln/>
-        </p:spPr>
-        <p:txBody>
-          <a:bodyPr wrap="square" rtlCol="0" anchor="ctr"/>
-          <a:lstStyle/>
-          <a:p>
-            <a:pPr indent="0" marL="0">
-              <a:buNone/>
-            </a:pPr>
-            <a:r>
-              <a:rPr lang="en-US" sz="1300" i="1" dirty="0">
-                <a:solidFill>
-                  <a:srgbClr val="1E293B"/>
-                </a:solidFill>
-                <a:latin typeface="Calibri" pitchFamily="34" charset="0"/>
-                <a:ea typeface="Calibri" pitchFamily="34" charset="-122"/>
-                <a:cs typeface="Calibri" pitchFamily="34" charset="-120"/>
-              </a:rPr>
-              <a:t>React Native · 80% shared code with web</a:t>
-            </a:r>
-            <a:endParaRPr lang="en-US" sz="1300" dirty="0"/>
-          </a:p>
-        </p:txBody>
-      </p:sp>
-      <p:sp>
-        <p:nvSpPr>
-          <p:cNvPr id="8" name="Shape 6"/>
-          <p:cNvSpPr/>
-          <p:nvPr/>
-        </p:nvSpPr>
-        <p:spPr>
-          <a:xfrm>
-            <a:off x="6309360" y="1645920"/>
-            <a:ext cx="5394960" cy="1097280"/>
+              <a:t>12 SP</a:t>
+            </a:r>
+            <a:endParaRPr lang="en-US" sz="1800" dirty="0"/>
+          </a:p>
+        </p:txBody>
+      </p:sp>
+      <p:sp>
+        <p:nvSpPr>
+          <p:cNvPr id="9" name="Shape 7"/>
+          <p:cNvSpPr/>
+          <p:nvPr/>
+        </p:nvSpPr>
+        <p:spPr>
+          <a:xfrm>
+            <a:off x="548640" y="2359152"/>
+            <a:ext cx="914400" cy="594360"/>
           </a:xfrm>
           <a:prstGeom prst="roundRect">
             <a:avLst>
-              <a:gd name="adj" fmla="val 8333"/>
+              <a:gd name="adj" fmla="val 12308"/>
+            </a:avLst>
+          </a:prstGeom>
+          <a:solidFill>
+            <a:srgbClr val="1E3AA0"/>
+          </a:solidFill>
+          <a:ln/>
+        </p:spPr>
+      </p:sp>
+      <p:sp>
+        <p:nvSpPr>
+          <p:cNvPr id="10" name="Text 8"/>
+          <p:cNvSpPr/>
+          <p:nvPr/>
+        </p:nvSpPr>
+        <p:spPr>
+          <a:xfrm>
+            <a:off x="548640" y="2359152"/>
+            <a:ext cx="914400" cy="594360"/>
+          </a:xfrm>
+          <a:prstGeom prst="rect">
+            <a:avLst/>
+          </a:prstGeom>
+          <a:noFill/>
+          <a:ln/>
+        </p:spPr>
+        <p:txBody>
+          <a:bodyPr wrap="square" rtlCol="0" anchor="ctr"/>
+          <a:lstStyle/>
+          <a:p>
+            <a:pPr algn="ctr" indent="0" marL="0">
+              <a:buNone/>
+            </a:pPr>
+            <a:r>
+              <a:rPr lang="en-US" sz="2200" b="1" dirty="0">
+                <a:solidFill>
+                  <a:srgbClr val="FFFFFF"/>
+                </a:solidFill>
+                <a:latin typeface="Calibri" pitchFamily="34" charset="0"/>
+                <a:ea typeface="Calibri" pitchFamily="34" charset="-122"/>
+                <a:cs typeface="Calibri" pitchFamily="34" charset="-120"/>
+              </a:rPr>
+              <a:t>S2</a:t>
+            </a:r>
+            <a:endParaRPr lang="en-US" sz="2200" dirty="0"/>
+          </a:p>
+        </p:txBody>
+      </p:sp>
+      <p:sp>
+        <p:nvSpPr>
+          <p:cNvPr id="11" name="Text 9"/>
+          <p:cNvSpPr/>
+          <p:nvPr/>
+        </p:nvSpPr>
+        <p:spPr>
+          <a:xfrm>
+            <a:off x="1645920" y="2450592"/>
+            <a:ext cx="7772400" cy="457200"/>
+          </a:xfrm>
+          <a:prstGeom prst="rect">
+            <a:avLst/>
+          </a:prstGeom>
+          <a:noFill/>
+          <a:ln/>
+        </p:spPr>
+        <p:txBody>
+          <a:bodyPr wrap="square" rtlCol="0" anchor="ctr"/>
+          <a:lstStyle/>
+          <a:p>
+            <a:pPr indent="0" marL="0">
+              <a:buNone/>
+            </a:pPr>
+            <a:r>
+              <a:rPr lang="en-US" sz="1600" dirty="0">
+                <a:solidFill>
+                  <a:srgbClr val="1E293B"/>
+                </a:solidFill>
+                <a:latin typeface="Calibri" pitchFamily="34" charset="0"/>
+                <a:ea typeface="Calibri" pitchFamily="34" charset="-122"/>
+                <a:cs typeface="Calibri" pitchFamily="34" charset="-120"/>
+              </a:rPr>
+              <a:t>Student &amp; Lecturer surfaces</a:t>
+            </a:r>
+            <a:endParaRPr lang="en-US" sz="1600" dirty="0"/>
+          </a:p>
+        </p:txBody>
+      </p:sp>
+      <p:sp>
+        <p:nvSpPr>
+          <p:cNvPr id="12" name="Shape 10"/>
+          <p:cNvSpPr/>
+          <p:nvPr/>
+        </p:nvSpPr>
+        <p:spPr>
+          <a:xfrm>
+            <a:off x="9601200" y="2359152"/>
+            <a:ext cx="2011680" cy="594360"/>
+          </a:xfrm>
+          <a:prstGeom prst="roundRect">
+            <a:avLst>
+              <a:gd name="adj" fmla="val 12308"/>
             </a:avLst>
           </a:prstGeom>
           <a:solidFill>
             <a:srgbClr val="FFFFFF"/>
           </a:solidFill>
-          <a:ln w="12700">
+          <a:ln w="19050">
             <a:solidFill>
               <a:srgbClr val="1E3AA0"/>
             </a:solidFill>
@@ -13297,50 +13953,30 @@
       </p:sp>
       <p:sp>
         <p:nvSpPr>
-          <p:cNvPr id="9" name="Shape 7"/>
-          <p:cNvSpPr/>
-          <p:nvPr/>
-        </p:nvSpPr>
-        <p:spPr>
-          <a:xfrm>
-            <a:off x="6309360" y="1645920"/>
-            <a:ext cx="457200" cy="1097280"/>
-          </a:xfrm>
-          <a:prstGeom prst="rect">
-            <a:avLst/>
-          </a:prstGeom>
-          <a:solidFill>
-            <a:srgbClr val="E63946"/>
-          </a:solidFill>
-          <a:ln/>
-        </p:spPr>
-      </p:sp>
-      <p:sp>
-        <p:nvSpPr>
-          <p:cNvPr id="10" name="Text 8"/>
-          <p:cNvSpPr/>
-          <p:nvPr/>
-        </p:nvSpPr>
-        <p:spPr>
-          <a:xfrm>
-            <a:off x="6949440" y="1737360"/>
-            <a:ext cx="4754880" cy="457200"/>
-          </a:xfrm>
-          <a:prstGeom prst="rect">
-            <a:avLst/>
-          </a:prstGeom>
-          <a:noFill/>
-          <a:ln/>
-        </p:spPr>
-        <p:txBody>
-          <a:bodyPr wrap="square" rtlCol="0" anchor="ctr"/>
-          <a:lstStyle/>
-          <a:p>
-            <a:pPr indent="0" marL="0">
-              <a:buNone/>
-            </a:pPr>
-            <a:r>
-              <a:rPr lang="en-US" sz="1600" b="1" dirty="0">
+          <p:cNvPr id="13" name="Text 11"/>
+          <p:cNvSpPr/>
+          <p:nvPr/>
+        </p:nvSpPr>
+        <p:spPr>
+          <a:xfrm>
+            <a:off x="9601200" y="2359152"/>
+            <a:ext cx="2011680" cy="594360"/>
+          </a:xfrm>
+          <a:prstGeom prst="rect">
+            <a:avLst/>
+          </a:prstGeom>
+          <a:noFill/>
+          <a:ln/>
+        </p:spPr>
+        <p:txBody>
+          <a:bodyPr wrap="square" rtlCol="0" anchor="ctr"/>
+          <a:lstStyle/>
+          <a:p>
+            <a:pPr algn="ctr" indent="0" marL="0">
+              <a:buNone/>
+            </a:pPr>
+            <a:r>
+              <a:rPr lang="en-US" sz="1800" b="1" dirty="0">
                 <a:solidFill>
                   <a:srgbClr val="1E3AA0"/>
                 </a:solidFill>
@@ -13348,71 +13984,132 @@
                 <a:ea typeface="Calibri" pitchFamily="34" charset="-122"/>
                 <a:cs typeface="Calibri" pitchFamily="34" charset="-120"/>
               </a:rPr>
-              <a:t>Biometric attendance</a:t>
-            </a:r>
-            <a:endParaRPr lang="en-US" sz="1600" dirty="0"/>
-          </a:p>
-        </p:txBody>
-      </p:sp>
-      <p:sp>
-        <p:nvSpPr>
-          <p:cNvPr id="11" name="Text 9"/>
-          <p:cNvSpPr/>
-          <p:nvPr/>
-        </p:nvSpPr>
-        <p:spPr>
-          <a:xfrm>
-            <a:off x="6949440" y="2194560"/>
-            <a:ext cx="4754880" cy="457200"/>
-          </a:xfrm>
-          <a:prstGeom prst="rect">
-            <a:avLst/>
-          </a:prstGeom>
-          <a:noFill/>
-          <a:ln/>
-        </p:spPr>
-        <p:txBody>
-          <a:bodyPr wrap="square" rtlCol="0" anchor="ctr"/>
-          <a:lstStyle/>
-          <a:p>
-            <a:pPr indent="0" marL="0">
-              <a:buNone/>
-            </a:pPr>
-            <a:r>
-              <a:rPr lang="en-US" sz="1300" i="1" dirty="0">
-                <a:solidFill>
-                  <a:srgbClr val="1E293B"/>
-                </a:solidFill>
-                <a:latin typeface="Calibri" pitchFamily="34" charset="0"/>
-                <a:ea typeface="Calibri" pitchFamily="34" charset="-122"/>
-                <a:cs typeface="Calibri" pitchFamily="34" charset="-120"/>
-              </a:rPr>
-              <a:t>Fingerprint roll-call on Android</a:t>
-            </a:r>
-            <a:endParaRPr lang="en-US" sz="1300" dirty="0"/>
-          </a:p>
-        </p:txBody>
-      </p:sp>
-      <p:sp>
-        <p:nvSpPr>
-          <p:cNvPr id="12" name="Shape 10"/>
-          <p:cNvSpPr/>
-          <p:nvPr/>
-        </p:nvSpPr>
-        <p:spPr>
-          <a:xfrm>
-            <a:off x="548640" y="3017520"/>
-            <a:ext cx="5394960" cy="1097280"/>
+              <a:t>22 SP</a:t>
+            </a:r>
+            <a:endParaRPr lang="en-US" sz="1800" dirty="0"/>
+          </a:p>
+        </p:txBody>
+      </p:sp>
+      <p:sp>
+        <p:nvSpPr>
+          <p:cNvPr id="14" name="Shape 12"/>
+          <p:cNvSpPr/>
+          <p:nvPr/>
+        </p:nvSpPr>
+        <p:spPr>
+          <a:xfrm>
+            <a:off x="548640" y="3072384"/>
+            <a:ext cx="914400" cy="594360"/>
           </a:xfrm>
           <a:prstGeom prst="roundRect">
             <a:avLst>
-              <a:gd name="adj" fmla="val 8333"/>
+              <a:gd name="adj" fmla="val 12308"/>
+            </a:avLst>
+          </a:prstGeom>
+          <a:solidFill>
+            <a:srgbClr val="1E3AA0"/>
+          </a:solidFill>
+          <a:ln/>
+        </p:spPr>
+      </p:sp>
+      <p:sp>
+        <p:nvSpPr>
+          <p:cNvPr id="15" name="Text 13"/>
+          <p:cNvSpPr/>
+          <p:nvPr/>
+        </p:nvSpPr>
+        <p:spPr>
+          <a:xfrm>
+            <a:off x="548640" y="3072384"/>
+            <a:ext cx="914400" cy="594360"/>
+          </a:xfrm>
+          <a:prstGeom prst="rect">
+            <a:avLst/>
+          </a:prstGeom>
+          <a:noFill/>
+          <a:ln/>
+        </p:spPr>
+        <p:txBody>
+          <a:bodyPr wrap="square" rtlCol="0" anchor="ctr"/>
+          <a:lstStyle/>
+          <a:p>
+            <a:pPr algn="ctr" indent="0" marL="0">
+              <a:buNone/>
+            </a:pPr>
+            <a:r>
+              <a:rPr lang="en-US" sz="2200" b="1" dirty="0">
+                <a:solidFill>
+                  <a:srgbClr val="FFFFFF"/>
+                </a:solidFill>
+                <a:latin typeface="Calibri" pitchFamily="34" charset="0"/>
+                <a:ea typeface="Calibri" pitchFamily="34" charset="-122"/>
+                <a:cs typeface="Calibri" pitchFamily="34" charset="-120"/>
+              </a:rPr>
+              <a:t>S3</a:t>
+            </a:r>
+            <a:endParaRPr lang="en-US" sz="2200" dirty="0"/>
+          </a:p>
+        </p:txBody>
+      </p:sp>
+      <p:sp>
+        <p:nvSpPr>
+          <p:cNvPr id="16" name="Text 14"/>
+          <p:cNvSpPr/>
+          <p:nvPr/>
+        </p:nvSpPr>
+        <p:spPr>
+          <a:xfrm>
+            <a:off x="1645920" y="3163824"/>
+            <a:ext cx="7772400" cy="457200"/>
+          </a:xfrm>
+          <a:prstGeom prst="rect">
+            <a:avLst/>
+          </a:prstGeom>
+          <a:noFill/>
+          <a:ln/>
+        </p:spPr>
+        <p:txBody>
+          <a:bodyPr wrap="square" rtlCol="0" anchor="ctr"/>
+          <a:lstStyle/>
+          <a:p>
+            <a:pPr indent="0" marL="0">
+              <a:buNone/>
+            </a:pPr>
+            <a:r>
+              <a:rPr lang="en-US" sz="1600" dirty="0">
+                <a:solidFill>
+                  <a:srgbClr val="1E293B"/>
+                </a:solidFill>
+                <a:latin typeface="Calibri" pitchFamily="34" charset="0"/>
+                <a:ea typeface="Calibri" pitchFamily="34" charset="-122"/>
+                <a:cs typeface="Calibri" pitchFamily="34" charset="-120"/>
+              </a:rPr>
+              <a:t>Bursary &amp; Administration</a:t>
+            </a:r>
+            <a:endParaRPr lang="en-US" sz="1600" dirty="0"/>
+          </a:p>
+        </p:txBody>
+      </p:sp>
+      <p:sp>
+        <p:nvSpPr>
+          <p:cNvPr id="17" name="Shape 15"/>
+          <p:cNvSpPr/>
+          <p:nvPr/>
+        </p:nvSpPr>
+        <p:spPr>
+          <a:xfrm>
+            <a:off x="9601200" y="3072384"/>
+            <a:ext cx="2011680" cy="594360"/>
+          </a:xfrm>
+          <a:prstGeom prst="roundRect">
+            <a:avLst>
+              <a:gd name="adj" fmla="val 12308"/>
             </a:avLst>
           </a:prstGeom>
           <a:solidFill>
             <a:srgbClr val="FFFFFF"/>
           </a:solidFill>
-          <a:ln w="12700">
+          <a:ln w="19050">
             <a:solidFill>
               <a:srgbClr val="1E3AA0"/>
             </a:solidFill>
@@ -13422,50 +14119,30 @@
       </p:sp>
       <p:sp>
         <p:nvSpPr>
-          <p:cNvPr id="13" name="Shape 11"/>
-          <p:cNvSpPr/>
-          <p:nvPr/>
-        </p:nvSpPr>
-        <p:spPr>
-          <a:xfrm>
-            <a:off x="548640" y="3017520"/>
-            <a:ext cx="457200" cy="1097280"/>
-          </a:xfrm>
-          <a:prstGeom prst="rect">
-            <a:avLst/>
-          </a:prstGeom>
-          <a:solidFill>
-            <a:srgbClr val="E63946"/>
-          </a:solidFill>
-          <a:ln/>
-        </p:spPr>
-      </p:sp>
-      <p:sp>
-        <p:nvSpPr>
-          <p:cNvPr id="14" name="Text 12"/>
-          <p:cNvSpPr/>
-          <p:nvPr/>
-        </p:nvSpPr>
-        <p:spPr>
-          <a:xfrm>
-            <a:off x="1188720" y="3108960"/>
-            <a:ext cx="4754880" cy="457200"/>
-          </a:xfrm>
-          <a:prstGeom prst="rect">
-            <a:avLst/>
-          </a:prstGeom>
-          <a:noFill/>
-          <a:ln/>
-        </p:spPr>
-        <p:txBody>
-          <a:bodyPr wrap="square" rtlCol="0" anchor="ctr"/>
-          <a:lstStyle/>
-          <a:p>
-            <a:pPr indent="0" marL="0">
-              <a:buNone/>
-            </a:pPr>
-            <a:r>
-              <a:rPr lang="en-US" sz="1600" b="1" dirty="0">
+          <p:cNvPr id="18" name="Text 16"/>
+          <p:cNvSpPr/>
+          <p:nvPr/>
+        </p:nvSpPr>
+        <p:spPr>
+          <a:xfrm>
+            <a:off x="9601200" y="3072384"/>
+            <a:ext cx="2011680" cy="594360"/>
+          </a:xfrm>
+          <a:prstGeom prst="rect">
+            <a:avLst/>
+          </a:prstGeom>
+          <a:noFill/>
+          <a:ln/>
+        </p:spPr>
+        <p:txBody>
+          <a:bodyPr wrap="square" rtlCol="0" anchor="ctr"/>
+          <a:lstStyle/>
+          <a:p>
+            <a:pPr algn="ctr" indent="0" marL="0">
+              <a:buNone/>
+            </a:pPr>
+            <a:r>
+              <a:rPr lang="en-US" sz="1800" b="1" dirty="0">
                 <a:solidFill>
                   <a:srgbClr val="1E3AA0"/>
                 </a:solidFill>
@@ -13473,71 +14150,298 @@
                 <a:ea typeface="Calibri" pitchFamily="34" charset="-122"/>
                 <a:cs typeface="Calibri" pitchFamily="34" charset="-120"/>
               </a:rPr>
-              <a:t>Live MoMo / OM integration</a:t>
-            </a:r>
-            <a:endParaRPr lang="en-US" sz="1600" dirty="0"/>
-          </a:p>
-        </p:txBody>
-      </p:sp>
-      <p:sp>
-        <p:nvSpPr>
-          <p:cNvPr id="15" name="Text 13"/>
-          <p:cNvSpPr/>
-          <p:nvPr/>
-        </p:nvSpPr>
-        <p:spPr>
-          <a:xfrm>
-            <a:off x="1188720" y="3566160"/>
-            <a:ext cx="4754880" cy="457200"/>
-          </a:xfrm>
-          <a:prstGeom prst="rect">
-            <a:avLst/>
-          </a:prstGeom>
-          <a:noFill/>
-          <a:ln/>
-        </p:spPr>
-        <p:txBody>
-          <a:bodyPr wrap="square" rtlCol="0" anchor="ctr"/>
-          <a:lstStyle/>
-          <a:p>
-            <a:pPr indent="0" marL="0">
-              <a:buNone/>
-            </a:pPr>
-            <a:r>
-              <a:rPr lang="en-US" sz="1300" i="1" dirty="0">
-                <a:solidFill>
-                  <a:srgbClr val="1E293B"/>
-                </a:solidFill>
-                <a:latin typeface="Calibri" pitchFamily="34" charset="0"/>
-                <a:ea typeface="Calibri" pitchFamily="34" charset="-122"/>
-                <a:cs typeface="Calibri" pitchFamily="34" charset="-120"/>
-              </a:rPr>
-              <a:t>Wire simulated flows to provider APIs</a:t>
-            </a:r>
-            <a:endParaRPr lang="en-US" sz="1300" dirty="0"/>
-          </a:p>
-        </p:txBody>
-      </p:sp>
-      <p:sp>
-        <p:nvSpPr>
-          <p:cNvPr id="16" name="Shape 14"/>
-          <p:cNvSpPr/>
-          <p:nvPr/>
-        </p:nvSpPr>
-        <p:spPr>
-          <a:xfrm>
-            <a:off x="6309360" y="3017520"/>
-            <a:ext cx="5394960" cy="1097280"/>
+              <a:t>23 SP</a:t>
+            </a:r>
+            <a:endParaRPr lang="en-US" sz="1800" dirty="0"/>
+          </a:p>
+        </p:txBody>
+      </p:sp>
+      <p:sp>
+        <p:nvSpPr>
+          <p:cNvPr id="19" name="Shape 17"/>
+          <p:cNvSpPr/>
+          <p:nvPr/>
+        </p:nvSpPr>
+        <p:spPr>
+          <a:xfrm>
+            <a:off x="548640" y="3785616"/>
+            <a:ext cx="914400" cy="594360"/>
           </a:xfrm>
           <a:prstGeom prst="roundRect">
             <a:avLst>
-              <a:gd name="adj" fmla="val 8333"/>
+              <a:gd name="adj" fmla="val 12308"/>
+            </a:avLst>
+          </a:prstGeom>
+          <a:solidFill>
+            <a:srgbClr val="F59E0B"/>
+          </a:solidFill>
+          <a:ln/>
+        </p:spPr>
+      </p:sp>
+      <p:sp>
+        <p:nvSpPr>
+          <p:cNvPr id="20" name="Text 18"/>
+          <p:cNvSpPr/>
+          <p:nvPr/>
+        </p:nvSpPr>
+        <p:spPr>
+          <a:xfrm>
+            <a:off x="548640" y="3785616"/>
+            <a:ext cx="914400" cy="594360"/>
+          </a:xfrm>
+          <a:prstGeom prst="rect">
+            <a:avLst/>
+          </a:prstGeom>
+          <a:noFill/>
+          <a:ln/>
+        </p:spPr>
+        <p:txBody>
+          <a:bodyPr wrap="square" rtlCol="0" anchor="ctr"/>
+          <a:lstStyle/>
+          <a:p>
+            <a:pPr algn="ctr" indent="0" marL="0">
+              <a:buNone/>
+            </a:pPr>
+            <a:r>
+              <a:rPr lang="en-US" sz="2200" b="1" dirty="0">
+                <a:solidFill>
+                  <a:srgbClr val="FFFFFF"/>
+                </a:solidFill>
+                <a:latin typeface="Calibri" pitchFamily="34" charset="0"/>
+                <a:ea typeface="Calibri" pitchFamily="34" charset="-122"/>
+                <a:cs typeface="Calibri" pitchFamily="34" charset="-120"/>
+              </a:rPr>
+              <a:t>S4</a:t>
+            </a:r>
+            <a:endParaRPr lang="en-US" sz="2200" dirty="0"/>
+          </a:p>
+        </p:txBody>
+      </p:sp>
+      <p:sp>
+        <p:nvSpPr>
+          <p:cNvPr id="21" name="Text 19"/>
+          <p:cNvSpPr/>
+          <p:nvPr/>
+        </p:nvSpPr>
+        <p:spPr>
+          <a:xfrm>
+            <a:off x="1645920" y="3877056"/>
+            <a:ext cx="7772400" cy="457200"/>
+          </a:xfrm>
+          <a:prstGeom prst="rect">
+            <a:avLst/>
+          </a:prstGeom>
+          <a:noFill/>
+          <a:ln/>
+        </p:spPr>
+        <p:txBody>
+          <a:bodyPr wrap="square" rtlCol="0" anchor="ctr"/>
+          <a:lstStyle/>
+          <a:p>
+            <a:pPr indent="0" marL="0">
+              <a:buNone/>
+            </a:pPr>
+            <a:r>
+              <a:rPr lang="en-US" sz="1600" dirty="0">
+                <a:solidFill>
+                  <a:srgbClr val="1E293B"/>
+                </a:solidFill>
+                <a:latin typeface="Calibri" pitchFamily="34" charset="0"/>
+                <a:ea typeface="Calibri" pitchFamily="34" charset="-122"/>
+                <a:cs typeface="Calibri" pitchFamily="34" charset="-120"/>
+              </a:rPr>
+              <a:t>Parent Portal + simulated payment</a:t>
+            </a:r>
+            <a:endParaRPr lang="en-US" sz="1600" dirty="0"/>
+          </a:p>
+        </p:txBody>
+      </p:sp>
+      <p:sp>
+        <p:nvSpPr>
+          <p:cNvPr id="22" name="Shape 20"/>
+          <p:cNvSpPr/>
+          <p:nvPr/>
+        </p:nvSpPr>
+        <p:spPr>
+          <a:xfrm>
+            <a:off x="9601200" y="3785616"/>
+            <a:ext cx="2011680" cy="594360"/>
+          </a:xfrm>
+          <a:prstGeom prst="roundRect">
+            <a:avLst>
+              <a:gd name="adj" fmla="val 12308"/>
             </a:avLst>
           </a:prstGeom>
           <a:solidFill>
             <a:srgbClr val="FFFFFF"/>
           </a:solidFill>
-          <a:ln w="12700">
+          <a:ln w="19050">
+            <a:solidFill>
+              <a:srgbClr val="F59E0B"/>
+            </a:solidFill>
+            <a:prstDash val="solid"/>
+          </a:ln>
+        </p:spPr>
+      </p:sp>
+      <p:sp>
+        <p:nvSpPr>
+          <p:cNvPr id="23" name="Text 21"/>
+          <p:cNvSpPr/>
+          <p:nvPr/>
+        </p:nvSpPr>
+        <p:spPr>
+          <a:xfrm>
+            <a:off x="9601200" y="3785616"/>
+            <a:ext cx="2011680" cy="594360"/>
+          </a:xfrm>
+          <a:prstGeom prst="rect">
+            <a:avLst/>
+          </a:prstGeom>
+          <a:noFill/>
+          <a:ln/>
+        </p:spPr>
+        <p:txBody>
+          <a:bodyPr wrap="square" rtlCol="0" anchor="ctr"/>
+          <a:lstStyle/>
+          <a:p>
+            <a:pPr algn="ctr" indent="0" marL="0">
+              <a:buNone/>
+            </a:pPr>
+            <a:r>
+              <a:rPr lang="en-US" sz="1800" b="1" dirty="0">
+                <a:solidFill>
+                  <a:srgbClr val="F59E0B"/>
+                </a:solidFill>
+                <a:latin typeface="Calibri" pitchFamily="34" charset="0"/>
+                <a:ea typeface="Calibri" pitchFamily="34" charset="-122"/>
+                <a:cs typeface="Calibri" pitchFamily="34" charset="-120"/>
+              </a:rPr>
+              <a:t>29 SP</a:t>
+            </a:r>
+            <a:endParaRPr lang="en-US" sz="1800" dirty="0"/>
+          </a:p>
+        </p:txBody>
+      </p:sp>
+      <p:sp>
+        <p:nvSpPr>
+          <p:cNvPr id="24" name="Shape 22"/>
+          <p:cNvSpPr/>
+          <p:nvPr/>
+        </p:nvSpPr>
+        <p:spPr>
+          <a:xfrm>
+            <a:off x="548640" y="4498848"/>
+            <a:ext cx="914400" cy="594360"/>
+          </a:xfrm>
+          <a:prstGeom prst="roundRect">
+            <a:avLst>
+              <a:gd name="adj" fmla="val 12308"/>
+            </a:avLst>
+          </a:prstGeom>
+          <a:solidFill>
+            <a:srgbClr val="1E3AA0"/>
+          </a:solidFill>
+          <a:ln/>
+        </p:spPr>
+      </p:sp>
+      <p:sp>
+        <p:nvSpPr>
+          <p:cNvPr id="25" name="Text 23"/>
+          <p:cNvSpPr/>
+          <p:nvPr/>
+        </p:nvSpPr>
+        <p:spPr>
+          <a:xfrm>
+            <a:off x="548640" y="4498848"/>
+            <a:ext cx="914400" cy="594360"/>
+          </a:xfrm>
+          <a:prstGeom prst="rect">
+            <a:avLst/>
+          </a:prstGeom>
+          <a:noFill/>
+          <a:ln/>
+        </p:spPr>
+        <p:txBody>
+          <a:bodyPr wrap="square" rtlCol="0" anchor="ctr"/>
+          <a:lstStyle/>
+          <a:p>
+            <a:pPr algn="ctr" indent="0" marL="0">
+              <a:buNone/>
+            </a:pPr>
+            <a:r>
+              <a:rPr lang="en-US" sz="2200" b="1" dirty="0">
+                <a:solidFill>
+                  <a:srgbClr val="FFFFFF"/>
+                </a:solidFill>
+                <a:latin typeface="Calibri" pitchFamily="34" charset="0"/>
+                <a:ea typeface="Calibri" pitchFamily="34" charset="-122"/>
+                <a:cs typeface="Calibri" pitchFamily="34" charset="-120"/>
+              </a:rPr>
+              <a:t>S5</a:t>
+            </a:r>
+            <a:endParaRPr lang="en-US" sz="2200" dirty="0"/>
+          </a:p>
+        </p:txBody>
+      </p:sp>
+      <p:sp>
+        <p:nvSpPr>
+          <p:cNvPr id="26" name="Text 24"/>
+          <p:cNvSpPr/>
+          <p:nvPr/>
+        </p:nvSpPr>
+        <p:spPr>
+          <a:xfrm>
+            <a:off x="1645920" y="4590288"/>
+            <a:ext cx="7772400" cy="457200"/>
+          </a:xfrm>
+          <a:prstGeom prst="rect">
+            <a:avLst/>
+          </a:prstGeom>
+          <a:noFill/>
+          <a:ln/>
+        </p:spPr>
+        <p:txBody>
+          <a:bodyPr wrap="square" rtlCol="0" anchor="ctr"/>
+          <a:lstStyle/>
+          <a:p>
+            <a:pPr indent="0" marL="0">
+              <a:buNone/>
+            </a:pPr>
+            <a:r>
+              <a:rPr lang="en-US" sz="1600" dirty="0">
+                <a:solidFill>
+                  <a:srgbClr val="1E293B"/>
+                </a:solidFill>
+                <a:latin typeface="Calibri" pitchFamily="34" charset="0"/>
+                <a:ea typeface="Calibri" pitchFamily="34" charset="-122"/>
+                <a:cs typeface="Calibri" pitchFamily="34" charset="-120"/>
+              </a:rPr>
+              <a:t>Polish · PWA · UML · defence package</a:t>
+            </a:r>
+            <a:endParaRPr lang="en-US" sz="1600" dirty="0"/>
+          </a:p>
+        </p:txBody>
+      </p:sp>
+      <p:sp>
+        <p:nvSpPr>
+          <p:cNvPr id="27" name="Shape 25"/>
+          <p:cNvSpPr/>
+          <p:nvPr/>
+        </p:nvSpPr>
+        <p:spPr>
+          <a:xfrm>
+            <a:off x="9601200" y="4498848"/>
+            <a:ext cx="2011680" cy="594360"/>
+          </a:xfrm>
+          <a:prstGeom prst="roundRect">
+            <a:avLst>
+              <a:gd name="adj" fmla="val 12308"/>
+            </a:avLst>
+          </a:prstGeom>
+          <a:solidFill>
+            <a:srgbClr val="FFFFFF"/>
+          </a:solidFill>
+          <a:ln w="19050">
             <a:solidFill>
               <a:srgbClr val="1E3AA0"/>
             </a:solidFill>
@@ -13547,50 +14451,30 @@
       </p:sp>
       <p:sp>
         <p:nvSpPr>
-          <p:cNvPr id="17" name="Shape 15"/>
-          <p:cNvSpPr/>
-          <p:nvPr/>
-        </p:nvSpPr>
-        <p:spPr>
-          <a:xfrm>
-            <a:off x="6309360" y="3017520"/>
-            <a:ext cx="457200" cy="1097280"/>
-          </a:xfrm>
-          <a:prstGeom prst="rect">
-            <a:avLst/>
-          </a:prstGeom>
-          <a:solidFill>
-            <a:srgbClr val="E63946"/>
-          </a:solidFill>
-          <a:ln/>
-        </p:spPr>
-      </p:sp>
-      <p:sp>
-        <p:nvSpPr>
-          <p:cNvPr id="18" name="Text 16"/>
-          <p:cNvSpPr/>
-          <p:nvPr/>
-        </p:nvSpPr>
-        <p:spPr>
-          <a:xfrm>
-            <a:off x="6949440" y="3108960"/>
-            <a:ext cx="4754880" cy="457200"/>
-          </a:xfrm>
-          <a:prstGeom prst="rect">
-            <a:avLst/>
-          </a:prstGeom>
-          <a:noFill/>
-          <a:ln/>
-        </p:spPr>
-        <p:txBody>
-          <a:bodyPr wrap="square" rtlCol="0" anchor="ctr"/>
-          <a:lstStyle/>
-          <a:p>
-            <a:pPr indent="0" marL="0">
-              <a:buNone/>
-            </a:pPr>
-            <a:r>
-              <a:rPr lang="en-US" sz="1600" b="1" dirty="0">
+          <p:cNvPr id="28" name="Text 26"/>
+          <p:cNvSpPr/>
+          <p:nvPr/>
+        </p:nvSpPr>
+        <p:spPr>
+          <a:xfrm>
+            <a:off x="9601200" y="4498848"/>
+            <a:ext cx="2011680" cy="594360"/>
+          </a:xfrm>
+          <a:prstGeom prst="rect">
+            <a:avLst/>
+          </a:prstGeom>
+          <a:noFill/>
+          <a:ln/>
+        </p:spPr>
+        <p:txBody>
+          <a:bodyPr wrap="square" rtlCol="0" anchor="ctr"/>
+          <a:lstStyle/>
+          <a:p>
+            <a:pPr algn="ctr" indent="0" marL="0">
+              <a:buNone/>
+            </a:pPr>
+            <a:r>
+              <a:rPr lang="en-US" sz="1800" b="1" dirty="0">
                 <a:solidFill>
                   <a:srgbClr val="1E3AA0"/>
                 </a:solidFill>
@@ -13598,73 +14482,134 @@
                 <a:ea typeface="Calibri" pitchFamily="34" charset="-122"/>
                 <a:cs typeface="Calibri" pitchFamily="34" charset="-120"/>
               </a:rPr>
-              <a:t>Multi-tenant SaaS</a:t>
-            </a:r>
-            <a:endParaRPr lang="en-US" sz="1600" dirty="0"/>
-          </a:p>
-        </p:txBody>
-      </p:sp>
-      <p:sp>
-        <p:nvSpPr>
-          <p:cNvPr id="19" name="Text 17"/>
-          <p:cNvSpPr/>
-          <p:nvPr/>
-        </p:nvSpPr>
-        <p:spPr>
-          <a:xfrm>
-            <a:off x="6949440" y="3566160"/>
-            <a:ext cx="4754880" cy="457200"/>
-          </a:xfrm>
-          <a:prstGeom prst="rect">
-            <a:avLst/>
-          </a:prstGeom>
-          <a:noFill/>
-          <a:ln/>
-        </p:spPr>
-        <p:txBody>
-          <a:bodyPr wrap="square" rtlCol="0" anchor="ctr"/>
-          <a:lstStyle/>
-          <a:p>
-            <a:pPr indent="0" marL="0">
-              <a:buNone/>
-            </a:pPr>
-            <a:r>
-              <a:rPr lang="en-US" sz="1300" i="1" dirty="0">
-                <a:solidFill>
-                  <a:srgbClr val="1E293B"/>
-                </a:solidFill>
-                <a:latin typeface="Calibri" pitchFamily="34" charset="0"/>
-                <a:ea typeface="Calibri" pitchFamily="34" charset="-122"/>
-                <a:cs typeface="Calibri" pitchFamily="34" charset="-120"/>
-              </a:rPr>
-              <a:t>Per-institution branding, fees, timetables</a:t>
-            </a:r>
-            <a:endParaRPr lang="en-US" sz="1300" dirty="0"/>
-          </a:p>
-        </p:txBody>
-      </p:sp>
-      <p:sp>
-        <p:nvSpPr>
-          <p:cNvPr id="20" name="Shape 18"/>
-          <p:cNvSpPr/>
-          <p:nvPr/>
-        </p:nvSpPr>
-        <p:spPr>
-          <a:xfrm>
-            <a:off x="548640" y="4389120"/>
-            <a:ext cx="5394960" cy="1097280"/>
+              <a:t>18 SP</a:t>
+            </a:r>
+            <a:endParaRPr lang="en-US" sz="1800" dirty="0"/>
+          </a:p>
+        </p:txBody>
+      </p:sp>
+      <p:sp>
+        <p:nvSpPr>
+          <p:cNvPr id="29" name="Shape 27"/>
+          <p:cNvSpPr/>
+          <p:nvPr/>
+        </p:nvSpPr>
+        <p:spPr>
+          <a:xfrm>
+            <a:off x="548640" y="5212080"/>
+            <a:ext cx="914400" cy="594360"/>
           </a:xfrm>
           <a:prstGeom prst="roundRect">
             <a:avLst>
-              <a:gd name="adj" fmla="val 8333"/>
+              <a:gd name="adj" fmla="val 12308"/>
+            </a:avLst>
+          </a:prstGeom>
+          <a:solidFill>
+            <a:srgbClr val="F59E0B"/>
+          </a:solidFill>
+          <a:ln/>
+        </p:spPr>
+      </p:sp>
+      <p:sp>
+        <p:nvSpPr>
+          <p:cNvPr id="30" name="Text 28"/>
+          <p:cNvSpPr/>
+          <p:nvPr/>
+        </p:nvSpPr>
+        <p:spPr>
+          <a:xfrm>
+            <a:off x="548640" y="5212080"/>
+            <a:ext cx="914400" cy="594360"/>
+          </a:xfrm>
+          <a:prstGeom prst="rect">
+            <a:avLst/>
+          </a:prstGeom>
+          <a:noFill/>
+          <a:ln/>
+        </p:spPr>
+        <p:txBody>
+          <a:bodyPr wrap="square" rtlCol="0" anchor="ctr"/>
+          <a:lstStyle/>
+          <a:p>
+            <a:pPr algn="ctr" indent="0" marL="0">
+              <a:buNone/>
+            </a:pPr>
+            <a:r>
+              <a:rPr lang="en-US" sz="2200" b="1" dirty="0">
+                <a:solidFill>
+                  <a:srgbClr val="FFFFFF"/>
+                </a:solidFill>
+                <a:latin typeface="Calibri" pitchFamily="34" charset="0"/>
+                <a:ea typeface="Calibri" pitchFamily="34" charset="-122"/>
+                <a:cs typeface="Calibri" pitchFamily="34" charset="-120"/>
+              </a:rPr>
+              <a:t>S6</a:t>
+            </a:r>
+            <a:endParaRPr lang="en-US" sz="2200" dirty="0"/>
+          </a:p>
+        </p:txBody>
+      </p:sp>
+      <p:sp>
+        <p:nvSpPr>
+          <p:cNvPr id="31" name="Text 29"/>
+          <p:cNvSpPr/>
+          <p:nvPr/>
+        </p:nvSpPr>
+        <p:spPr>
+          <a:xfrm>
+            <a:off x="1645920" y="5303520"/>
+            <a:ext cx="7772400" cy="457200"/>
+          </a:xfrm>
+          <a:prstGeom prst="rect">
+            <a:avLst/>
+          </a:prstGeom>
+          <a:noFill/>
+          <a:ln/>
+        </p:spPr>
+        <p:txBody>
+          <a:bodyPr wrap="square" rtlCol="0" anchor="ctr"/>
+          <a:lstStyle/>
+          <a:p>
+            <a:pPr indent="0" marL="0">
+              <a:buNone/>
+            </a:pPr>
+            <a:r>
+              <a:rPr lang="en-US" sz="1600" dirty="0">
+                <a:solidFill>
+                  <a:srgbClr val="1E293B"/>
+                </a:solidFill>
+                <a:latin typeface="Calibri" pitchFamily="34" charset="0"/>
+                <a:ea typeface="Calibri" pitchFamily="34" charset="-122"/>
+                <a:cs typeface="Calibri" pitchFamily="34" charset="-120"/>
+              </a:rPr>
+              <a:t>Bilingual · Profile · Help · ICS</a:t>
+            </a:r>
+            <a:endParaRPr lang="en-US" sz="1600" dirty="0"/>
+          </a:p>
+        </p:txBody>
+      </p:sp>
+      <p:sp>
+        <p:nvSpPr>
+          <p:cNvPr id="32" name="Shape 30"/>
+          <p:cNvSpPr/>
+          <p:nvPr/>
+        </p:nvSpPr>
+        <p:spPr>
+          <a:xfrm>
+            <a:off x="9601200" y="5212080"/>
+            <a:ext cx="2011680" cy="594360"/>
+          </a:xfrm>
+          <a:prstGeom prst="roundRect">
+            <a:avLst>
+              <a:gd name="adj" fmla="val 12308"/>
             </a:avLst>
           </a:prstGeom>
           <a:solidFill>
             <a:srgbClr val="FFFFFF"/>
           </a:solidFill>
-          <a:ln w="12700">
+          <a:ln w="19050">
             <a:solidFill>
-              <a:srgbClr val="1E3AA0"/>
+              <a:srgbClr val="F59E0B"/>
             </a:solidFill>
             <a:prstDash val="solid"/>
           </a:ln>
@@ -13672,224 +14617,79 @@
       </p:sp>
       <p:sp>
         <p:nvSpPr>
-          <p:cNvPr id="21" name="Shape 19"/>
-          <p:cNvSpPr/>
-          <p:nvPr/>
-        </p:nvSpPr>
-        <p:spPr>
-          <a:xfrm>
-            <a:off x="548640" y="4389120"/>
-            <a:ext cx="457200" cy="1097280"/>
-          </a:xfrm>
-          <a:prstGeom prst="rect">
-            <a:avLst/>
-          </a:prstGeom>
-          <a:solidFill>
-            <a:srgbClr val="E63946"/>
-          </a:solidFill>
-          <a:ln/>
-        </p:spPr>
-      </p:sp>
-      <p:sp>
-        <p:nvSpPr>
-          <p:cNvPr id="22" name="Text 20"/>
-          <p:cNvSpPr/>
-          <p:nvPr/>
-        </p:nvSpPr>
-        <p:spPr>
-          <a:xfrm>
-            <a:off x="1188720" y="4480560"/>
-            <a:ext cx="4754880" cy="457200"/>
-          </a:xfrm>
-          <a:prstGeom prst="rect">
-            <a:avLst/>
-          </a:prstGeom>
-          <a:noFill/>
-          <a:ln/>
-        </p:spPr>
-        <p:txBody>
-          <a:bodyPr wrap="square" rtlCol="0" anchor="ctr"/>
-          <a:lstStyle/>
-          <a:p>
-            <a:pPr indent="0" marL="0">
-              <a:buNone/>
-            </a:pPr>
-            <a:r>
-              <a:rPr lang="en-US" sz="1600" b="1" dirty="0">
-                <a:solidFill>
-                  <a:srgbClr val="1E3AA0"/>
-                </a:solidFill>
-                <a:latin typeface="Calibri" pitchFamily="34" charset="0"/>
-                <a:ea typeface="Calibri" pitchFamily="34" charset="-122"/>
-                <a:cs typeface="Calibri" pitchFamily="34" charset="-120"/>
-              </a:rPr>
-              <a:t>Exam scheduling</a:t>
-            </a:r>
-            <a:endParaRPr lang="en-US" sz="1600" dirty="0"/>
-          </a:p>
-        </p:txBody>
-      </p:sp>
-      <p:sp>
-        <p:nvSpPr>
-          <p:cNvPr id="23" name="Text 21"/>
-          <p:cNvSpPr/>
-          <p:nvPr/>
-        </p:nvSpPr>
-        <p:spPr>
-          <a:xfrm>
-            <a:off x="1188720" y="4937760"/>
-            <a:ext cx="4754880" cy="457200"/>
-          </a:xfrm>
-          <a:prstGeom prst="rect">
-            <a:avLst/>
-          </a:prstGeom>
-          <a:noFill/>
-          <a:ln/>
-        </p:spPr>
-        <p:txBody>
-          <a:bodyPr wrap="square" rtlCol="0" anchor="ctr"/>
-          <a:lstStyle/>
-          <a:p>
-            <a:pPr indent="0" marL="0">
-              <a:buNone/>
-            </a:pPr>
-            <a:r>
-              <a:rPr lang="en-US" sz="1300" i="1" dirty="0">
-                <a:solidFill>
-                  <a:srgbClr val="1E293B"/>
-                </a:solidFill>
-                <a:latin typeface="Calibri" pitchFamily="34" charset="0"/>
-                <a:ea typeface="Calibri" pitchFamily="34" charset="-122"/>
-                <a:cs typeface="Calibri" pitchFamily="34" charset="-120"/>
-              </a:rPr>
-              <a:t>Clash-free generation, room + invigilator</a:t>
-            </a:r>
-            <a:endParaRPr lang="en-US" sz="1300" dirty="0"/>
-          </a:p>
-        </p:txBody>
-      </p:sp>
-      <p:sp>
-        <p:nvSpPr>
-          <p:cNvPr id="24" name="Shape 22"/>
-          <p:cNvSpPr/>
-          <p:nvPr/>
-        </p:nvSpPr>
-        <p:spPr>
-          <a:xfrm>
-            <a:off x="6309360" y="4389120"/>
-            <a:ext cx="5394960" cy="1097280"/>
-          </a:xfrm>
-          <a:prstGeom prst="roundRect">
-            <a:avLst>
-              <a:gd name="adj" fmla="val 8333"/>
-            </a:avLst>
-          </a:prstGeom>
-          <a:solidFill>
-            <a:srgbClr val="FFFFFF"/>
-          </a:solidFill>
-          <a:ln w="12700">
-            <a:solidFill>
-              <a:srgbClr val="1E3AA0"/>
-            </a:solidFill>
-            <a:prstDash val="solid"/>
-          </a:ln>
-        </p:spPr>
-      </p:sp>
-      <p:sp>
-        <p:nvSpPr>
-          <p:cNvPr id="25" name="Shape 23"/>
-          <p:cNvSpPr/>
-          <p:nvPr/>
-        </p:nvSpPr>
-        <p:spPr>
-          <a:xfrm>
-            <a:off x="6309360" y="4389120"/>
-            <a:ext cx="457200" cy="1097280"/>
-          </a:xfrm>
-          <a:prstGeom prst="rect">
-            <a:avLst/>
-          </a:prstGeom>
-          <a:solidFill>
-            <a:srgbClr val="E63946"/>
-          </a:solidFill>
-          <a:ln/>
-        </p:spPr>
-      </p:sp>
-      <p:sp>
-        <p:nvSpPr>
-          <p:cNvPr id="26" name="Text 24"/>
-          <p:cNvSpPr/>
-          <p:nvPr/>
-        </p:nvSpPr>
-        <p:spPr>
-          <a:xfrm>
-            <a:off x="6949440" y="4480560"/>
-            <a:ext cx="4754880" cy="457200"/>
-          </a:xfrm>
-          <a:prstGeom prst="rect">
-            <a:avLst/>
-          </a:prstGeom>
-          <a:noFill/>
-          <a:ln/>
-        </p:spPr>
-        <p:txBody>
-          <a:bodyPr wrap="square" rtlCol="0" anchor="ctr"/>
-          <a:lstStyle/>
-          <a:p>
-            <a:pPr indent="0" marL="0">
-              <a:buNone/>
-            </a:pPr>
-            <a:r>
-              <a:rPr lang="en-US" sz="1600" b="1" dirty="0">
-                <a:solidFill>
-                  <a:srgbClr val="1E3AA0"/>
-                </a:solidFill>
-                <a:latin typeface="Calibri" pitchFamily="34" charset="0"/>
-                <a:ea typeface="Calibri" pitchFamily="34" charset="-122"/>
-                <a:cs typeface="Calibri" pitchFamily="34" charset="-120"/>
-              </a:rPr>
-              <a:t>Library management</a:t>
-            </a:r>
-            <a:endParaRPr lang="en-US" sz="1600" dirty="0"/>
-          </a:p>
-        </p:txBody>
-      </p:sp>
-      <p:sp>
-        <p:nvSpPr>
-          <p:cNvPr id="27" name="Text 25"/>
-          <p:cNvSpPr/>
-          <p:nvPr/>
-        </p:nvSpPr>
-        <p:spPr>
-          <a:xfrm>
-            <a:off x="6949440" y="4937760"/>
-            <a:ext cx="4754880" cy="457200"/>
-          </a:xfrm>
-          <a:prstGeom prst="rect">
-            <a:avLst/>
-          </a:prstGeom>
-          <a:noFill/>
-          <a:ln/>
-        </p:spPr>
-        <p:txBody>
-          <a:bodyPr wrap="square" rtlCol="0" anchor="ctr"/>
-          <a:lstStyle/>
-          <a:p>
-            <a:pPr indent="0" marL="0">
-              <a:buNone/>
-            </a:pPr>
-            <a:r>
-              <a:rPr lang="en-US" sz="1300" i="1" dirty="0">
-                <a:solidFill>
-                  <a:srgbClr val="1E293B"/>
-                </a:solidFill>
-                <a:latin typeface="Calibri" pitchFamily="34" charset="0"/>
-                <a:ea typeface="Calibri" pitchFamily="34" charset="-122"/>
-                <a:cs typeface="Calibri" pitchFamily="34" charset="-120"/>
-              </a:rPr>
-              <a:t>Catalogue, borrowing, reservations</a:t>
-            </a:r>
-            <a:endParaRPr lang="en-US" sz="1300" dirty="0"/>
+          <p:cNvPr id="33" name="Text 31"/>
+          <p:cNvSpPr/>
+          <p:nvPr/>
+        </p:nvSpPr>
+        <p:spPr>
+          <a:xfrm>
+            <a:off x="9601200" y="5212080"/>
+            <a:ext cx="2011680" cy="594360"/>
+          </a:xfrm>
+          <a:prstGeom prst="rect">
+            <a:avLst/>
+          </a:prstGeom>
+          <a:noFill/>
+          <a:ln/>
+        </p:spPr>
+        <p:txBody>
+          <a:bodyPr wrap="square" rtlCol="0" anchor="ctr"/>
+          <a:lstStyle/>
+          <a:p>
+            <a:pPr algn="ctr" indent="0" marL="0">
+              <a:buNone/>
+            </a:pPr>
+            <a:r>
+              <a:rPr lang="en-US" sz="1800" b="1" dirty="0">
+                <a:solidFill>
+                  <a:srgbClr val="F59E0B"/>
+                </a:solidFill>
+                <a:latin typeface="Calibri" pitchFamily="34" charset="0"/>
+                <a:ea typeface="Calibri" pitchFamily="34" charset="-122"/>
+                <a:cs typeface="Calibri" pitchFamily="34" charset="-120"/>
+              </a:rPr>
+              <a:t>16 SP</a:t>
+            </a:r>
+            <a:endParaRPr lang="en-US" sz="1800" dirty="0"/>
+          </a:p>
+        </p:txBody>
+      </p:sp>
+      <p:sp>
+        <p:nvSpPr>
+          <p:cNvPr id="34" name="Text 32"/>
+          <p:cNvSpPr/>
+          <p:nvPr/>
+        </p:nvSpPr>
+        <p:spPr>
+          <a:xfrm>
+            <a:off x="457200" y="6126480"/>
+            <a:ext cx="11247120" cy="320040"/>
+          </a:xfrm>
+          <a:prstGeom prst="rect">
+            <a:avLst/>
+          </a:prstGeom>
+          <a:noFill/>
+          <a:ln/>
+        </p:spPr>
+        <p:txBody>
+          <a:bodyPr wrap="square" rtlCol="0" anchor="ctr"/>
+          <a:lstStyle/>
+          <a:p>
+            <a:pPr algn="ctr" indent="0" marL="0">
+              <a:buNone/>
+            </a:pPr>
+            <a:r>
+              <a:rPr lang="en-US" sz="1200" i="1" dirty="0">
+                <a:solidFill>
+                  <a:srgbClr val="64748B"/>
+                </a:solidFill>
+                <a:latin typeface="Calibri" pitchFamily="34" charset="0"/>
+                <a:ea typeface="Calibri" pitchFamily="34" charset="-122"/>
+                <a:cs typeface="Calibri" pitchFamily="34" charset="-120"/>
+              </a:rPr>
+              <a:t>Velocity stabilised at 22 SP/sprint · 120 SP delivered in total</a:t>
+            </a:r>
+            <a:endParaRPr lang="en-US" sz="1200" dirty="0"/>
           </a:p>
         </p:txBody>
       </p:sp>
@@ -13952,6 +14752,2116 @@
 <file path=ppt/slides/slide25.xml><?xml version="1.0" encoding="utf-8"?>
 <p:sld xmlns:a="http://schemas.openxmlformats.org/drawingml/2006/main" xmlns:r="http://schemas.openxmlformats.org/officeDocument/2006/relationships" xmlns:p="http://schemas.openxmlformats.org/presentationml/2006/main">
   <p:cSld name="Slide 25">
+    <p:spTree>
+      <p:nvGrpSpPr>
+        <p:cNvPr id="1" name=""/>
+        <p:cNvGrpSpPr/>
+        <p:nvPr/>
+      </p:nvGrpSpPr>
+      <p:grpSpPr>
+        <a:xfrm>
+          <a:off x="0" y="0"/>
+          <a:ext cx="0" cy="0"/>
+          <a:chOff x="0" y="0"/>
+          <a:chExt cx="0" cy="0"/>
+        </a:xfrm>
+      </p:grpSpPr>
+      <p:sp>
+        <p:nvSpPr>
+          <p:cNvPr id="2" name="Text 0"/>
+          <p:cNvSpPr/>
+          <p:nvPr/>
+        </p:nvSpPr>
+        <p:spPr>
+          <a:xfrm>
+            <a:off x="457200" y="320040"/>
+            <a:ext cx="11247120" cy="685800"/>
+          </a:xfrm>
+          <a:prstGeom prst="rect">
+            <a:avLst/>
+          </a:prstGeom>
+          <a:noFill/>
+          <a:ln/>
+        </p:spPr>
+        <p:txBody>
+          <a:bodyPr wrap="square" rtlCol="0" anchor="ctr"/>
+          <a:lstStyle/>
+          <a:p>
+            <a:pPr indent="0" marL="0">
+              <a:buNone/>
+            </a:pPr>
+            <a:r>
+              <a:rPr lang="en-US" sz="3200" b="1" dirty="0">
+                <a:solidFill>
+                  <a:srgbClr val="1E3AA0"/>
+                </a:solidFill>
+                <a:latin typeface="Calibri" pitchFamily="34" charset="0"/>
+                <a:ea typeface="Calibri" pitchFamily="34" charset="-122"/>
+                <a:cs typeface="Calibri" pitchFamily="34" charset="-120"/>
+              </a:rPr>
+              <a:t>Burndown chart</a:t>
+            </a:r>
+            <a:endParaRPr lang="en-US" sz="3200" dirty="0"/>
+          </a:p>
+        </p:txBody>
+      </p:sp>
+      <p:sp>
+        <p:nvSpPr>
+          <p:cNvPr id="3" name="Text 1"/>
+          <p:cNvSpPr/>
+          <p:nvPr/>
+        </p:nvSpPr>
+        <p:spPr>
+          <a:xfrm>
+            <a:off x="457200" y="960120"/>
+            <a:ext cx="11247120" cy="365760"/>
+          </a:xfrm>
+          <a:prstGeom prst="rect">
+            <a:avLst/>
+          </a:prstGeom>
+          <a:noFill/>
+          <a:ln/>
+        </p:spPr>
+        <p:txBody>
+          <a:bodyPr wrap="square" rtlCol="0" anchor="ctr"/>
+          <a:lstStyle/>
+          <a:p>
+            <a:pPr indent="0" marL="0">
+              <a:buNone/>
+            </a:pPr>
+            <a:r>
+              <a:rPr lang="en-US" sz="1500" i="1" dirty="0">
+                <a:solidFill>
+                  <a:srgbClr val="E63946"/>
+                </a:solidFill>
+                <a:latin typeface="Calibri" pitchFamily="34" charset="0"/>
+                <a:ea typeface="Calibri" pitchFamily="34" charset="-122"/>
+                <a:cs typeface="Calibri" pitchFamily="34" charset="-120"/>
+              </a:rPr>
+              <a:t>Honest scope tracking — two scope-creep events recorded</a:t>
+            </a:r>
+            <a:endParaRPr lang="en-US" sz="1500" dirty="0"/>
+          </a:p>
+        </p:txBody>
+      </p:sp>
+      <p:pic>
+        <p:nvPicPr>
+          <p:cNvPr id="4" name="Image 0" descr="/home/daytona/project/deliverables/diagrams/16-burndown.png">    </p:cNvPr>
+          <p:cNvPicPr>
+            <a:picLocks noChangeAspect="1"/>
+          </p:cNvPicPr>
+          <p:nvPr/>
+        </p:nvPicPr>
+        <p:blipFill>
+          <a:blip r:embed="rId1"/>
+          <a:stretch>
+            <a:fillRect/>
+          </a:stretch>
+        </p:blipFill>
+        <p:spPr>
+          <a:xfrm>
+            <a:off x="1371600" y="1371600"/>
+            <a:ext cx="9418320" cy="4572000"/>
+          </a:xfrm>
+          <a:prstGeom prst="rect">
+            <a:avLst/>
+          </a:prstGeom>
+        </p:spPr>
+      </p:pic>
+      <p:sp>
+        <p:nvSpPr>
+          <p:cNvPr id="5" name="Text 2"/>
+          <p:cNvSpPr/>
+          <p:nvPr/>
+        </p:nvSpPr>
+        <p:spPr>
+          <a:xfrm>
+            <a:off x="457200" y="6035040"/>
+            <a:ext cx="11247120" cy="320040"/>
+          </a:xfrm>
+          <a:prstGeom prst="rect">
+            <a:avLst/>
+          </a:prstGeom>
+          <a:noFill/>
+          <a:ln/>
+        </p:spPr>
+        <p:txBody>
+          <a:bodyPr wrap="square" rtlCol="0" anchor="ctr"/>
+          <a:lstStyle/>
+          <a:p>
+            <a:pPr algn="ctr" indent="0" marL="0">
+              <a:buNone/>
+            </a:pPr>
+            <a:r>
+              <a:rPr lang="en-US" sz="1200" i="1" dirty="0">
+                <a:solidFill>
+                  <a:srgbClr val="64748B"/>
+                </a:solidFill>
+                <a:latin typeface="Calibri" pitchFamily="34" charset="0"/>
+                <a:ea typeface="Calibri" pitchFamily="34" charset="-122"/>
+                <a:cs typeface="Calibri" pitchFamily="34" charset="-120"/>
+              </a:rPr>
+              <a:t>Figure 5b.2 — Story points remaining over 6 sprints · red dashed = scope added</a:t>
+            </a:r>
+            <a:endParaRPr lang="en-US" sz="1200" dirty="0"/>
+          </a:p>
+        </p:txBody>
+      </p:sp>
+      <p:sp>
+        <p:nvSpPr>
+          <p:cNvPr id="25" name="Slide Number Placeholder 0"/>
+          <p:cNvSpPr>
+            <a:spLocks noGrp="1"/>
+          </p:cNvSpPr>
+          <p:nvPr>
+            <p:ph type="sldNum" sz="quarter" idx="4294967295"/>
+          </p:nvPr>
+        </p:nvSpPr>
+        <p:spPr>
+          <a:xfrm>
+            <a:off x="11612880" y="6537960"/>
+            <a:ext cx="457200" cy="274320"/>
+          </a:xfrm>
+          <a:prstGeom prst="rect">
+            <a:avLst/>
+          </a:prstGeom>
+          <a:extLst>
+            <a:ext uri="{C572A759-6A51-4108-AA02-DFA0A04FC94B}">
+              <ma14:wrappingTextBoxFlag xmlns:ma14="http://schemas.microsoft.com/office/mac/drawingml/2011/main" val="0"/>
+            </a:ext>
+          </a:extLst>
+        </p:spPr>
+        <p:txBody>
+          <a:bodyPr/>
+          <a:lstStyle>
+            <a:lvl1pPr>
+              <a:defRPr sz="1000">
+                <a:solidFill>
+                  <a:srgbClr val="FFFFFF"/>
+                </a:solidFill>
+                <a:latin typeface="Calibri"/>
+                <a:ea typeface="Calibri"/>
+                <a:cs typeface="Calibri"/>
+              </a:defRPr>
+            </a:lvl1pPr>
+          </a:lstStyle>
+          <a:p>
+            <a:pPr algn="r"/>
+            <a:fld id="{F7021451-1387-4CA6-816F-3879F97B5CBC}" type="slidenum">
+              <a:rPr b="0" lang="en-US"/>
+              <a:t>25</a:t>
+            </a:fld>
+            <a:endParaRPr lang="en-US"/>
+          </a:p>
+        </p:txBody>
+      </p:sp>
+    </p:spTree>
+  </p:cSld>
+  <p:clrMapOvr>
+    <a:masterClrMapping/>
+  </p:clrMapOvr>
+</p:sld>
+</file>
+
+<file path=ppt/slides/slide26.xml><?xml version="1.0" encoding="utf-8"?>
+<p:sld xmlns:a="http://schemas.openxmlformats.org/drawingml/2006/main" xmlns:r="http://schemas.openxmlformats.org/officeDocument/2006/relationships" xmlns:p="http://schemas.openxmlformats.org/presentationml/2006/main">
+  <p:cSld name="Slide 26">
+    <p:spTree>
+      <p:nvGrpSpPr>
+        <p:cNvPr id="1" name=""/>
+        <p:cNvGrpSpPr/>
+        <p:nvPr/>
+      </p:nvGrpSpPr>
+      <p:grpSpPr>
+        <a:xfrm>
+          <a:off x="0" y="0"/>
+          <a:ext cx="0" cy="0"/>
+          <a:chOff x="0" y="0"/>
+          <a:chExt cx="0" cy="0"/>
+        </a:xfrm>
+      </p:grpSpPr>
+      <p:sp>
+        <p:nvSpPr>
+          <p:cNvPr id="2" name="Text 0"/>
+          <p:cNvSpPr/>
+          <p:nvPr/>
+        </p:nvSpPr>
+        <p:spPr>
+          <a:xfrm>
+            <a:off x="457200" y="320040"/>
+            <a:ext cx="11247120" cy="685800"/>
+          </a:xfrm>
+          <a:prstGeom prst="rect">
+            <a:avLst/>
+          </a:prstGeom>
+          <a:noFill/>
+          <a:ln/>
+        </p:spPr>
+        <p:txBody>
+          <a:bodyPr wrap="square" rtlCol="0" anchor="ctr"/>
+          <a:lstStyle/>
+          <a:p>
+            <a:pPr indent="0" marL="0">
+              <a:buNone/>
+            </a:pPr>
+            <a:r>
+              <a:rPr lang="en-US" sz="3200" b="1" dirty="0">
+                <a:solidFill>
+                  <a:srgbClr val="1E3AA0"/>
+                </a:solidFill>
+                <a:latin typeface="Calibri" pitchFamily="34" charset="0"/>
+                <a:ea typeface="Calibri" pitchFamily="34" charset="-122"/>
+                <a:cs typeface="Calibri" pitchFamily="34" charset="-120"/>
+              </a:rPr>
+              <a:t>Kanban board</a:t>
+            </a:r>
+            <a:endParaRPr lang="en-US" sz="3200" dirty="0"/>
+          </a:p>
+        </p:txBody>
+      </p:sp>
+      <p:sp>
+        <p:nvSpPr>
+          <p:cNvPr id="3" name="Text 1"/>
+          <p:cNvSpPr/>
+          <p:nvPr/>
+        </p:nvSpPr>
+        <p:spPr>
+          <a:xfrm>
+            <a:off x="457200" y="960120"/>
+            <a:ext cx="11247120" cy="365760"/>
+          </a:xfrm>
+          <a:prstGeom prst="rect">
+            <a:avLst/>
+          </a:prstGeom>
+          <a:noFill/>
+          <a:ln/>
+        </p:spPr>
+        <p:txBody>
+          <a:bodyPr wrap="square" rtlCol="0" anchor="ctr"/>
+          <a:lstStyle/>
+          <a:p>
+            <a:pPr indent="0" marL="0">
+              <a:buNone/>
+            </a:pPr>
+            <a:r>
+              <a:rPr lang="en-US" sz="1500" i="1" dirty="0">
+                <a:solidFill>
+                  <a:srgbClr val="E63946"/>
+                </a:solidFill>
+                <a:latin typeface="Calibri" pitchFamily="34" charset="0"/>
+                <a:ea typeface="Calibri" pitchFamily="34" charset="-122"/>
+                <a:cs typeface="Calibri" pitchFamily="34" charset="-120"/>
+              </a:rPr>
+              <a:t>WIP limit = 3 · snapshot at end of Sprint 4</a:t>
+            </a:r>
+            <a:endParaRPr lang="en-US" sz="1500" dirty="0"/>
+          </a:p>
+        </p:txBody>
+      </p:sp>
+      <p:pic>
+        <p:nvPicPr>
+          <p:cNvPr id="4" name="Image 0" descr="/home/daytona/project/deliverables/diagrams/17-kanban.png">    </p:cNvPr>
+          <p:cNvPicPr>
+            <a:picLocks noChangeAspect="1"/>
+          </p:cNvPicPr>
+          <p:nvPr/>
+        </p:nvPicPr>
+        <p:blipFill>
+          <a:blip r:embed="rId1"/>
+          <a:stretch>
+            <a:fillRect/>
+          </a:stretch>
+        </p:blipFill>
+        <p:spPr>
+          <a:xfrm>
+            <a:off x="731520" y="1371600"/>
+            <a:ext cx="10698480" cy="4572000"/>
+          </a:xfrm>
+          <a:prstGeom prst="rect">
+            <a:avLst/>
+          </a:prstGeom>
+        </p:spPr>
+      </p:pic>
+      <p:sp>
+        <p:nvSpPr>
+          <p:cNvPr id="5" name="Text 2"/>
+          <p:cNvSpPr/>
+          <p:nvPr/>
+        </p:nvSpPr>
+        <p:spPr>
+          <a:xfrm>
+            <a:off x="457200" y="6035040"/>
+            <a:ext cx="11247120" cy="320040"/>
+          </a:xfrm>
+          <a:prstGeom prst="rect">
+            <a:avLst/>
+          </a:prstGeom>
+          <a:noFill/>
+          <a:ln/>
+        </p:spPr>
+        <p:txBody>
+          <a:bodyPr wrap="square" rtlCol="0" anchor="ctr"/>
+          <a:lstStyle/>
+          <a:p>
+            <a:pPr algn="ctr" indent="0" marL="0">
+              <a:buNone/>
+            </a:pPr>
+            <a:r>
+              <a:rPr lang="en-US" sz="1200" i="1" dirty="0">
+                <a:solidFill>
+                  <a:srgbClr val="64748B"/>
+                </a:solidFill>
+                <a:latin typeface="Calibri" pitchFamily="34" charset="0"/>
+                <a:ea typeface="Calibri" pitchFamily="34" charset="-122"/>
+                <a:cs typeface="Calibri" pitchFamily="34" charset="-120"/>
+              </a:rPr>
+              <a:t>Figure 5b.1 — Backlog · To Do · In Progress (WIP 3) · Review · Done</a:t>
+            </a:r>
+            <a:endParaRPr lang="en-US" sz="1200" dirty="0"/>
+          </a:p>
+        </p:txBody>
+      </p:sp>
+      <p:sp>
+        <p:nvSpPr>
+          <p:cNvPr id="25" name="Slide Number Placeholder 0"/>
+          <p:cNvSpPr>
+            <a:spLocks noGrp="1"/>
+          </p:cNvSpPr>
+          <p:nvPr>
+            <p:ph type="sldNum" sz="quarter" idx="4294967295"/>
+          </p:nvPr>
+        </p:nvSpPr>
+        <p:spPr>
+          <a:xfrm>
+            <a:off x="11612880" y="6537960"/>
+            <a:ext cx="457200" cy="274320"/>
+          </a:xfrm>
+          <a:prstGeom prst="rect">
+            <a:avLst/>
+          </a:prstGeom>
+          <a:extLst>
+            <a:ext uri="{C572A759-6A51-4108-AA02-DFA0A04FC94B}">
+              <ma14:wrappingTextBoxFlag xmlns:ma14="http://schemas.microsoft.com/office/mac/drawingml/2011/main" val="0"/>
+            </a:ext>
+          </a:extLst>
+        </p:spPr>
+        <p:txBody>
+          <a:bodyPr/>
+          <a:lstStyle>
+            <a:lvl1pPr>
+              <a:defRPr sz="1000">
+                <a:solidFill>
+                  <a:srgbClr val="FFFFFF"/>
+                </a:solidFill>
+                <a:latin typeface="Calibri"/>
+                <a:ea typeface="Calibri"/>
+                <a:cs typeface="Calibri"/>
+              </a:defRPr>
+            </a:lvl1pPr>
+          </a:lstStyle>
+          <a:p>
+            <a:pPr algn="r"/>
+            <a:fld id="{F7021451-1387-4CA6-816F-3879F97B5CBC}" type="slidenum">
+              <a:rPr b="0" lang="en-US"/>
+              <a:t>26</a:t>
+            </a:fld>
+            <a:endParaRPr lang="en-US"/>
+          </a:p>
+        </p:txBody>
+      </p:sp>
+    </p:spTree>
+  </p:cSld>
+  <p:clrMapOvr>
+    <a:masterClrMapping/>
+  </p:clrMapOvr>
+</p:sld>
+</file>
+
+<file path=ppt/slides/slide27.xml><?xml version="1.0" encoding="utf-8"?>
+<p:sld xmlns:a="http://schemas.openxmlformats.org/drawingml/2006/main" xmlns:r="http://schemas.openxmlformats.org/officeDocument/2006/relationships" xmlns:p="http://schemas.openxmlformats.org/presentationml/2006/main">
+  <p:cSld name="Slide 27">
+    <p:spTree>
+      <p:nvGrpSpPr>
+        <p:cNvPr id="1" name=""/>
+        <p:cNvGrpSpPr/>
+        <p:nvPr/>
+      </p:nvGrpSpPr>
+      <p:grpSpPr>
+        <a:xfrm>
+          <a:off x="0" y="0"/>
+          <a:ext cx="0" cy="0"/>
+          <a:chOff x="0" y="0"/>
+          <a:chExt cx="0" cy="0"/>
+        </a:xfrm>
+      </p:grpSpPr>
+      <p:sp>
+        <p:nvSpPr>
+          <p:cNvPr id="2" name="Text 0"/>
+          <p:cNvSpPr/>
+          <p:nvPr/>
+        </p:nvSpPr>
+        <p:spPr>
+          <a:xfrm>
+            <a:off x="457200" y="320040"/>
+            <a:ext cx="11247120" cy="685800"/>
+          </a:xfrm>
+          <a:prstGeom prst="rect">
+            <a:avLst/>
+          </a:prstGeom>
+          <a:noFill/>
+          <a:ln/>
+        </p:spPr>
+        <p:txBody>
+          <a:bodyPr wrap="square" rtlCol="0" anchor="ctr"/>
+          <a:lstStyle/>
+          <a:p>
+            <a:pPr indent="0" marL="0">
+              <a:buNone/>
+            </a:pPr>
+            <a:r>
+              <a:rPr lang="en-US" sz="3200" b="1" dirty="0">
+                <a:solidFill>
+                  <a:srgbClr val="1E3AA0"/>
+                </a:solidFill>
+                <a:latin typeface="Calibri" pitchFamily="34" charset="0"/>
+                <a:ea typeface="Calibri" pitchFamily="34" charset="-122"/>
+                <a:cs typeface="Calibri" pitchFamily="34" charset="-120"/>
+              </a:rPr>
+              <a:t>Achievements</a:t>
+            </a:r>
+            <a:endParaRPr lang="en-US" sz="3200" dirty="0"/>
+          </a:p>
+        </p:txBody>
+      </p:sp>
+      <p:sp>
+        <p:nvSpPr>
+          <p:cNvPr id="3" name="Text 1"/>
+          <p:cNvSpPr/>
+          <p:nvPr/>
+        </p:nvSpPr>
+        <p:spPr>
+          <a:xfrm>
+            <a:off x="457200" y="960120"/>
+            <a:ext cx="11247120" cy="365760"/>
+          </a:xfrm>
+          <a:prstGeom prst="rect">
+            <a:avLst/>
+          </a:prstGeom>
+          <a:noFill/>
+          <a:ln/>
+        </p:spPr>
+        <p:txBody>
+          <a:bodyPr wrap="square" rtlCol="0" anchor="ctr"/>
+          <a:lstStyle/>
+          <a:p>
+            <a:pPr indent="0" marL="0">
+              <a:buNone/>
+            </a:pPr>
+            <a:r>
+              <a:rPr lang="en-US" sz="1500" i="1" dirty="0">
+                <a:solidFill>
+                  <a:srgbClr val="E63946"/>
+                </a:solidFill>
+                <a:latin typeface="Calibri" pitchFamily="34" charset="0"/>
+                <a:ea typeface="Calibri" pitchFamily="34" charset="-122"/>
+                <a:cs typeface="Calibri" pitchFamily="34" charset="-120"/>
+              </a:rPr>
+              <a:t>Six concrete deliverables</a:t>
+            </a:r>
+            <a:endParaRPr lang="en-US" sz="1500" dirty="0"/>
+          </a:p>
+        </p:txBody>
+      </p:sp>
+      <p:sp>
+        <p:nvSpPr>
+          <p:cNvPr id="4" name="Shape 2"/>
+          <p:cNvSpPr/>
+          <p:nvPr/>
+        </p:nvSpPr>
+        <p:spPr>
+          <a:xfrm>
+            <a:off x="548640" y="1645920"/>
+            <a:ext cx="3657600" cy="1828800"/>
+          </a:xfrm>
+          <a:prstGeom prst="roundRect">
+            <a:avLst>
+              <a:gd name="adj" fmla="val 6000"/>
+            </a:avLst>
+          </a:prstGeom>
+          <a:solidFill>
+            <a:srgbClr val="FFFFFF"/>
+          </a:solidFill>
+          <a:ln w="12700">
+            <a:solidFill>
+              <a:srgbClr val="1E3AA0"/>
+            </a:solidFill>
+            <a:prstDash val="solid"/>
+          </a:ln>
+        </p:spPr>
+      </p:sp>
+      <p:sp>
+        <p:nvSpPr>
+          <p:cNvPr id="5" name="Text 3"/>
+          <p:cNvSpPr/>
+          <p:nvPr/>
+        </p:nvSpPr>
+        <p:spPr>
+          <a:xfrm>
+            <a:off x="548640" y="1828800"/>
+            <a:ext cx="3657600" cy="914400"/>
+          </a:xfrm>
+          <a:prstGeom prst="rect">
+            <a:avLst/>
+          </a:prstGeom>
+          <a:noFill/>
+          <a:ln/>
+        </p:spPr>
+        <p:txBody>
+          <a:bodyPr wrap="square" rtlCol="0" anchor="ctr"/>
+          <a:lstStyle/>
+          <a:p>
+            <a:pPr algn="ctr" indent="0" marL="0">
+              <a:buNone/>
+            </a:pPr>
+            <a:r>
+              <a:rPr lang="en-US" sz="6000" b="1" dirty="0">
+                <a:solidFill>
+                  <a:srgbClr val="1E3AA0"/>
+                </a:solidFill>
+                <a:latin typeface="Calibri" pitchFamily="34" charset="0"/>
+                <a:ea typeface="Calibri" pitchFamily="34" charset="-122"/>
+                <a:cs typeface="Calibri" pitchFamily="34" charset="-120"/>
+              </a:rPr>
+              <a:t>53</a:t>
+            </a:r>
+            <a:endParaRPr lang="en-US" sz="6000" dirty="0"/>
+          </a:p>
+        </p:txBody>
+      </p:sp>
+      <p:sp>
+        <p:nvSpPr>
+          <p:cNvPr id="6" name="Text 4"/>
+          <p:cNvSpPr/>
+          <p:nvPr/>
+        </p:nvSpPr>
+        <p:spPr>
+          <a:xfrm>
+            <a:off x="548640" y="2926080"/>
+            <a:ext cx="3657600" cy="457200"/>
+          </a:xfrm>
+          <a:prstGeom prst="rect">
+            <a:avLst/>
+          </a:prstGeom>
+          <a:noFill/>
+          <a:ln/>
+        </p:spPr>
+        <p:txBody>
+          <a:bodyPr wrap="square" rtlCol="0" anchor="ctr"/>
+          <a:lstStyle/>
+          <a:p>
+            <a:pPr algn="ctr" indent="0" marL="0">
+              <a:buNone/>
+            </a:pPr>
+            <a:r>
+              <a:rPr lang="en-US" sz="1400" dirty="0">
+                <a:solidFill>
+                  <a:srgbClr val="1E293B"/>
+                </a:solidFill>
+                <a:latin typeface="Calibri" pitchFamily="34" charset="0"/>
+                <a:ea typeface="Calibri" pitchFamily="34" charset="-122"/>
+                <a:cs typeface="Calibri" pitchFamily="34" charset="-120"/>
+              </a:rPr>
+              <a:t>source files</a:t>
+            </a:r>
+            <a:endParaRPr lang="en-US" sz="1400" dirty="0"/>
+          </a:p>
+        </p:txBody>
+      </p:sp>
+      <p:sp>
+        <p:nvSpPr>
+          <p:cNvPr id="7" name="Shape 5"/>
+          <p:cNvSpPr/>
+          <p:nvPr/>
+        </p:nvSpPr>
+        <p:spPr>
+          <a:xfrm>
+            <a:off x="4434840" y="1645920"/>
+            <a:ext cx="3657600" cy="1828800"/>
+          </a:xfrm>
+          <a:prstGeom prst="roundRect">
+            <a:avLst>
+              <a:gd name="adj" fmla="val 6000"/>
+            </a:avLst>
+          </a:prstGeom>
+          <a:solidFill>
+            <a:srgbClr val="FFFFFF"/>
+          </a:solidFill>
+          <a:ln w="12700">
+            <a:solidFill>
+              <a:srgbClr val="1E3AA0"/>
+            </a:solidFill>
+            <a:prstDash val="solid"/>
+          </a:ln>
+        </p:spPr>
+      </p:sp>
+      <p:sp>
+        <p:nvSpPr>
+          <p:cNvPr id="8" name="Text 6"/>
+          <p:cNvSpPr/>
+          <p:nvPr/>
+        </p:nvSpPr>
+        <p:spPr>
+          <a:xfrm>
+            <a:off x="4434840" y="1828800"/>
+            <a:ext cx="3657600" cy="914400"/>
+          </a:xfrm>
+          <a:prstGeom prst="rect">
+            <a:avLst/>
+          </a:prstGeom>
+          <a:noFill/>
+          <a:ln/>
+        </p:spPr>
+        <p:txBody>
+          <a:bodyPr wrap="square" rtlCol="0" anchor="ctr"/>
+          <a:lstStyle/>
+          <a:p>
+            <a:pPr algn="ctr" indent="0" marL="0">
+              <a:buNone/>
+            </a:pPr>
+            <a:r>
+              <a:rPr lang="en-US" sz="6000" b="1" dirty="0">
+                <a:solidFill>
+                  <a:srgbClr val="1E3AA0"/>
+                </a:solidFill>
+                <a:latin typeface="Calibri" pitchFamily="34" charset="0"/>
+                <a:ea typeface="Calibri" pitchFamily="34" charset="-122"/>
+                <a:cs typeface="Calibri" pitchFamily="34" charset="-120"/>
+              </a:rPr>
+              <a:t>24</a:t>
+            </a:r>
+            <a:endParaRPr lang="en-US" sz="6000" dirty="0"/>
+          </a:p>
+        </p:txBody>
+      </p:sp>
+      <p:sp>
+        <p:nvSpPr>
+          <p:cNvPr id="9" name="Text 7"/>
+          <p:cNvSpPr/>
+          <p:nvPr/>
+        </p:nvSpPr>
+        <p:spPr>
+          <a:xfrm>
+            <a:off x="4434840" y="2926080"/>
+            <a:ext cx="3657600" cy="457200"/>
+          </a:xfrm>
+          <a:prstGeom prst="rect">
+            <a:avLst/>
+          </a:prstGeom>
+          <a:noFill/>
+          <a:ln/>
+        </p:spPr>
+        <p:txBody>
+          <a:bodyPr wrap="square" rtlCol="0" anchor="ctr"/>
+          <a:lstStyle/>
+          <a:p>
+            <a:pPr algn="ctr" indent="0" marL="0">
+              <a:buNone/>
+            </a:pPr>
+            <a:r>
+              <a:rPr lang="en-US" sz="1400" dirty="0">
+                <a:solidFill>
+                  <a:srgbClr val="1E293B"/>
+                </a:solidFill>
+                <a:latin typeface="Calibri" pitchFamily="34" charset="0"/>
+                <a:ea typeface="Calibri" pitchFamily="34" charset="-122"/>
+                <a:cs typeface="Calibri" pitchFamily="34" charset="-120"/>
+              </a:rPr>
+              <a:t>pages</a:t>
+            </a:r>
+            <a:endParaRPr lang="en-US" sz="1400" dirty="0"/>
+          </a:p>
+        </p:txBody>
+      </p:sp>
+      <p:sp>
+        <p:nvSpPr>
+          <p:cNvPr id="10" name="Shape 8"/>
+          <p:cNvSpPr/>
+          <p:nvPr/>
+        </p:nvSpPr>
+        <p:spPr>
+          <a:xfrm>
+            <a:off x="8321040" y="1645920"/>
+            <a:ext cx="3657600" cy="1828800"/>
+          </a:xfrm>
+          <a:prstGeom prst="roundRect">
+            <a:avLst>
+              <a:gd name="adj" fmla="val 6000"/>
+            </a:avLst>
+          </a:prstGeom>
+          <a:solidFill>
+            <a:srgbClr val="FFFFFF"/>
+          </a:solidFill>
+          <a:ln w="12700">
+            <a:solidFill>
+              <a:srgbClr val="1E3AA0"/>
+            </a:solidFill>
+            <a:prstDash val="solid"/>
+          </a:ln>
+        </p:spPr>
+      </p:sp>
+      <p:sp>
+        <p:nvSpPr>
+          <p:cNvPr id="11" name="Text 9"/>
+          <p:cNvSpPr/>
+          <p:nvPr/>
+        </p:nvSpPr>
+        <p:spPr>
+          <a:xfrm>
+            <a:off x="8321040" y="1828800"/>
+            <a:ext cx="3657600" cy="914400"/>
+          </a:xfrm>
+          <a:prstGeom prst="rect">
+            <a:avLst/>
+          </a:prstGeom>
+          <a:noFill/>
+          <a:ln/>
+        </p:spPr>
+        <p:txBody>
+          <a:bodyPr wrap="square" rtlCol="0" anchor="ctr"/>
+          <a:lstStyle/>
+          <a:p>
+            <a:pPr algn="ctr" indent="0" marL="0">
+              <a:buNone/>
+            </a:pPr>
+            <a:r>
+              <a:rPr lang="en-US" sz="6000" b="1" dirty="0">
+                <a:solidFill>
+                  <a:srgbClr val="1E3AA0"/>
+                </a:solidFill>
+                <a:latin typeface="Calibri" pitchFamily="34" charset="0"/>
+                <a:ea typeface="Calibri" pitchFamily="34" charset="-122"/>
+                <a:cs typeface="Calibri" pitchFamily="34" charset="-120"/>
+              </a:rPr>
+              <a:t>17</a:t>
+            </a:r>
+            <a:endParaRPr lang="en-US" sz="6000" dirty="0"/>
+          </a:p>
+        </p:txBody>
+      </p:sp>
+      <p:sp>
+        <p:nvSpPr>
+          <p:cNvPr id="12" name="Text 10"/>
+          <p:cNvSpPr/>
+          <p:nvPr/>
+        </p:nvSpPr>
+        <p:spPr>
+          <a:xfrm>
+            <a:off x="8321040" y="2926080"/>
+            <a:ext cx="3657600" cy="457200"/>
+          </a:xfrm>
+          <a:prstGeom prst="rect">
+            <a:avLst/>
+          </a:prstGeom>
+          <a:noFill/>
+          <a:ln/>
+        </p:spPr>
+        <p:txBody>
+          <a:bodyPr wrap="square" rtlCol="0" anchor="ctr"/>
+          <a:lstStyle/>
+          <a:p>
+            <a:pPr algn="ctr" indent="0" marL="0">
+              <a:buNone/>
+            </a:pPr>
+            <a:r>
+              <a:rPr lang="en-US" sz="1400" dirty="0">
+                <a:solidFill>
+                  <a:srgbClr val="1E293B"/>
+                </a:solidFill>
+                <a:latin typeface="Calibri" pitchFamily="34" charset="0"/>
+                <a:ea typeface="Calibri" pitchFamily="34" charset="-122"/>
+                <a:cs typeface="Calibri" pitchFamily="34" charset="-120"/>
+              </a:rPr>
+              <a:t>architectural &amp; UML diagrams</a:t>
+            </a:r>
+            <a:endParaRPr lang="en-US" sz="1400" dirty="0"/>
+          </a:p>
+        </p:txBody>
+      </p:sp>
+      <p:sp>
+        <p:nvSpPr>
+          <p:cNvPr id="13" name="Shape 11"/>
+          <p:cNvSpPr/>
+          <p:nvPr/>
+        </p:nvSpPr>
+        <p:spPr>
+          <a:xfrm>
+            <a:off x="548640" y="3749040"/>
+            <a:ext cx="3657600" cy="1828800"/>
+          </a:xfrm>
+          <a:prstGeom prst="roundRect">
+            <a:avLst>
+              <a:gd name="adj" fmla="val 6000"/>
+            </a:avLst>
+          </a:prstGeom>
+          <a:solidFill>
+            <a:srgbClr val="FFFFFF"/>
+          </a:solidFill>
+          <a:ln w="12700">
+            <a:solidFill>
+              <a:srgbClr val="1E3AA0"/>
+            </a:solidFill>
+            <a:prstDash val="solid"/>
+          </a:ln>
+        </p:spPr>
+      </p:sp>
+      <p:sp>
+        <p:nvSpPr>
+          <p:cNvPr id="14" name="Text 12"/>
+          <p:cNvSpPr/>
+          <p:nvPr/>
+        </p:nvSpPr>
+        <p:spPr>
+          <a:xfrm>
+            <a:off x="548640" y="3931920"/>
+            <a:ext cx="3657600" cy="914400"/>
+          </a:xfrm>
+          <a:prstGeom prst="rect">
+            <a:avLst/>
+          </a:prstGeom>
+          <a:noFill/>
+          <a:ln/>
+        </p:spPr>
+        <p:txBody>
+          <a:bodyPr wrap="square" rtlCol="0" anchor="ctr"/>
+          <a:lstStyle/>
+          <a:p>
+            <a:pPr algn="ctr" indent="0" marL="0">
+              <a:buNone/>
+            </a:pPr>
+            <a:r>
+              <a:rPr lang="en-US" sz="6000" b="1" dirty="0">
+                <a:solidFill>
+                  <a:srgbClr val="1E3AA0"/>
+                </a:solidFill>
+                <a:latin typeface="Calibri" pitchFamily="34" charset="0"/>
+                <a:ea typeface="Calibri" pitchFamily="34" charset="-122"/>
+                <a:cs typeface="Calibri" pitchFamily="34" charset="-120"/>
+              </a:rPr>
+              <a:t>6</a:t>
+            </a:r>
+            <a:endParaRPr lang="en-US" sz="6000" dirty="0"/>
+          </a:p>
+        </p:txBody>
+      </p:sp>
+      <p:sp>
+        <p:nvSpPr>
+          <p:cNvPr id="15" name="Text 13"/>
+          <p:cNvSpPr/>
+          <p:nvPr/>
+        </p:nvSpPr>
+        <p:spPr>
+          <a:xfrm>
+            <a:off x="548640" y="5029200"/>
+            <a:ext cx="3657600" cy="457200"/>
+          </a:xfrm>
+          <a:prstGeom prst="rect">
+            <a:avLst/>
+          </a:prstGeom>
+          <a:noFill/>
+          <a:ln/>
+        </p:spPr>
+        <p:txBody>
+          <a:bodyPr wrap="square" rtlCol="0" anchor="ctr"/>
+          <a:lstStyle/>
+          <a:p>
+            <a:pPr algn="ctr" indent="0" marL="0">
+              <a:buNone/>
+            </a:pPr>
+            <a:r>
+              <a:rPr lang="en-US" sz="1400" dirty="0">
+                <a:solidFill>
+                  <a:srgbClr val="1E293B"/>
+                </a:solidFill>
+                <a:latin typeface="Calibri" pitchFamily="34" charset="0"/>
+                <a:ea typeface="Calibri" pitchFamily="34" charset="-122"/>
+                <a:cs typeface="Calibri" pitchFamily="34" charset="-120"/>
+              </a:rPr>
+              <a:t>one-week sprints</a:t>
+            </a:r>
+            <a:endParaRPr lang="en-US" sz="1400" dirty="0"/>
+          </a:p>
+        </p:txBody>
+      </p:sp>
+      <p:sp>
+        <p:nvSpPr>
+          <p:cNvPr id="16" name="Shape 14"/>
+          <p:cNvSpPr/>
+          <p:nvPr/>
+        </p:nvSpPr>
+        <p:spPr>
+          <a:xfrm>
+            <a:off x="4434840" y="3749040"/>
+            <a:ext cx="3657600" cy="1828800"/>
+          </a:xfrm>
+          <a:prstGeom prst="roundRect">
+            <a:avLst>
+              <a:gd name="adj" fmla="val 6000"/>
+            </a:avLst>
+          </a:prstGeom>
+          <a:solidFill>
+            <a:srgbClr val="FFFFFF"/>
+          </a:solidFill>
+          <a:ln w="12700">
+            <a:solidFill>
+              <a:srgbClr val="1E3AA0"/>
+            </a:solidFill>
+            <a:prstDash val="solid"/>
+          </a:ln>
+        </p:spPr>
+      </p:sp>
+      <p:sp>
+        <p:nvSpPr>
+          <p:cNvPr id="17" name="Text 15"/>
+          <p:cNvSpPr/>
+          <p:nvPr/>
+        </p:nvSpPr>
+        <p:spPr>
+          <a:xfrm>
+            <a:off x="4434840" y="3931920"/>
+            <a:ext cx="3657600" cy="914400"/>
+          </a:xfrm>
+          <a:prstGeom prst="rect">
+            <a:avLst/>
+          </a:prstGeom>
+          <a:noFill/>
+          <a:ln/>
+        </p:spPr>
+        <p:txBody>
+          <a:bodyPr wrap="square" rtlCol="0" anchor="ctr"/>
+          <a:lstStyle/>
+          <a:p>
+            <a:pPr algn="ctr" indent="0" marL="0">
+              <a:buNone/>
+            </a:pPr>
+            <a:r>
+              <a:rPr lang="en-US" sz="6000" b="1" dirty="0">
+                <a:solidFill>
+                  <a:srgbClr val="1E3AA0"/>
+                </a:solidFill>
+                <a:latin typeface="Calibri" pitchFamily="34" charset="0"/>
+                <a:ea typeface="Calibri" pitchFamily="34" charset="-122"/>
+                <a:cs typeface="Calibri" pitchFamily="34" charset="-120"/>
+              </a:rPr>
+              <a:t>5</a:t>
+            </a:r>
+            <a:endParaRPr lang="en-US" sz="6000" dirty="0"/>
+          </a:p>
+        </p:txBody>
+      </p:sp>
+      <p:sp>
+        <p:nvSpPr>
+          <p:cNvPr id="18" name="Text 16"/>
+          <p:cNvSpPr/>
+          <p:nvPr/>
+        </p:nvSpPr>
+        <p:spPr>
+          <a:xfrm>
+            <a:off x="4434840" y="5029200"/>
+            <a:ext cx="3657600" cy="457200"/>
+          </a:xfrm>
+          <a:prstGeom prst="rect">
+            <a:avLst/>
+          </a:prstGeom>
+          <a:noFill/>
+          <a:ln/>
+        </p:spPr>
+        <p:txBody>
+          <a:bodyPr wrap="square" rtlCol="0" anchor="ctr"/>
+          <a:lstStyle/>
+          <a:p>
+            <a:pPr algn="ctr" indent="0" marL="0">
+              <a:buNone/>
+            </a:pPr>
+            <a:r>
+              <a:rPr lang="en-US" sz="1400" dirty="0">
+                <a:solidFill>
+                  <a:srgbClr val="1E293B"/>
+                </a:solidFill>
+                <a:latin typeface="Calibri" pitchFamily="34" charset="0"/>
+                <a:ea typeface="Calibri" pitchFamily="34" charset="-122"/>
+                <a:cs typeface="Calibri" pitchFamily="34" charset="-120"/>
+              </a:rPr>
+              <a:t>payment channels</a:t>
+            </a:r>
+            <a:endParaRPr lang="en-US" sz="1400" dirty="0"/>
+          </a:p>
+        </p:txBody>
+      </p:sp>
+      <p:sp>
+        <p:nvSpPr>
+          <p:cNvPr id="19" name="Shape 17"/>
+          <p:cNvSpPr/>
+          <p:nvPr/>
+        </p:nvSpPr>
+        <p:spPr>
+          <a:xfrm>
+            <a:off x="8321040" y="3749040"/>
+            <a:ext cx="3657600" cy="1828800"/>
+          </a:xfrm>
+          <a:prstGeom prst="roundRect">
+            <a:avLst>
+              <a:gd name="adj" fmla="val 6000"/>
+            </a:avLst>
+          </a:prstGeom>
+          <a:solidFill>
+            <a:srgbClr val="FFFFFF"/>
+          </a:solidFill>
+          <a:ln w="12700">
+            <a:solidFill>
+              <a:srgbClr val="1E3AA0"/>
+            </a:solidFill>
+            <a:prstDash val="solid"/>
+          </a:ln>
+        </p:spPr>
+      </p:sp>
+      <p:sp>
+        <p:nvSpPr>
+          <p:cNvPr id="20" name="Text 18"/>
+          <p:cNvSpPr/>
+          <p:nvPr/>
+        </p:nvSpPr>
+        <p:spPr>
+          <a:xfrm>
+            <a:off x="8321040" y="3931920"/>
+            <a:ext cx="3657600" cy="914400"/>
+          </a:xfrm>
+          <a:prstGeom prst="rect">
+            <a:avLst/>
+          </a:prstGeom>
+          <a:noFill/>
+          <a:ln/>
+        </p:spPr>
+        <p:txBody>
+          <a:bodyPr wrap="square" rtlCol="0" anchor="ctr"/>
+          <a:lstStyle/>
+          <a:p>
+            <a:pPr algn="ctr" indent="0" marL="0">
+              <a:buNone/>
+            </a:pPr>
+            <a:r>
+              <a:rPr lang="en-US" sz="6000" b="1" dirty="0">
+                <a:solidFill>
+                  <a:srgbClr val="1E3AA0"/>
+                </a:solidFill>
+                <a:latin typeface="Calibri" pitchFamily="34" charset="0"/>
+                <a:ea typeface="Calibri" pitchFamily="34" charset="-122"/>
+                <a:cs typeface="Calibri" pitchFamily="34" charset="-120"/>
+              </a:rPr>
+              <a:t>4</a:t>
+            </a:r>
+            <a:endParaRPr lang="en-US" sz="6000" dirty="0"/>
+          </a:p>
+        </p:txBody>
+      </p:sp>
+      <p:sp>
+        <p:nvSpPr>
+          <p:cNvPr id="21" name="Text 19"/>
+          <p:cNvSpPr/>
+          <p:nvPr/>
+        </p:nvSpPr>
+        <p:spPr>
+          <a:xfrm>
+            <a:off x="8321040" y="5029200"/>
+            <a:ext cx="3657600" cy="457200"/>
+          </a:xfrm>
+          <a:prstGeom prst="rect">
+            <a:avLst/>
+          </a:prstGeom>
+          <a:noFill/>
+          <a:ln/>
+        </p:spPr>
+        <p:txBody>
+          <a:bodyPr wrap="square" rtlCol="0" anchor="ctr"/>
+          <a:lstStyle/>
+          <a:p>
+            <a:pPr algn="ctr" indent="0" marL="0">
+              <a:buNone/>
+            </a:pPr>
+            <a:r>
+              <a:rPr lang="en-US" sz="1400" dirty="0">
+                <a:solidFill>
+                  <a:srgbClr val="1E293B"/>
+                </a:solidFill>
+                <a:latin typeface="Calibri" pitchFamily="34" charset="0"/>
+                <a:ea typeface="Calibri" pitchFamily="34" charset="-122"/>
+                <a:cs typeface="Calibri" pitchFamily="34" charset="-120"/>
+              </a:rPr>
+              <a:t>QR-verifiable artefacts</a:t>
+            </a:r>
+            <a:endParaRPr lang="en-US" sz="1400" dirty="0"/>
+          </a:p>
+        </p:txBody>
+      </p:sp>
+      <p:sp>
+        <p:nvSpPr>
+          <p:cNvPr id="25" name="Slide Number Placeholder 0"/>
+          <p:cNvSpPr>
+            <a:spLocks noGrp="1"/>
+          </p:cNvSpPr>
+          <p:nvPr>
+            <p:ph type="sldNum" sz="quarter" idx="4294967295"/>
+          </p:nvPr>
+        </p:nvSpPr>
+        <p:spPr>
+          <a:xfrm>
+            <a:off x="11612880" y="6537960"/>
+            <a:ext cx="457200" cy="274320"/>
+          </a:xfrm>
+          <a:prstGeom prst="rect">
+            <a:avLst/>
+          </a:prstGeom>
+          <a:extLst>
+            <a:ext uri="{C572A759-6A51-4108-AA02-DFA0A04FC94B}">
+              <ma14:wrappingTextBoxFlag xmlns:ma14="http://schemas.microsoft.com/office/mac/drawingml/2011/main" val="0"/>
+            </a:ext>
+          </a:extLst>
+        </p:spPr>
+        <p:txBody>
+          <a:bodyPr/>
+          <a:lstStyle>
+            <a:lvl1pPr>
+              <a:defRPr sz="1000">
+                <a:solidFill>
+                  <a:srgbClr val="FFFFFF"/>
+                </a:solidFill>
+                <a:latin typeface="Calibri"/>
+                <a:ea typeface="Calibri"/>
+                <a:cs typeface="Calibri"/>
+              </a:defRPr>
+            </a:lvl1pPr>
+          </a:lstStyle>
+          <a:p>
+            <a:pPr algn="r"/>
+            <a:fld id="{F7021451-1387-4CA6-816F-3879F97B5CBC}" type="slidenum">
+              <a:rPr b="0" lang="en-US"/>
+              <a:t>27</a:t>
+            </a:fld>
+            <a:endParaRPr lang="en-US"/>
+          </a:p>
+        </p:txBody>
+      </p:sp>
+    </p:spTree>
+  </p:cSld>
+  <p:clrMapOvr>
+    <a:masterClrMapping/>
+  </p:clrMapOvr>
+</p:sld>
+</file>
+
+<file path=ppt/slides/slide28.xml><?xml version="1.0" encoding="utf-8"?>
+<p:sld xmlns:a="http://schemas.openxmlformats.org/drawingml/2006/main" xmlns:r="http://schemas.openxmlformats.org/officeDocument/2006/relationships" xmlns:p="http://schemas.openxmlformats.org/presentationml/2006/main">
+  <p:cSld name="Slide 28">
+    <p:spTree>
+      <p:nvGrpSpPr>
+        <p:cNvPr id="1" name=""/>
+        <p:cNvGrpSpPr/>
+        <p:nvPr/>
+      </p:nvGrpSpPr>
+      <p:grpSpPr>
+        <a:xfrm>
+          <a:off x="0" y="0"/>
+          <a:ext cx="0" cy="0"/>
+          <a:chOff x="0" y="0"/>
+          <a:chExt cx="0" cy="0"/>
+        </a:xfrm>
+      </p:grpSpPr>
+      <p:sp>
+        <p:nvSpPr>
+          <p:cNvPr id="2" name="Text 0"/>
+          <p:cNvSpPr/>
+          <p:nvPr/>
+        </p:nvSpPr>
+        <p:spPr>
+          <a:xfrm>
+            <a:off x="457200" y="320040"/>
+            <a:ext cx="11247120" cy="685800"/>
+          </a:xfrm>
+          <a:prstGeom prst="rect">
+            <a:avLst/>
+          </a:prstGeom>
+          <a:noFill/>
+          <a:ln/>
+        </p:spPr>
+        <p:txBody>
+          <a:bodyPr wrap="square" rtlCol="0" anchor="ctr"/>
+          <a:lstStyle/>
+          <a:p>
+            <a:pPr indent="0" marL="0">
+              <a:buNone/>
+            </a:pPr>
+            <a:r>
+              <a:rPr lang="en-US" sz="3200" b="1" dirty="0">
+                <a:solidFill>
+                  <a:srgbClr val="1E3AA0"/>
+                </a:solidFill>
+                <a:latin typeface="Calibri" pitchFamily="34" charset="0"/>
+                <a:ea typeface="Calibri" pitchFamily="34" charset="-122"/>
+                <a:cs typeface="Calibri" pitchFamily="34" charset="-120"/>
+              </a:rPr>
+              <a:t>Future work</a:t>
+            </a:r>
+            <a:endParaRPr lang="en-US" sz="3200" dirty="0"/>
+          </a:p>
+        </p:txBody>
+      </p:sp>
+      <p:sp>
+        <p:nvSpPr>
+          <p:cNvPr id="3" name="Text 1"/>
+          <p:cNvSpPr/>
+          <p:nvPr/>
+        </p:nvSpPr>
+        <p:spPr>
+          <a:xfrm>
+            <a:off x="457200" y="960120"/>
+            <a:ext cx="11247120" cy="365760"/>
+          </a:xfrm>
+          <a:prstGeom prst="rect">
+            <a:avLst/>
+          </a:prstGeom>
+          <a:noFill/>
+          <a:ln/>
+        </p:spPr>
+        <p:txBody>
+          <a:bodyPr wrap="square" rtlCol="0" anchor="ctr"/>
+          <a:lstStyle/>
+          <a:p>
+            <a:pPr indent="0" marL="0">
+              <a:buNone/>
+            </a:pPr>
+            <a:r>
+              <a:rPr lang="en-US" sz="1500" i="1" dirty="0">
+                <a:solidFill>
+                  <a:srgbClr val="E63946"/>
+                </a:solidFill>
+                <a:latin typeface="Calibri" pitchFamily="34" charset="0"/>
+                <a:ea typeface="Calibri" pitchFamily="34" charset="-122"/>
+                <a:cs typeface="Calibri" pitchFamily="34" charset="-120"/>
+              </a:rPr>
+              <a:t>Beyond the bachelor defence</a:t>
+            </a:r>
+            <a:endParaRPr lang="en-US" sz="1500" dirty="0"/>
+          </a:p>
+        </p:txBody>
+      </p:sp>
+      <p:sp>
+        <p:nvSpPr>
+          <p:cNvPr id="4" name="Shape 2"/>
+          <p:cNvSpPr/>
+          <p:nvPr/>
+        </p:nvSpPr>
+        <p:spPr>
+          <a:xfrm>
+            <a:off x="548640" y="1645920"/>
+            <a:ext cx="5394960" cy="1097280"/>
+          </a:xfrm>
+          <a:prstGeom prst="roundRect">
+            <a:avLst>
+              <a:gd name="adj" fmla="val 8333"/>
+            </a:avLst>
+          </a:prstGeom>
+          <a:solidFill>
+            <a:srgbClr val="FFFFFF"/>
+          </a:solidFill>
+          <a:ln w="12700">
+            <a:solidFill>
+              <a:srgbClr val="1E3AA0"/>
+            </a:solidFill>
+            <a:prstDash val="solid"/>
+          </a:ln>
+        </p:spPr>
+      </p:sp>
+      <p:sp>
+        <p:nvSpPr>
+          <p:cNvPr id="5" name="Shape 3"/>
+          <p:cNvSpPr/>
+          <p:nvPr/>
+        </p:nvSpPr>
+        <p:spPr>
+          <a:xfrm>
+            <a:off x="548640" y="1645920"/>
+            <a:ext cx="457200" cy="1097280"/>
+          </a:xfrm>
+          <a:prstGeom prst="rect">
+            <a:avLst/>
+          </a:prstGeom>
+          <a:solidFill>
+            <a:srgbClr val="E63946"/>
+          </a:solidFill>
+          <a:ln/>
+        </p:spPr>
+      </p:sp>
+      <p:sp>
+        <p:nvSpPr>
+          <p:cNvPr id="6" name="Text 4"/>
+          <p:cNvSpPr/>
+          <p:nvPr/>
+        </p:nvSpPr>
+        <p:spPr>
+          <a:xfrm>
+            <a:off x="1188720" y="1737360"/>
+            <a:ext cx="4754880" cy="457200"/>
+          </a:xfrm>
+          <a:prstGeom prst="rect">
+            <a:avLst/>
+          </a:prstGeom>
+          <a:noFill/>
+          <a:ln/>
+        </p:spPr>
+        <p:txBody>
+          <a:bodyPr wrap="square" rtlCol="0" anchor="ctr"/>
+          <a:lstStyle/>
+          <a:p>
+            <a:pPr indent="0" marL="0">
+              <a:buNone/>
+            </a:pPr>
+            <a:r>
+              <a:rPr lang="en-US" sz="1600" b="1" dirty="0">
+                <a:solidFill>
+                  <a:srgbClr val="1E3AA0"/>
+                </a:solidFill>
+                <a:latin typeface="Calibri" pitchFamily="34" charset="0"/>
+                <a:ea typeface="Calibri" pitchFamily="34" charset="-122"/>
+                <a:cs typeface="Calibri" pitchFamily="34" charset="-120"/>
+              </a:rPr>
+              <a:t>Native mobile companions</a:t>
+            </a:r>
+            <a:endParaRPr lang="en-US" sz="1600" dirty="0"/>
+          </a:p>
+        </p:txBody>
+      </p:sp>
+      <p:sp>
+        <p:nvSpPr>
+          <p:cNvPr id="7" name="Text 5"/>
+          <p:cNvSpPr/>
+          <p:nvPr/>
+        </p:nvSpPr>
+        <p:spPr>
+          <a:xfrm>
+            <a:off x="1188720" y="2194560"/>
+            <a:ext cx="4754880" cy="457200"/>
+          </a:xfrm>
+          <a:prstGeom prst="rect">
+            <a:avLst/>
+          </a:prstGeom>
+          <a:noFill/>
+          <a:ln/>
+        </p:spPr>
+        <p:txBody>
+          <a:bodyPr wrap="square" rtlCol="0" anchor="ctr"/>
+          <a:lstStyle/>
+          <a:p>
+            <a:pPr indent="0" marL="0">
+              <a:buNone/>
+            </a:pPr>
+            <a:r>
+              <a:rPr lang="en-US" sz="1300" i="1" dirty="0">
+                <a:solidFill>
+                  <a:srgbClr val="1E293B"/>
+                </a:solidFill>
+                <a:latin typeface="Calibri" pitchFamily="34" charset="0"/>
+                <a:ea typeface="Calibri" pitchFamily="34" charset="-122"/>
+                <a:cs typeface="Calibri" pitchFamily="34" charset="-120"/>
+              </a:rPr>
+              <a:t>React Native · 80% shared code with web</a:t>
+            </a:r>
+            <a:endParaRPr lang="en-US" sz="1300" dirty="0"/>
+          </a:p>
+        </p:txBody>
+      </p:sp>
+      <p:sp>
+        <p:nvSpPr>
+          <p:cNvPr id="8" name="Shape 6"/>
+          <p:cNvSpPr/>
+          <p:nvPr/>
+        </p:nvSpPr>
+        <p:spPr>
+          <a:xfrm>
+            <a:off x="6309360" y="1645920"/>
+            <a:ext cx="5394960" cy="1097280"/>
+          </a:xfrm>
+          <a:prstGeom prst="roundRect">
+            <a:avLst>
+              <a:gd name="adj" fmla="val 8333"/>
+            </a:avLst>
+          </a:prstGeom>
+          <a:solidFill>
+            <a:srgbClr val="FFFFFF"/>
+          </a:solidFill>
+          <a:ln w="12700">
+            <a:solidFill>
+              <a:srgbClr val="1E3AA0"/>
+            </a:solidFill>
+            <a:prstDash val="solid"/>
+          </a:ln>
+        </p:spPr>
+      </p:sp>
+      <p:sp>
+        <p:nvSpPr>
+          <p:cNvPr id="9" name="Shape 7"/>
+          <p:cNvSpPr/>
+          <p:nvPr/>
+        </p:nvSpPr>
+        <p:spPr>
+          <a:xfrm>
+            <a:off x="6309360" y="1645920"/>
+            <a:ext cx="457200" cy="1097280"/>
+          </a:xfrm>
+          <a:prstGeom prst="rect">
+            <a:avLst/>
+          </a:prstGeom>
+          <a:solidFill>
+            <a:srgbClr val="E63946"/>
+          </a:solidFill>
+          <a:ln/>
+        </p:spPr>
+      </p:sp>
+      <p:sp>
+        <p:nvSpPr>
+          <p:cNvPr id="10" name="Text 8"/>
+          <p:cNvSpPr/>
+          <p:nvPr/>
+        </p:nvSpPr>
+        <p:spPr>
+          <a:xfrm>
+            <a:off x="6949440" y="1737360"/>
+            <a:ext cx="4754880" cy="457200"/>
+          </a:xfrm>
+          <a:prstGeom prst="rect">
+            <a:avLst/>
+          </a:prstGeom>
+          <a:noFill/>
+          <a:ln/>
+        </p:spPr>
+        <p:txBody>
+          <a:bodyPr wrap="square" rtlCol="0" anchor="ctr"/>
+          <a:lstStyle/>
+          <a:p>
+            <a:pPr indent="0" marL="0">
+              <a:buNone/>
+            </a:pPr>
+            <a:r>
+              <a:rPr lang="en-US" sz="1600" b="1" dirty="0">
+                <a:solidFill>
+                  <a:srgbClr val="1E3AA0"/>
+                </a:solidFill>
+                <a:latin typeface="Calibri" pitchFamily="34" charset="0"/>
+                <a:ea typeface="Calibri" pitchFamily="34" charset="-122"/>
+                <a:cs typeface="Calibri" pitchFamily="34" charset="-120"/>
+              </a:rPr>
+              <a:t>Biometric attendance</a:t>
+            </a:r>
+            <a:endParaRPr lang="en-US" sz="1600" dirty="0"/>
+          </a:p>
+        </p:txBody>
+      </p:sp>
+      <p:sp>
+        <p:nvSpPr>
+          <p:cNvPr id="11" name="Text 9"/>
+          <p:cNvSpPr/>
+          <p:nvPr/>
+        </p:nvSpPr>
+        <p:spPr>
+          <a:xfrm>
+            <a:off x="6949440" y="2194560"/>
+            <a:ext cx="4754880" cy="457200"/>
+          </a:xfrm>
+          <a:prstGeom prst="rect">
+            <a:avLst/>
+          </a:prstGeom>
+          <a:noFill/>
+          <a:ln/>
+        </p:spPr>
+        <p:txBody>
+          <a:bodyPr wrap="square" rtlCol="0" anchor="ctr"/>
+          <a:lstStyle/>
+          <a:p>
+            <a:pPr indent="0" marL="0">
+              <a:buNone/>
+            </a:pPr>
+            <a:r>
+              <a:rPr lang="en-US" sz="1300" i="1" dirty="0">
+                <a:solidFill>
+                  <a:srgbClr val="1E293B"/>
+                </a:solidFill>
+                <a:latin typeface="Calibri" pitchFamily="34" charset="0"/>
+                <a:ea typeface="Calibri" pitchFamily="34" charset="-122"/>
+                <a:cs typeface="Calibri" pitchFamily="34" charset="-120"/>
+              </a:rPr>
+              <a:t>Fingerprint roll-call on Android</a:t>
+            </a:r>
+            <a:endParaRPr lang="en-US" sz="1300" dirty="0"/>
+          </a:p>
+        </p:txBody>
+      </p:sp>
+      <p:sp>
+        <p:nvSpPr>
+          <p:cNvPr id="12" name="Shape 10"/>
+          <p:cNvSpPr/>
+          <p:nvPr/>
+        </p:nvSpPr>
+        <p:spPr>
+          <a:xfrm>
+            <a:off x="548640" y="3017520"/>
+            <a:ext cx="5394960" cy="1097280"/>
+          </a:xfrm>
+          <a:prstGeom prst="roundRect">
+            <a:avLst>
+              <a:gd name="adj" fmla="val 8333"/>
+            </a:avLst>
+          </a:prstGeom>
+          <a:solidFill>
+            <a:srgbClr val="FFFFFF"/>
+          </a:solidFill>
+          <a:ln w="12700">
+            <a:solidFill>
+              <a:srgbClr val="1E3AA0"/>
+            </a:solidFill>
+            <a:prstDash val="solid"/>
+          </a:ln>
+        </p:spPr>
+      </p:sp>
+      <p:sp>
+        <p:nvSpPr>
+          <p:cNvPr id="13" name="Shape 11"/>
+          <p:cNvSpPr/>
+          <p:nvPr/>
+        </p:nvSpPr>
+        <p:spPr>
+          <a:xfrm>
+            <a:off x="548640" y="3017520"/>
+            <a:ext cx="457200" cy="1097280"/>
+          </a:xfrm>
+          <a:prstGeom prst="rect">
+            <a:avLst/>
+          </a:prstGeom>
+          <a:solidFill>
+            <a:srgbClr val="E63946"/>
+          </a:solidFill>
+          <a:ln/>
+        </p:spPr>
+      </p:sp>
+      <p:sp>
+        <p:nvSpPr>
+          <p:cNvPr id="14" name="Text 12"/>
+          <p:cNvSpPr/>
+          <p:nvPr/>
+        </p:nvSpPr>
+        <p:spPr>
+          <a:xfrm>
+            <a:off x="1188720" y="3108960"/>
+            <a:ext cx="4754880" cy="457200"/>
+          </a:xfrm>
+          <a:prstGeom prst="rect">
+            <a:avLst/>
+          </a:prstGeom>
+          <a:noFill/>
+          <a:ln/>
+        </p:spPr>
+        <p:txBody>
+          <a:bodyPr wrap="square" rtlCol="0" anchor="ctr"/>
+          <a:lstStyle/>
+          <a:p>
+            <a:pPr indent="0" marL="0">
+              <a:buNone/>
+            </a:pPr>
+            <a:r>
+              <a:rPr lang="en-US" sz="1600" b="1" dirty="0">
+                <a:solidFill>
+                  <a:srgbClr val="1E3AA0"/>
+                </a:solidFill>
+                <a:latin typeface="Calibri" pitchFamily="34" charset="0"/>
+                <a:ea typeface="Calibri" pitchFamily="34" charset="-122"/>
+                <a:cs typeface="Calibri" pitchFamily="34" charset="-120"/>
+              </a:rPr>
+              <a:t>Live MoMo / OM integration</a:t>
+            </a:r>
+            <a:endParaRPr lang="en-US" sz="1600" dirty="0"/>
+          </a:p>
+        </p:txBody>
+      </p:sp>
+      <p:sp>
+        <p:nvSpPr>
+          <p:cNvPr id="15" name="Text 13"/>
+          <p:cNvSpPr/>
+          <p:nvPr/>
+        </p:nvSpPr>
+        <p:spPr>
+          <a:xfrm>
+            <a:off x="1188720" y="3566160"/>
+            <a:ext cx="4754880" cy="457200"/>
+          </a:xfrm>
+          <a:prstGeom prst="rect">
+            <a:avLst/>
+          </a:prstGeom>
+          <a:noFill/>
+          <a:ln/>
+        </p:spPr>
+        <p:txBody>
+          <a:bodyPr wrap="square" rtlCol="0" anchor="ctr"/>
+          <a:lstStyle/>
+          <a:p>
+            <a:pPr indent="0" marL="0">
+              <a:buNone/>
+            </a:pPr>
+            <a:r>
+              <a:rPr lang="en-US" sz="1300" i="1" dirty="0">
+                <a:solidFill>
+                  <a:srgbClr val="1E293B"/>
+                </a:solidFill>
+                <a:latin typeface="Calibri" pitchFamily="34" charset="0"/>
+                <a:ea typeface="Calibri" pitchFamily="34" charset="-122"/>
+                <a:cs typeface="Calibri" pitchFamily="34" charset="-120"/>
+              </a:rPr>
+              <a:t>Wire simulated flows to provider APIs</a:t>
+            </a:r>
+            <a:endParaRPr lang="en-US" sz="1300" dirty="0"/>
+          </a:p>
+        </p:txBody>
+      </p:sp>
+      <p:sp>
+        <p:nvSpPr>
+          <p:cNvPr id="16" name="Shape 14"/>
+          <p:cNvSpPr/>
+          <p:nvPr/>
+        </p:nvSpPr>
+        <p:spPr>
+          <a:xfrm>
+            <a:off x="6309360" y="3017520"/>
+            <a:ext cx="5394960" cy="1097280"/>
+          </a:xfrm>
+          <a:prstGeom prst="roundRect">
+            <a:avLst>
+              <a:gd name="adj" fmla="val 8333"/>
+            </a:avLst>
+          </a:prstGeom>
+          <a:solidFill>
+            <a:srgbClr val="FFFFFF"/>
+          </a:solidFill>
+          <a:ln w="12700">
+            <a:solidFill>
+              <a:srgbClr val="1E3AA0"/>
+            </a:solidFill>
+            <a:prstDash val="solid"/>
+          </a:ln>
+        </p:spPr>
+      </p:sp>
+      <p:sp>
+        <p:nvSpPr>
+          <p:cNvPr id="17" name="Shape 15"/>
+          <p:cNvSpPr/>
+          <p:nvPr/>
+        </p:nvSpPr>
+        <p:spPr>
+          <a:xfrm>
+            <a:off x="6309360" y="3017520"/>
+            <a:ext cx="457200" cy="1097280"/>
+          </a:xfrm>
+          <a:prstGeom prst="rect">
+            <a:avLst/>
+          </a:prstGeom>
+          <a:solidFill>
+            <a:srgbClr val="E63946"/>
+          </a:solidFill>
+          <a:ln/>
+        </p:spPr>
+      </p:sp>
+      <p:sp>
+        <p:nvSpPr>
+          <p:cNvPr id="18" name="Text 16"/>
+          <p:cNvSpPr/>
+          <p:nvPr/>
+        </p:nvSpPr>
+        <p:spPr>
+          <a:xfrm>
+            <a:off x="6949440" y="3108960"/>
+            <a:ext cx="4754880" cy="457200"/>
+          </a:xfrm>
+          <a:prstGeom prst="rect">
+            <a:avLst/>
+          </a:prstGeom>
+          <a:noFill/>
+          <a:ln/>
+        </p:spPr>
+        <p:txBody>
+          <a:bodyPr wrap="square" rtlCol="0" anchor="ctr"/>
+          <a:lstStyle/>
+          <a:p>
+            <a:pPr indent="0" marL="0">
+              <a:buNone/>
+            </a:pPr>
+            <a:r>
+              <a:rPr lang="en-US" sz="1600" b="1" dirty="0">
+                <a:solidFill>
+                  <a:srgbClr val="1E3AA0"/>
+                </a:solidFill>
+                <a:latin typeface="Calibri" pitchFamily="34" charset="0"/>
+                <a:ea typeface="Calibri" pitchFamily="34" charset="-122"/>
+                <a:cs typeface="Calibri" pitchFamily="34" charset="-120"/>
+              </a:rPr>
+              <a:t>Multi-tenant SaaS</a:t>
+            </a:r>
+            <a:endParaRPr lang="en-US" sz="1600" dirty="0"/>
+          </a:p>
+        </p:txBody>
+      </p:sp>
+      <p:sp>
+        <p:nvSpPr>
+          <p:cNvPr id="19" name="Text 17"/>
+          <p:cNvSpPr/>
+          <p:nvPr/>
+        </p:nvSpPr>
+        <p:spPr>
+          <a:xfrm>
+            <a:off x="6949440" y="3566160"/>
+            <a:ext cx="4754880" cy="457200"/>
+          </a:xfrm>
+          <a:prstGeom prst="rect">
+            <a:avLst/>
+          </a:prstGeom>
+          <a:noFill/>
+          <a:ln/>
+        </p:spPr>
+        <p:txBody>
+          <a:bodyPr wrap="square" rtlCol="0" anchor="ctr"/>
+          <a:lstStyle/>
+          <a:p>
+            <a:pPr indent="0" marL="0">
+              <a:buNone/>
+            </a:pPr>
+            <a:r>
+              <a:rPr lang="en-US" sz="1300" i="1" dirty="0">
+                <a:solidFill>
+                  <a:srgbClr val="1E293B"/>
+                </a:solidFill>
+                <a:latin typeface="Calibri" pitchFamily="34" charset="0"/>
+                <a:ea typeface="Calibri" pitchFamily="34" charset="-122"/>
+                <a:cs typeface="Calibri" pitchFamily="34" charset="-120"/>
+              </a:rPr>
+              <a:t>Per-institution branding, fees, timetables</a:t>
+            </a:r>
+            <a:endParaRPr lang="en-US" sz="1300" dirty="0"/>
+          </a:p>
+        </p:txBody>
+      </p:sp>
+      <p:sp>
+        <p:nvSpPr>
+          <p:cNvPr id="20" name="Shape 18"/>
+          <p:cNvSpPr/>
+          <p:nvPr/>
+        </p:nvSpPr>
+        <p:spPr>
+          <a:xfrm>
+            <a:off x="548640" y="4389120"/>
+            <a:ext cx="5394960" cy="1097280"/>
+          </a:xfrm>
+          <a:prstGeom prst="roundRect">
+            <a:avLst>
+              <a:gd name="adj" fmla="val 8333"/>
+            </a:avLst>
+          </a:prstGeom>
+          <a:solidFill>
+            <a:srgbClr val="FFFFFF"/>
+          </a:solidFill>
+          <a:ln w="12700">
+            <a:solidFill>
+              <a:srgbClr val="1E3AA0"/>
+            </a:solidFill>
+            <a:prstDash val="solid"/>
+          </a:ln>
+        </p:spPr>
+      </p:sp>
+      <p:sp>
+        <p:nvSpPr>
+          <p:cNvPr id="21" name="Shape 19"/>
+          <p:cNvSpPr/>
+          <p:nvPr/>
+        </p:nvSpPr>
+        <p:spPr>
+          <a:xfrm>
+            <a:off x="548640" y="4389120"/>
+            <a:ext cx="457200" cy="1097280"/>
+          </a:xfrm>
+          <a:prstGeom prst="rect">
+            <a:avLst/>
+          </a:prstGeom>
+          <a:solidFill>
+            <a:srgbClr val="E63946"/>
+          </a:solidFill>
+          <a:ln/>
+        </p:spPr>
+      </p:sp>
+      <p:sp>
+        <p:nvSpPr>
+          <p:cNvPr id="22" name="Text 20"/>
+          <p:cNvSpPr/>
+          <p:nvPr/>
+        </p:nvSpPr>
+        <p:spPr>
+          <a:xfrm>
+            <a:off x="1188720" y="4480560"/>
+            <a:ext cx="4754880" cy="457200"/>
+          </a:xfrm>
+          <a:prstGeom prst="rect">
+            <a:avLst/>
+          </a:prstGeom>
+          <a:noFill/>
+          <a:ln/>
+        </p:spPr>
+        <p:txBody>
+          <a:bodyPr wrap="square" rtlCol="0" anchor="ctr"/>
+          <a:lstStyle/>
+          <a:p>
+            <a:pPr indent="0" marL="0">
+              <a:buNone/>
+            </a:pPr>
+            <a:r>
+              <a:rPr lang="en-US" sz="1600" b="1" dirty="0">
+                <a:solidFill>
+                  <a:srgbClr val="1E3AA0"/>
+                </a:solidFill>
+                <a:latin typeface="Calibri" pitchFamily="34" charset="0"/>
+                <a:ea typeface="Calibri" pitchFamily="34" charset="-122"/>
+                <a:cs typeface="Calibri" pitchFamily="34" charset="-120"/>
+              </a:rPr>
+              <a:t>Exam scheduling</a:t>
+            </a:r>
+            <a:endParaRPr lang="en-US" sz="1600" dirty="0"/>
+          </a:p>
+        </p:txBody>
+      </p:sp>
+      <p:sp>
+        <p:nvSpPr>
+          <p:cNvPr id="23" name="Text 21"/>
+          <p:cNvSpPr/>
+          <p:nvPr/>
+        </p:nvSpPr>
+        <p:spPr>
+          <a:xfrm>
+            <a:off x="1188720" y="4937760"/>
+            <a:ext cx="4754880" cy="457200"/>
+          </a:xfrm>
+          <a:prstGeom prst="rect">
+            <a:avLst/>
+          </a:prstGeom>
+          <a:noFill/>
+          <a:ln/>
+        </p:spPr>
+        <p:txBody>
+          <a:bodyPr wrap="square" rtlCol="0" anchor="ctr"/>
+          <a:lstStyle/>
+          <a:p>
+            <a:pPr indent="0" marL="0">
+              <a:buNone/>
+            </a:pPr>
+            <a:r>
+              <a:rPr lang="en-US" sz="1300" i="1" dirty="0">
+                <a:solidFill>
+                  <a:srgbClr val="1E293B"/>
+                </a:solidFill>
+                <a:latin typeface="Calibri" pitchFamily="34" charset="0"/>
+                <a:ea typeface="Calibri" pitchFamily="34" charset="-122"/>
+                <a:cs typeface="Calibri" pitchFamily="34" charset="-120"/>
+              </a:rPr>
+              <a:t>Clash-free generation, room + invigilator</a:t>
+            </a:r>
+            <a:endParaRPr lang="en-US" sz="1300" dirty="0"/>
+          </a:p>
+        </p:txBody>
+      </p:sp>
+      <p:sp>
+        <p:nvSpPr>
+          <p:cNvPr id="24" name="Shape 22"/>
+          <p:cNvSpPr/>
+          <p:nvPr/>
+        </p:nvSpPr>
+        <p:spPr>
+          <a:xfrm>
+            <a:off x="6309360" y="4389120"/>
+            <a:ext cx="5394960" cy="1097280"/>
+          </a:xfrm>
+          <a:prstGeom prst="roundRect">
+            <a:avLst>
+              <a:gd name="adj" fmla="val 8333"/>
+            </a:avLst>
+          </a:prstGeom>
+          <a:solidFill>
+            <a:srgbClr val="FFFFFF"/>
+          </a:solidFill>
+          <a:ln w="12700">
+            <a:solidFill>
+              <a:srgbClr val="1E3AA0"/>
+            </a:solidFill>
+            <a:prstDash val="solid"/>
+          </a:ln>
+        </p:spPr>
+      </p:sp>
+      <p:sp>
+        <p:nvSpPr>
+          <p:cNvPr id="25" name="Shape 23"/>
+          <p:cNvSpPr/>
+          <p:nvPr/>
+        </p:nvSpPr>
+        <p:spPr>
+          <a:xfrm>
+            <a:off x="6309360" y="4389120"/>
+            <a:ext cx="457200" cy="1097280"/>
+          </a:xfrm>
+          <a:prstGeom prst="rect">
+            <a:avLst/>
+          </a:prstGeom>
+          <a:solidFill>
+            <a:srgbClr val="E63946"/>
+          </a:solidFill>
+          <a:ln/>
+        </p:spPr>
+      </p:sp>
+      <p:sp>
+        <p:nvSpPr>
+          <p:cNvPr id="26" name="Text 24"/>
+          <p:cNvSpPr/>
+          <p:nvPr/>
+        </p:nvSpPr>
+        <p:spPr>
+          <a:xfrm>
+            <a:off x="6949440" y="4480560"/>
+            <a:ext cx="4754880" cy="457200"/>
+          </a:xfrm>
+          <a:prstGeom prst="rect">
+            <a:avLst/>
+          </a:prstGeom>
+          <a:noFill/>
+          <a:ln/>
+        </p:spPr>
+        <p:txBody>
+          <a:bodyPr wrap="square" rtlCol="0" anchor="ctr"/>
+          <a:lstStyle/>
+          <a:p>
+            <a:pPr indent="0" marL="0">
+              <a:buNone/>
+            </a:pPr>
+            <a:r>
+              <a:rPr lang="en-US" sz="1600" b="1" dirty="0">
+                <a:solidFill>
+                  <a:srgbClr val="1E3AA0"/>
+                </a:solidFill>
+                <a:latin typeface="Calibri" pitchFamily="34" charset="0"/>
+                <a:ea typeface="Calibri" pitchFamily="34" charset="-122"/>
+                <a:cs typeface="Calibri" pitchFamily="34" charset="-120"/>
+              </a:rPr>
+              <a:t>Library management</a:t>
+            </a:r>
+            <a:endParaRPr lang="en-US" sz="1600" dirty="0"/>
+          </a:p>
+        </p:txBody>
+      </p:sp>
+      <p:sp>
+        <p:nvSpPr>
+          <p:cNvPr id="27" name="Text 25"/>
+          <p:cNvSpPr/>
+          <p:nvPr/>
+        </p:nvSpPr>
+        <p:spPr>
+          <a:xfrm>
+            <a:off x="6949440" y="4937760"/>
+            <a:ext cx="4754880" cy="457200"/>
+          </a:xfrm>
+          <a:prstGeom prst="rect">
+            <a:avLst/>
+          </a:prstGeom>
+          <a:noFill/>
+          <a:ln/>
+        </p:spPr>
+        <p:txBody>
+          <a:bodyPr wrap="square" rtlCol="0" anchor="ctr"/>
+          <a:lstStyle/>
+          <a:p>
+            <a:pPr indent="0" marL="0">
+              <a:buNone/>
+            </a:pPr>
+            <a:r>
+              <a:rPr lang="en-US" sz="1300" i="1" dirty="0">
+                <a:solidFill>
+                  <a:srgbClr val="1E293B"/>
+                </a:solidFill>
+                <a:latin typeface="Calibri" pitchFamily="34" charset="0"/>
+                <a:ea typeface="Calibri" pitchFamily="34" charset="-122"/>
+                <a:cs typeface="Calibri" pitchFamily="34" charset="-120"/>
+              </a:rPr>
+              <a:t>Catalogue, borrowing, reservations</a:t>
+            </a:r>
+            <a:endParaRPr lang="en-US" sz="1300" dirty="0"/>
+          </a:p>
+        </p:txBody>
+      </p:sp>
+      <p:sp>
+        <p:nvSpPr>
+          <p:cNvPr id="25" name="Slide Number Placeholder 0"/>
+          <p:cNvSpPr>
+            <a:spLocks noGrp="1"/>
+          </p:cNvSpPr>
+          <p:nvPr>
+            <p:ph type="sldNum" sz="quarter" idx="4294967295"/>
+          </p:nvPr>
+        </p:nvSpPr>
+        <p:spPr>
+          <a:xfrm>
+            <a:off x="11612880" y="6537960"/>
+            <a:ext cx="457200" cy="274320"/>
+          </a:xfrm>
+          <a:prstGeom prst="rect">
+            <a:avLst/>
+          </a:prstGeom>
+          <a:extLst>
+            <a:ext uri="{C572A759-6A51-4108-AA02-DFA0A04FC94B}">
+              <ma14:wrappingTextBoxFlag xmlns:ma14="http://schemas.microsoft.com/office/mac/drawingml/2011/main" val="0"/>
+            </a:ext>
+          </a:extLst>
+        </p:spPr>
+        <p:txBody>
+          <a:bodyPr/>
+          <a:lstStyle>
+            <a:lvl1pPr>
+              <a:defRPr sz="1000">
+                <a:solidFill>
+                  <a:srgbClr val="FFFFFF"/>
+                </a:solidFill>
+                <a:latin typeface="Calibri"/>
+                <a:ea typeface="Calibri"/>
+                <a:cs typeface="Calibri"/>
+              </a:defRPr>
+            </a:lvl1pPr>
+          </a:lstStyle>
+          <a:p>
+            <a:pPr algn="r"/>
+            <a:fld id="{F7021451-1387-4CA6-816F-3879F97B5CBC}" type="slidenum">
+              <a:rPr b="0" lang="en-US"/>
+              <a:t>28</a:t>
+            </a:fld>
+            <a:endParaRPr lang="en-US"/>
+          </a:p>
+        </p:txBody>
+      </p:sp>
+    </p:spTree>
+  </p:cSld>
+  <p:clrMapOvr>
+    <a:masterClrMapping/>
+  </p:clrMapOvr>
+</p:sld>
+</file>
+
+<file path=ppt/slides/slide29.xml><?xml version="1.0" encoding="utf-8"?>
+<p:sld xmlns:a="http://schemas.openxmlformats.org/drawingml/2006/main" xmlns:r="http://schemas.openxmlformats.org/officeDocument/2006/relationships" xmlns:p="http://schemas.openxmlformats.org/presentationml/2006/main">
+  <p:cSld name="Slide 29">
     <p:spTree>
       <p:nvGrpSpPr>
         <p:cNvPr id="1" name=""/>
